--- a/public/docs/URSlab-rakovodstvo.pptx
+++ b/public/docs/URSlab-rakovodstvo.pptx
@@ -129,40 +129,40 @@
   <p:extLst>
     <p:ext uri="{521415D9-36F7-43E2-AB2F-B90AF26B5E84}">
       <p14:sectionLst xmlns:p14="http://schemas.microsoft.com/office/powerpoint/2010/main">
-        <p14:section name="Въведение" id="{120c1d17-f2db-2073-8c50-ae59a5a8d91f}">
+        <p14:section name="Въведение" id="{721411b8-89e5-c2c6-43b6-313adbf828be}">
           <p14:sldIdLst>
             <p14:sldId id="256"/>
             <p14:sldId id="257"/>
           </p14:sldIdLst>
         </p14:section>
-        <p14:section name="Сайтът" id="{997f3bbb-1c77-4b0d-3c53-809670938644}">
+        <p14:section name="Сайтът" id="{7ce2eadf-d3ba-c533-85d9-1d59572a6637}">
           <p14:sldIdLst>
             <p14:sldId id="258"/>
             <p14:sldId id="259"/>
           </p14:sldIdLst>
         </p14:section>
-        <p14:section name="Изследвания" id="{781b1259-e056-f481-cd2b-0eccfa380917}">
+        <p14:section name="Изследвания" id="{b2fc624e-19a0-ddd6-c040-b809d59ba2c8}">
           <p14:sldIdLst>
             <p14:sldId id="260"/>
             <p14:sldId id="261"/>
             <p14:sldId id="262"/>
           </p14:sldIdLst>
         </p14:section>
-        <p14:section name="Публикации" id="{3c34a03b-d645-beec-e421-45668047e5a2}">
+        <p14:section name="Публикации" id="{bd706a9b-2105-6646-5051-ffb98a3e6e74}">
           <p14:sldIdLst>
             <p14:sldId id="263"/>
             <p14:sldId id="264"/>
             <p14:sldId id="265"/>
           </p14:sldIdLst>
         </p14:section>
-        <p14:section name="Състав" id="{9cf2654e-d961-33ad-8e64-ee49964f9e4a}">
+        <p14:section name="Състав" id="{c10304f3-b06b-1acb-0d2b-2b02d99cc08d}">
           <p14:sldIdLst>
             <p14:sldId id="266"/>
             <p14:sldId id="267"/>
             <p14:sldId id="268"/>
           </p14:sldIdLst>
         </p14:section>
-        <p14:section name="Нова публикация" id="{dd742b0e-81c4-f64a-7fb3-6efff629d9ca}">
+        <p14:section name="Нова публикация" id="{2df27a66-d5e5-50b6-922f-30d6fe13dd7c}">
           <p14:sldIdLst>
             <p14:sldId id="269"/>
             <p14:sldId id="270"/>
@@ -172,7 +172,7 @@
             <p14:sldId id="274"/>
           </p14:sldIdLst>
         </p14:section>
-        <p14:section name="Обновяване" id="{f916d27a-b45d-2fb4-39f9-5b298396393f}">
+        <p14:section name="Обновяване" id="{c506b2e4-3b1f-08aa-55af-e4daa66e07bb}">
           <p14:sldIdLst>
             <p14:sldId id="275"/>
             <p14:sldId id="276"/>
@@ -5284,7 +5284,7 @@
                   <a:schemeClr val="accent6"/>
                 </a:solidFill>
               </a:rPr>
-              <a:t>От формата на сайта до одобрението — пет стъпки</a:t>
+              <a:t>От формата на сайта до публикуването — пет стъпки</a:t>
             </a:r>
             <a:endParaRPr lang="en-US" sz="1500" dirty="0"/>
           </a:p>
@@ -6175,7 +6175,7 @@
                   <a:schemeClr val="tx2"/>
                 </a:solidFill>
               </a:rPr>
-              <a:t>до 1 мин.: ✅ приета или ❌ с грешките</a:t>
+              <a:t>DOI / ISSN / ISBN в регистрите: ✅ или ❌</a:t>
             </a:r>
             <a:endParaRPr lang="en-US" sz="1100" dirty="0"/>
           </a:p>
@@ -6357,7 +6357,7 @@
                   <a:schemeClr val="tx2"/>
                 </a:solidFill>
               </a:rPr>
-              <a:t>ръководителят натиска „Merge“ → сайтът се обновява</a:t>
+              <a:t>автоматично, до около минута</a:t>
             </a:r>
             <a:endParaRPr lang="en-US" sz="1100" dirty="0"/>
           </a:p>
@@ -6676,7 +6676,7 @@
                 <a:gridCol w="1143000"/>
                 <a:gridCol w="2651760"/>
               </a:tblGrid>
-              <a:tr h="329184">
+              <a:tr h="292608">
                 <a:tc>
                   <a:txBody>
                     <a:bodyPr/>
@@ -6800,7 +6800,7 @@
                   </a:tcPr>
                 </a:tc>
               </a:tr>
-              <a:tr h="329184">
+              <a:tr h="292608">
                 <a:tc>
                   <a:txBody>
                     <a:bodyPr/>
@@ -6924,7 +6924,7 @@
                   </a:tcPr>
                 </a:tc>
               </a:tr>
-              <a:tr h="329184">
+              <a:tr h="292608">
                 <a:tc>
                   <a:txBody>
                     <a:bodyPr/>
@@ -7048,7 +7048,7 @@
                   </a:tcPr>
                 </a:tc>
               </a:tr>
-              <a:tr h="329184">
+              <a:tr h="292608">
                 <a:tc>
                   <a:txBody>
                     <a:bodyPr/>
@@ -7172,7 +7172,7 @@
                   </a:tcPr>
                 </a:tc>
               </a:tr>
-              <a:tr h="329184">
+              <a:tr h="292608">
                 <a:tc>
                   <a:txBody>
                     <a:bodyPr/>
@@ -7187,7 +7187,7 @@
                             <a:srgbClr val="0B1622"/>
                           </a:solidFill>
                         </a:rPr>
-                        <a:t>Категория *</a:t>
+                        <a:t>Състояние *</a:t>
                       </a:r>
                       <a:endParaRPr lang="en-US" sz="1000" dirty="0"/>
                     </a:p>
@@ -7248,7 +7248,7 @@
                             <a:srgbClr val="0B1622"/>
                           </a:solidFill>
                         </a:rPr>
-                        <a:t>Q1–Q4, SJR без квартил, ERIH+, издателство…</a:t>
+                        <a:t>публикувана / под печат / подадена</a:t>
                       </a:r>
                       <a:endParaRPr lang="en-US" sz="1000" dirty="0"/>
                     </a:p>
@@ -7296,7 +7296,7 @@
                   </a:tcPr>
                 </a:tc>
               </a:tr>
-              <a:tr h="329184">
+              <a:tr h="292608">
                 <a:tc>
                   <a:txBody>
                     <a:bodyPr/>
@@ -7311,7 +7311,7 @@
                             <a:srgbClr val="0B1622"/>
                           </a:solidFill>
                         </a:rPr>
-                        <a:t>Списание *</a:t>
+                        <a:t>Категория *</a:t>
                       </a:r>
                       <a:endParaRPr lang="en-US" sz="1000" dirty="0"/>
                     </a:p>
@@ -7372,7 +7372,7 @@
                             <a:srgbClr val="0B1622"/>
                           </a:solidFill>
                         </a:rPr>
-                        <a:t>пълно име; за книги — „Издател“</a:t>
+                        <a:t>Q1–Q4, SJR…; непубликувана → „Подадени“</a:t>
                       </a:r>
                       <a:endParaRPr lang="en-US" sz="1000" dirty="0"/>
                     </a:p>
@@ -7420,7 +7420,7 @@
                   </a:tcPr>
                 </a:tc>
               </a:tr>
-              <a:tr h="329184">
+              <a:tr h="292608">
                 <a:tc>
                   <a:txBody>
                     <a:bodyPr/>
@@ -7435,7 +7435,7 @@
                             <a:srgbClr val="0B1622"/>
                           </a:solidFill>
                         </a:rPr>
-                        <a:t>Том, брой, стр.</a:t>
+                        <a:t>Списание *</a:t>
                       </a:r>
                       <a:endParaRPr lang="en-US" sz="1000" dirty="0"/>
                     </a:p>
@@ -7496,7 +7496,7 @@
                             <a:srgbClr val="0B1622"/>
                           </a:solidFill>
                         </a:rPr>
-                        <a:t>само числата; „45–67“ или № на статия</a:t>
+                        <a:t>пълно име; за книги — „Издател“</a:t>
                       </a:r>
                       <a:endParaRPr lang="en-US" sz="1000" dirty="0"/>
                     </a:p>
@@ -7544,7 +7544,7 @@
                   </a:tcPr>
                 </a:tc>
               </a:tr>
-              <a:tr h="329184">
+              <a:tr h="292608">
                 <a:tc>
                   <a:txBody>
                     <a:bodyPr/>
@@ -7559,7 +7559,7 @@
                             <a:srgbClr val="0B1622"/>
                           </a:solidFill>
                         </a:rPr>
-                        <a:t>DOI / ISBN</a:t>
+                        <a:t>Том, брой, стр.</a:t>
                       </a:r>
                       <a:endParaRPr lang="en-US" sz="1000" dirty="0"/>
                     </a:p>
@@ -7620,7 +7620,7 @@
                             <a:srgbClr val="0B1622"/>
                           </a:solidFill>
                         </a:rPr>
-                        <a:t>напр. 10.3390/…; ISBN с 10 или 13 цифри</a:t>
+                        <a:t>само числата; „45–67“ или № на статия</a:t>
                       </a:r>
                       <a:endParaRPr lang="en-US" sz="1000" dirty="0"/>
                     </a:p>
@@ -7668,7 +7668,255 @@
                   </a:tcPr>
                 </a:tc>
               </a:tr>
-              <a:tr h="329184">
+              <a:tr h="292608">
+                <a:tc>
+                  <a:txBody>
+                    <a:bodyPr/>
+                    <a:lstStyle/>
+                    <a:p>
+                      <a:pPr indent="0" marL="0">
+                        <a:buNone/>
+                      </a:pPr>
+                      <a:r>
+                        <a:rPr lang="en-US" sz="1000" b="1" dirty="0">
+                          <a:solidFill>
+                            <a:srgbClr val="0B1622"/>
+                          </a:solidFill>
+                        </a:rPr>
+                        <a:t>DOI</a:t>
+                      </a:r>
+                      <a:endParaRPr lang="en-US" sz="1000" dirty="0"/>
+                    </a:p>
+                  </a:txBody>
+                  <a:tcPr marL="63500" marR="63500" marT="25400" marB="25400" anchor="ctr">
+                    <a:lnL w="6350" cap="flat" cmpd="sng" algn="ctr">
+                      <a:solidFill>
+                        <a:srgbClr val="DDE2E6"/>
+                      </a:solidFill>
+                      <a:prstDash val="solid"/>
+                      <a:round/>
+                      <a:headEnd type="none" w="med" len="med"/>
+                      <a:tailEnd type="none" w="med" len="med"/>
+                    </a:lnL>
+                    <a:lnR w="6350" cap="flat" cmpd="sng" algn="ctr">
+                      <a:solidFill>
+                        <a:srgbClr val="DDE2E6"/>
+                      </a:solidFill>
+                      <a:prstDash val="solid"/>
+                      <a:round/>
+                      <a:headEnd type="none" w="med" len="med"/>
+                      <a:tailEnd type="none" w="med" len="med"/>
+                    </a:lnR>
+                    <a:lnT w="6350" cap="flat" cmpd="sng" algn="ctr">
+                      <a:solidFill>
+                        <a:srgbClr val="DDE2E6"/>
+                      </a:solidFill>
+                      <a:prstDash val="solid"/>
+                      <a:round/>
+                      <a:headEnd type="none" w="med" len="med"/>
+                      <a:tailEnd type="none" w="med" len="med"/>
+                    </a:lnT>
+                    <a:lnB w="6350" cap="flat" cmpd="sng" algn="ctr">
+                      <a:solidFill>
+                        <a:srgbClr val="DDE2E6"/>
+                      </a:solidFill>
+                      <a:prstDash val="solid"/>
+                      <a:round/>
+                      <a:headEnd type="none" w="med" len="med"/>
+                      <a:tailEnd type="none" w="med" len="med"/>
+                    </a:lnB>
+                    <a:solidFill>
+                      <a:srgbClr val="F3F5F7"/>
+                    </a:solidFill>
+                  </a:tcPr>
+                </a:tc>
+                <a:tc>
+                  <a:txBody>
+                    <a:bodyPr/>
+                    <a:lstStyle/>
+                    <a:p>
+                      <a:pPr indent="0" marL="0">
+                        <a:buNone/>
+                      </a:pPr>
+                      <a:r>
+                        <a:rPr lang="en-US" sz="1000" dirty="0">
+                          <a:solidFill>
+                            <a:srgbClr val="0B1622"/>
+                          </a:solidFill>
+                        </a:rPr>
+                        <a:t>напр. 10.3390/… — проверява се в doi.org</a:t>
+                      </a:r>
+                      <a:endParaRPr lang="en-US" sz="1000" dirty="0"/>
+                    </a:p>
+                  </a:txBody>
+                  <a:tcPr marL="63500" marR="63500" marT="25400" marB="25400" anchor="ctr">
+                    <a:lnL w="6350" cap="flat" cmpd="sng" algn="ctr">
+                      <a:solidFill>
+                        <a:srgbClr val="DDE2E6"/>
+                      </a:solidFill>
+                      <a:prstDash val="solid"/>
+                      <a:round/>
+                      <a:headEnd type="none" w="med" len="med"/>
+                      <a:tailEnd type="none" w="med" len="med"/>
+                    </a:lnL>
+                    <a:lnR w="6350" cap="flat" cmpd="sng" algn="ctr">
+                      <a:solidFill>
+                        <a:srgbClr val="DDE2E6"/>
+                      </a:solidFill>
+                      <a:prstDash val="solid"/>
+                      <a:round/>
+                      <a:headEnd type="none" w="med" len="med"/>
+                      <a:tailEnd type="none" w="med" len="med"/>
+                    </a:lnR>
+                    <a:lnT w="6350" cap="flat" cmpd="sng" algn="ctr">
+                      <a:solidFill>
+                        <a:srgbClr val="DDE2E6"/>
+                      </a:solidFill>
+                      <a:prstDash val="solid"/>
+                      <a:round/>
+                      <a:headEnd type="none" w="med" len="med"/>
+                      <a:tailEnd type="none" w="med" len="med"/>
+                    </a:lnT>
+                    <a:lnB w="6350" cap="flat" cmpd="sng" algn="ctr">
+                      <a:solidFill>
+                        <a:srgbClr val="DDE2E6"/>
+                      </a:solidFill>
+                      <a:prstDash val="solid"/>
+                      <a:round/>
+                      <a:headEnd type="none" w="med" len="med"/>
+                      <a:tailEnd type="none" w="med" len="med"/>
+                    </a:lnB>
+                    <a:solidFill>
+                      <a:srgbClr val="F3F5F7"/>
+                    </a:solidFill>
+                  </a:tcPr>
+                </a:tc>
+              </a:tr>
+              <a:tr h="292608">
+                <a:tc>
+                  <a:txBody>
+                    <a:bodyPr/>
+                    <a:lstStyle/>
+                    <a:p>
+                      <a:pPr indent="0" marL="0">
+                        <a:buNone/>
+                      </a:pPr>
+                      <a:r>
+                        <a:rPr lang="en-US" sz="1000" b="1" dirty="0">
+                          <a:solidFill>
+                            <a:srgbClr val="0B1622"/>
+                          </a:solidFill>
+                        </a:rPr>
+                        <a:t>ISSN / ISBN **</a:t>
+                      </a:r>
+                      <a:endParaRPr lang="en-US" sz="1000" dirty="0"/>
+                    </a:p>
+                  </a:txBody>
+                  <a:tcPr marL="63500" marR="63500" marT="25400" marB="25400" anchor="ctr">
+                    <a:lnL w="6350" cap="flat" cmpd="sng" algn="ctr">
+                      <a:solidFill>
+                        <a:srgbClr val="DDE2E6"/>
+                      </a:solidFill>
+                      <a:prstDash val="solid"/>
+                      <a:round/>
+                      <a:headEnd type="none" w="med" len="med"/>
+                      <a:tailEnd type="none" w="med" len="med"/>
+                    </a:lnL>
+                    <a:lnR w="6350" cap="flat" cmpd="sng" algn="ctr">
+                      <a:solidFill>
+                        <a:srgbClr val="DDE2E6"/>
+                      </a:solidFill>
+                      <a:prstDash val="solid"/>
+                      <a:round/>
+                      <a:headEnd type="none" w="med" len="med"/>
+                      <a:tailEnd type="none" w="med" len="med"/>
+                    </a:lnR>
+                    <a:lnT w="6350" cap="flat" cmpd="sng" algn="ctr">
+                      <a:solidFill>
+                        <a:srgbClr val="DDE2E6"/>
+                      </a:solidFill>
+                      <a:prstDash val="solid"/>
+                      <a:round/>
+                      <a:headEnd type="none" w="med" len="med"/>
+                      <a:tailEnd type="none" w="med" len="med"/>
+                    </a:lnT>
+                    <a:lnB w="6350" cap="flat" cmpd="sng" algn="ctr">
+                      <a:solidFill>
+                        <a:srgbClr val="DDE2E6"/>
+                      </a:solidFill>
+                      <a:prstDash val="solid"/>
+                      <a:round/>
+                      <a:headEnd type="none" w="med" len="med"/>
+                      <a:tailEnd type="none" w="med" len="med"/>
+                    </a:lnB>
+                    <a:solidFill>
+                      <a:srgbClr val="FFFFFF"/>
+                    </a:solidFill>
+                  </a:tcPr>
+                </a:tc>
+                <a:tc>
+                  <a:txBody>
+                    <a:bodyPr/>
+                    <a:lstStyle/>
+                    <a:p>
+                      <a:pPr indent="0" marL="0">
+                        <a:buNone/>
+                      </a:pPr>
+                      <a:r>
+                        <a:rPr lang="en-US" sz="1000" dirty="0">
+                          <a:solidFill>
+                            <a:srgbClr val="0B1622"/>
+                          </a:solidFill>
+                        </a:rPr>
+                        <a:t>без DOI: вид + номер; проверява се в регистрите</a:t>
+                      </a:r>
+                      <a:endParaRPr lang="en-US" sz="1000" dirty="0"/>
+                    </a:p>
+                  </a:txBody>
+                  <a:tcPr marL="63500" marR="63500" marT="25400" marB="25400" anchor="ctr">
+                    <a:lnL w="6350" cap="flat" cmpd="sng" algn="ctr">
+                      <a:solidFill>
+                        <a:srgbClr val="DDE2E6"/>
+                      </a:solidFill>
+                      <a:prstDash val="solid"/>
+                      <a:round/>
+                      <a:headEnd type="none" w="med" len="med"/>
+                      <a:tailEnd type="none" w="med" len="med"/>
+                    </a:lnL>
+                    <a:lnR w="6350" cap="flat" cmpd="sng" algn="ctr">
+                      <a:solidFill>
+                        <a:srgbClr val="DDE2E6"/>
+                      </a:solidFill>
+                      <a:prstDash val="solid"/>
+                      <a:round/>
+                      <a:headEnd type="none" w="med" len="med"/>
+                      <a:tailEnd type="none" w="med" len="med"/>
+                    </a:lnR>
+                    <a:lnT w="6350" cap="flat" cmpd="sng" algn="ctr">
+                      <a:solidFill>
+                        <a:srgbClr val="DDE2E6"/>
+                      </a:solidFill>
+                      <a:prstDash val="solid"/>
+                      <a:round/>
+                      <a:headEnd type="none" w="med" len="med"/>
+                      <a:tailEnd type="none" w="med" len="med"/>
+                    </a:lnT>
+                    <a:lnB w="6350" cap="flat" cmpd="sng" algn="ctr">
+                      <a:solidFill>
+                        <a:srgbClr val="DDE2E6"/>
+                      </a:solidFill>
+                      <a:prstDash val="solid"/>
+                      <a:round/>
+                      <a:headEnd type="none" w="med" len="med"/>
+                      <a:tailEnd type="none" w="med" len="med"/>
+                    </a:lnB>
+                    <a:solidFill>
+                      <a:srgbClr val="FFFFFF"/>
+                    </a:solidFill>
+                  </a:tcPr>
+                </a:tc>
+              </a:tr>
+              <a:tr h="292608">
                 <a:tc>
                   <a:txBody>
                     <a:bodyPr/>
@@ -7792,7 +8040,7 @@
                   </a:tcPr>
                 </a:tc>
               </a:tr>
-              <a:tr h="329184">
+              <a:tr h="292608">
                 <a:tc>
                   <a:txBody>
                     <a:bodyPr/>
@@ -9262,7 +9510,7 @@
                   <a:schemeClr val="tx1"/>
                 </a:solidFill>
               </a:rPr>
-              <a:t>В GitHub: заявка, отговор, одобрение</a:t>
+              <a:t>В GitHub: заявка, проверка, публикуване</a:t>
             </a:r>
             <a:endParaRPr lang="en-US" sz="2600" dirty="0"/>
           </a:p>
@@ -9558,7 +9806,7 @@
                   <a:schemeClr val="tx1"/>
                 </a:solidFill>
               </a:rPr>
-              <a:t>Автоматичната проверка добавя публикацията и отваря Pull Request „Нова публикация: …“.</a:t>
+              <a:t>DOI, ISSN или ISBN е намерен в регистрите (doi.org, Crossref, НАЦИД НРС, ISSN Portal, Open Library) — публикацията излиза на сайта сама.</a:t>
             </a:r>
             <a:endParaRPr lang="en-US" sz="1200" dirty="0"/>
           </a:p>
@@ -9706,7 +9954,7 @@
                   <a:schemeClr val="tx1"/>
                 </a:solidFill>
               </a:rPr>
-              <a:t>В заявката има списък с грешките и връзка „Поправете във формата“ — данните са попълнени. Поправете и „Запиши“; старата заявка се затваря сама.</a:t>
+              <a:t>Грешка или номер, който не е в регистрите — списък и връзка „Поправете във формата“ (данните са попълнени). Поправете и „Запиши“ отново.</a:t>
             </a:r>
             <a:endParaRPr lang="en-US" sz="1200" dirty="0"/>
           </a:p>
@@ -9818,7 +10066,7 @@
                   <a:schemeClr val="tx1"/>
                 </a:solidFill>
               </a:rPr>
-              <a:t>Merge</a:t>
+              <a:t>Контрол</a:t>
             </a:r>
             <a:endParaRPr lang="en-US" sz="1500" dirty="0"/>
           </a:p>
@@ -9854,7 +10102,7 @@
                   <a:schemeClr val="tx1"/>
                 </a:solidFill>
               </a:rPr>
-              <a:t>Ръководителят преглежда Pull Request-а и натиска „Merge“ (отметка „bypass rules“).</a:t>
+              <a:t>Всяко публикуване е в дневник; ръководителят получава уведомление и може да го върне с едно щракване (отметка „Върни“).</a:t>
             </a:r>
             <a:endParaRPr lang="en-US" sz="1200" dirty="0"/>
           </a:p>

--- a/public/docs/URSlab-rakovodstvo.pptx
+++ b/public/docs/URSlab-rakovodstvo.pptx
@@ -4595,7 +4595,7 @@
                   <a:schemeClr val="tx1"/>
                 </a:solidFill>
               </a:rPr>
-              <a:t>„+ Нова публикация“ — само за членове с GitHub акаунт</a:t>
+              <a:t>„+ Нова публикация“ и цитирания — само за членове с GitHub акаунт</a:t>
             </a:r>
             <a:endParaRPr lang="en-US" sz="1350" dirty="0"/>
           </a:p>
@@ -4996,7 +4996,7 @@
                   <a:schemeClr val="tx1"/>
                 </a:solidFill>
               </a:rPr>
-              <a:t>Категориите </a:t>
+              <a:t>Цитирания X </a:t>
             </a:r>
             <a:pPr indent="0" marL="0">
               <a:spcAft>
@@ -5010,7 +5010,7 @@
                   <a:schemeClr val="tx1"/>
                 </a:solidFill>
               </a:rPr>
-              <a:t>включват и „Подадени / под печат“ и „Софтуер“.</a:t>
+              <a:t>— точките по НАЦИД под годината на всяка публикация и сборът в обобщението. Въвеждане и търсене — „Помощ: цитирания“ (за членовете с акаунт).</a:t>
             </a:r>
             <a:endParaRPr lang="en-US" sz="1250" dirty="0"/>
           </a:p>
@@ -10714,7 +10714,7 @@
                   <a:schemeClr val="tx2"/>
                 </a:solidFill>
               </a:rPr>
-              <a:t>Карти, „Обобщен отчет“ за всеки член</a:t>
+              <a:t>Карти, „Обобщен отчет“, цитирания</a:t>
             </a:r>
             <a:endParaRPr lang="en-US" sz="1500" dirty="0"/>
           </a:p>
@@ -12125,7 +12125,7 @@
                   <a:schemeClr val="tx1"/>
                 </a:solidFill>
               </a:rPr>
-              <a:t>бутон „Помощ“ — APA, проверки, обновяване.</a:t>
+              <a:t>бутон „Помощ“ — APA, проверки, обновяване. Цитирания: „Помощ: цитирания“ в „Обобщен отчет“ (членовете с акаунт).</a:t>
             </a:r>
             <a:endParaRPr lang="en-US" sz="1250" dirty="0"/>
           </a:p>

--- a/public/docs/URSlab-rakovodstvo.pptx
+++ b/public/docs/URSlab-rakovodstvo.pptx
@@ -28,9 +28,10 @@
     <p:sldId id="276" r:id="rId22"/>
     <p:sldId id="277" r:id="rId23"/>
     <p:sldId id="278" r:id="rId24"/>
+    <p:sldId id="279" r:id="rId25"/>
   </p:sldIdLst>
   <p:notesMasterIdLst>
-    <p:notesMasterId r:id="rId25"/>
+    <p:notesMasterId r:id="rId26"/>
   </p:notesMasterIdLst>
   <p:sldSz cx="9144000" cy="5143500"/>
   <p:notesSz cx="5143500" cy="9144000"/>
@@ -129,55 +130,56 @@
   <p:extLst>
     <p:ext uri="{521415D9-36F7-43E2-AB2F-B90AF26B5E84}">
       <p14:sectionLst xmlns:p14="http://schemas.microsoft.com/office/powerpoint/2010/main">
-        <p14:section name="Въведение" id="{721411b8-89e5-c2c6-43b6-313adbf828be}">
+        <p14:section name="Въведение" id="{4373e0c6-10e1-6d94-3821-3c204ebd2b7a}">
           <p14:sldIdLst>
             <p14:sldId id="256"/>
             <p14:sldId id="257"/>
           </p14:sldIdLst>
         </p14:section>
-        <p14:section name="Сайтът" id="{7ce2eadf-d3ba-c533-85d9-1d59572a6637}">
+        <p14:section name="Сайтът" id="{cf22c482-c23e-ee5a-04ee-2d172100de70}">
           <p14:sldIdLst>
             <p14:sldId id="258"/>
             <p14:sldId id="259"/>
           </p14:sldIdLst>
         </p14:section>
-        <p14:section name="Изследвания" id="{b2fc624e-19a0-ddd6-c040-b809d59ba2c8}">
+        <p14:section name="Изследвания" id="{4cdc7932-b209-7cb4-d1d0-ac32e79265ac}">
           <p14:sldIdLst>
             <p14:sldId id="260"/>
             <p14:sldId id="261"/>
             <p14:sldId id="262"/>
           </p14:sldIdLst>
         </p14:section>
-        <p14:section name="Публикации" id="{bd706a9b-2105-6646-5051-ffb98a3e6e74}">
+        <p14:section name="Публикации" id="{56f72cb4-10f3-6548-03a0-bff30ec0390a}">
           <p14:sldIdLst>
             <p14:sldId id="263"/>
             <p14:sldId id="264"/>
             <p14:sldId id="265"/>
           </p14:sldIdLst>
         </p14:section>
-        <p14:section name="Състав" id="{c10304f3-b06b-1acb-0d2b-2b02d99cc08d}">
+        <p14:section name="Състав" id="{335c528e-71e7-30e6-b0c5-9bc4dab6d8a0}">
           <p14:sldIdLst>
             <p14:sldId id="266"/>
             <p14:sldId id="267"/>
             <p14:sldId id="268"/>
+            <p14:sldId id="269"/>
           </p14:sldIdLst>
         </p14:section>
-        <p14:section name="Нова публикация" id="{2df27a66-d5e5-50b6-922f-30d6fe13dd7c}">
+        <p14:section name="Нова публикация" id="{37eca337-3d7c-754d-e9c8-f6e414d7ee46}">
           <p14:sldIdLst>
-            <p14:sldId id="269"/>
             <p14:sldId id="270"/>
             <p14:sldId id="271"/>
             <p14:sldId id="272"/>
             <p14:sldId id="273"/>
             <p14:sldId id="274"/>
+            <p14:sldId id="275"/>
           </p14:sldIdLst>
         </p14:section>
-        <p14:section name="Обновяване" id="{c506b2e4-3b1f-08aa-55af-e4daa66e07bb}">
+        <p14:section name="Обновяване" id="{5cf2ae7a-1cd1-c783-ca04-7baa5861cbeb}">
           <p14:sldIdLst>
-            <p14:sldId id="275"/>
             <p14:sldId id="276"/>
             <p14:sldId id="277"/>
             <p14:sldId id="278"/>
+            <p14:sldId id="279"/>
           </p14:sldIdLst>
         </p14:section>
       </p14:sectionLst>
@@ -584,7 +586,7 @@
           <a:p>
             <a:r>
               <a:rPr lang="en-US" dirty="0"/>
-              <a:t>Презентацията е за обучение на нов член на колектива. Отделете около 20 минути; препоръчително е да разглеждате сайта паралелно.</a:t>
+              <a:t>Презентацията е за обучение на нов потребител. Отделете около 20 минути; препоръчително е да разглеждате сайта паралелно.</a:t>
             </a:r>
             <a:endParaRPr lang="en-US" dirty="0"/>
           </a:p>
@@ -1024,7 +1026,7 @@
           <a:p>
             <a:r>
               <a:rPr lang="en-US" dirty="0"/>
-              <a:t/>
+              <a:t>Б1–Б4 (октомври 2026): предложен показател по списъците на Scopus/WoS, научно рецензиране по НРС на НАЦИД, „Точки НАЦИД“ по имейл (PDF), писма само при нужда. Подробно — „Помощ: цитирания“ (PDF) в „Обобщен отчет“.</a:t>
             </a:r>
             <a:endParaRPr lang="en-US" dirty="0"/>
           </a:p>
@@ -1928,6 +1930,94 @@
             <a:fld id="{F7021451-1387-4CA6-816F-3879F97B5CBC}" type="slidenum">
               <a:rPr lang="en-US"/>
               <a:t>23</a:t>
+            </a:fld>
+            <a:endParaRPr lang="en-US"/>
+          </a:p>
+        </p:txBody>
+      </p:sp>
+    </p:spTree>
+    <p:extLst>
+      <p:ext uri="{BB962C8B-B14F-4D97-AF65-F5344CB8AC3E}">
+        <p14:creationId xmlns:p14="http://schemas.microsoft.com/office/powerpoint/2010/main" val="1024086991"/>
+      </p:ext>
+    </p:extLst>
+  </p:cSld>
+  <p:clrMapOvr>
+    <a:masterClrMapping/>
+  </p:clrMapOvr>
+</p:notes>
+</file>
+
+<file path=ppt/notesSlides/notesSlide24.xml><?xml version="1.0" encoding="utf-8"?>
+<p:notes xmlns:a="http://schemas.openxmlformats.org/drawingml/2006/main" xmlns:r="http://schemas.openxmlformats.org/officeDocument/2006/relationships" xmlns:p="http://schemas.openxmlformats.org/presentationml/2006/main">
+  <p:cSld>
+    <p:spTree>
+      <p:nvGrpSpPr>
+        <p:cNvPr id="1" name=""/>
+        <p:cNvGrpSpPr/>
+        <p:nvPr/>
+      </p:nvGrpSpPr>
+      <p:grpSpPr>
+        <a:xfrm>
+          <a:off x="0" y="0"/>
+          <a:ext cx="0" cy="0"/>
+          <a:chOff x="0" y="0"/>
+          <a:chExt cx="0" cy="0"/>
+        </a:xfrm>
+      </p:grpSpPr>
+      <p:sp>
+        <p:nvSpPr>
+          <p:cNvPr id="2" name="Slide Image Placeholder 1"/>
+          <p:cNvSpPr>
+            <a:spLocks noGrp="1" noRot="1" noChangeAspect="1"/>
+          </p:cNvSpPr>
+          <p:nvPr>
+            <p:ph type="sldImg"/>
+          </p:nvPr>
+        </p:nvSpPr>
+        <p:spPr/>
+      </p:sp>
+      <p:sp>
+        <p:nvSpPr>
+          <p:cNvPr id="3" name="Notes Placeholder 2"/>
+          <p:cNvSpPr>
+            <a:spLocks noGrp="1"/>
+          </p:cNvSpPr>
+          <p:nvPr>
+            <p:ph type="body" idx="1"/>
+          </p:nvPr>
+        </p:nvSpPr>
+        <p:spPr/>
+        <p:txBody>
+          <a:bodyPr/>
+          <a:lstStyle/>
+          <a:p>
+            <a:r>
+              <a:rPr lang="en-US" dirty="0"/>
+              <a:t/>
+            </a:r>
+            <a:endParaRPr lang="en-US" dirty="0"/>
+          </a:p>
+        </p:txBody>
+      </p:sp>
+      <p:sp>
+        <p:nvSpPr>
+          <p:cNvPr id="4" name="Slide Number Placeholder 3"/>
+          <p:cNvSpPr>
+            <a:spLocks noGrp="1"/>
+          </p:cNvSpPr>
+          <p:nvPr>
+            <p:ph type="sldNum" sz="quarter" idx="10"/>
+          </p:nvPr>
+        </p:nvSpPr>
+        <p:spPr/>
+        <p:txBody>
+          <a:bodyPr/>
+          <a:lstStyle/>
+          <a:p>
+            <a:fld id="{F7021451-1387-4CA6-816F-3879F97B5CBC}" type="slidenum">
+              <a:rPr lang="en-US"/>
+              <a:t>24</a:t>
             </a:fld>
             <a:endParaRPr lang="en-US"/>
           </a:p>
@@ -2905,7 +2995,7 @@
                   <a:schemeClr val="accent6"/>
                 </a:solidFill>
               </a:rPr>
-              <a:t>URSlab · Ръководство за нов член на екипа</a:t>
+              <a:t>URSlab · Ръководство за нов потребител</a:t>
             </a:r>
             <a:endParaRPr lang="en-US" sz="900" dirty="0"/>
           </a:p>
@@ -3338,7 +3428,7 @@
                   <a:schemeClr val="bg1"/>
                 </a:solidFill>
               </a:rPr>
-              <a:t>Сайтът на URSlab — ръководство за нов член на екипа</a:t>
+              <a:t>Сайтът на URSlab — ръководство за нов потребител</a:t>
             </a:r>
             <a:endParaRPr lang="en-US" sz="3800" dirty="0"/>
           </a:p>
@@ -4185,7 +4275,7 @@
                   <a:schemeClr val="accent6"/>
                 </a:solidFill>
               </a:rPr>
-              <a:t>Карта на всеки член, обобщен отчет и бутон за нова публикация</a:t>
+              <a:t>Карта на всеки потребител, обобщен отчет, цитирания и „Точки НАЦИД“</a:t>
             </a:r>
             <a:endParaRPr lang="en-US" sz="1500" dirty="0"/>
           </a:p>
@@ -4248,7 +4338,7 @@
                   <a:schemeClr val="tx1"/>
                 </a:solidFill>
               </a:rPr>
-              <a:t>Картата на член от колектива</a:t>
+              <a:t>Картата на потребителя</a:t>
             </a:r>
             <a:endParaRPr lang="en-US" sz="2600" dirty="0"/>
           </a:p>
@@ -4256,14 +4346,14 @@
       </p:sp>
       <p:sp>
         <p:nvSpPr>
-          <p:cNvPr id="3" name="Карта на член frame"/>
+          <p:cNvPr id="3" name="Карта на потребителя frame"/>
           <p:cNvSpPr/>
           <p:nvPr/>
         </p:nvSpPr>
         <p:spPr>
           <a:xfrm>
-            <a:off x="479405" y="1051560"/>
-            <a:ext cx="3247431" cy="3566160"/>
+            <a:off x="457200" y="1051560"/>
+            <a:ext cx="3291840" cy="3474720"/>
           </a:xfrm>
           <a:prstGeom prst="rect">
             <a:avLst/>
@@ -4288,7 +4378,7 @@
       </p:sp>
       <p:pic>
         <p:nvPicPr>
-          <p:cNvPr id="4" name="Карта на член" descr="Карта на член">    </p:cNvPr>
+          <p:cNvPr id="4" name="Карта на потребителя" descr="Карта на потребителя">    </p:cNvPr>
           <p:cNvPicPr>
             <a:picLocks noChangeAspect="1"/>
           </p:cNvPicPr>
@@ -4302,8 +4392,8 @@
         </p:blipFill>
         <p:spPr>
           <a:xfrm>
-            <a:off x="479405" y="1051560"/>
-            <a:ext cx="3247431" cy="3566160"/>
+            <a:off x="457200" y="1051560"/>
+            <a:ext cx="3291840" cy="3474720"/>
           </a:xfrm>
           <a:prstGeom prst="rect">
             <a:avLst/>
@@ -4595,7 +4685,7 @@
                   <a:schemeClr val="tx1"/>
                 </a:solidFill>
               </a:rPr>
-              <a:t>„+ Нова публикация“ и цитирания — само за членове с GitHub акаунт</a:t>
+              <a:t>„+ Нова публикация“ и цитирания — само за потребители с GitHub акаунт</a:t>
             </a:r>
             <a:endParaRPr lang="en-US" sz="1350" dirty="0"/>
           </a:p>
@@ -4836,7 +4926,7 @@
                   <a:schemeClr val="tx1"/>
                 </a:solidFill>
               </a:rPr>
-              <a:t>Обобщен отчет на член от колектива</a:t>
+              <a:t>Обобщен отчет на потребителя</a:t>
             </a:r>
             <a:endParaRPr lang="en-US" sz="2600" dirty="0"/>
           </a:p>
@@ -5010,7 +5100,7 @@
                   <a:schemeClr val="tx1"/>
                 </a:solidFill>
               </a:rPr>
-              <a:t>— точките по НАЦИД под годината на всяка публикация и сборът в обобщението. Въвеждане и търсене — „Помощ: цитирания“ (за членовете с акаунт).</a:t>
+              <a:t>— точките по НАЦИД под годината на всяка публикация и сборът в обобщението. Въвеждане и търсене — „Помощ: цитирания“ (за потребителите с акаунт).</a:t>
             </a:r>
             <a:endParaRPr lang="en-US" sz="1250" dirty="0"/>
           </a:p>
@@ -5152,14 +5242,79 @@
       </p:grpSpPr>
       <p:sp>
         <p:nvSpPr>
-          <p:cNvPr id="2" name="Shape 0"/>
+          <p:cNvPr id="2" name="Text 0"/>
           <p:cNvSpPr/>
-          <p:nvPr/>
-        </p:nvSpPr>
-        <p:spPr>
-          <a:xfrm>
-            <a:off x="548640" y="1691640"/>
-            <a:ext cx="1097280" cy="1097280"/>
+          <p:nvPr>
+            <p:ph idx="100" type="title" hasCustomPrompt="1"/>
+          </p:nvPr>
+        </p:nvSpPr>
+        <p:spPr>
+          <a:xfrm>
+            <a:off x="457200" y="274320"/>
+            <a:ext cx="8229600" cy="640080"/>
+          </a:xfrm>
+          <a:prstGeom prst="rect">
+            <a:avLst/>
+          </a:prstGeom>
+          <a:noFill/>
+          <a:ln/>
+        </p:spPr>
+        <p:txBody>
+          <a:bodyPr wrap="square" lIns="0" tIns="0" rIns="0" bIns="0" rtlCol="0" anchor="ctr"/>
+          <a:lstStyle/>
+          <a:p>
+            <a:pPr algn="l" indent="0" marL="0">
+              <a:buNone/>
+            </a:pPr>
+            <a:r>
+              <a:rPr lang="en-US" sz="2600" b="1" dirty="0">
+                <a:solidFill>
+                  <a:schemeClr val="tx1"/>
+                </a:solidFill>
+              </a:rPr>
+              <a:t>Цитирания, „Точки НАЦИД“ и писма</a:t>
+            </a:r>
+            <a:endParaRPr lang="en-US" sz="2600" dirty="0"/>
+          </a:p>
+        </p:txBody>
+      </p:sp>
+      <p:sp>
+        <p:nvSpPr>
+          <p:cNvPr id="3" name="Shape 1"/>
+          <p:cNvSpPr/>
+          <p:nvPr/>
+        </p:nvSpPr>
+        <p:spPr>
+          <a:xfrm>
+            <a:off x="457200" y="1097280"/>
+            <a:ext cx="2606040" cy="2651760"/>
+          </a:xfrm>
+          <a:prstGeom prst="roundRect">
+            <a:avLst>
+              <a:gd name="adj" fmla="val 2807"/>
+            </a:avLst>
+          </a:prstGeom>
+          <a:solidFill>
+            <a:schemeClr val="bg2"/>
+          </a:solidFill>
+          <a:ln w="12700">
+            <a:solidFill>
+              <a:schemeClr val="bg2"/>
+            </a:solidFill>
+            <a:prstDash val="solid"/>
+          </a:ln>
+        </p:spPr>
+      </p:sp>
+      <p:sp>
+        <p:nvSpPr>
+          <p:cNvPr id="4" name="Shape 2"/>
+          <p:cNvSpPr/>
+          <p:nvPr/>
+        </p:nvSpPr>
+        <p:spPr>
+          <a:xfrm>
+            <a:off x="621792" y="1280160"/>
+            <a:ext cx="502920" cy="502920"/>
           </a:xfrm>
           <a:prstGeom prst="ellipse">
             <a:avLst/>
@@ -5175,16 +5330,40 @@
           </a:ln>
         </p:spPr>
       </p:sp>
-      <p:sp>
-        <p:nvSpPr>
-          <p:cNvPr id="3" name="Text 1"/>
+      <p:pic>
+        <p:nvPicPr>
+          <p:cNvPr id="5" name="Image 0" descr="preencoded.png">    </p:cNvPr>
+          <p:cNvPicPr>
+            <a:picLocks noChangeAspect="1"/>
+          </p:cNvPicPr>
+          <p:nvPr/>
+        </p:nvPicPr>
+        <p:blipFill>
+          <a:blip r:embed="rId1"/>
+          <a:stretch>
+            <a:fillRect/>
+          </a:stretch>
+        </p:blipFill>
+        <p:spPr>
+          <a:xfrm>
+            <a:off x="732434" y="1390802"/>
+            <a:ext cx="281635" cy="281635"/>
+          </a:xfrm>
+          <a:prstGeom prst="rect">
+            <a:avLst/>
+          </a:prstGeom>
+        </p:spPr>
+      </p:pic>
+      <p:sp>
+        <p:nvSpPr>
+          <p:cNvPr id="6" name="Text 3"/>
           <p:cNvSpPr txBox="1"/>
           <p:nvPr/>
         </p:nvSpPr>
         <p:spPr>
           <a:xfrm>
-            <a:off x="548640" y="1691640"/>
-            <a:ext cx="1097280" cy="1097280"/>
+            <a:off x="1234440" y="1280160"/>
+            <a:ext cx="1737360" cy="502920"/>
           </a:xfrm>
           <a:prstGeom prst="rect">
             <a:avLst/>
@@ -5196,36 +5375,31 @@
           <a:bodyPr wrap="square" lIns="0" tIns="0" rIns="0" bIns="0" rtlCol="0" anchor="ctr"/>
           <a:lstStyle/>
           <a:p>
-            <a:pPr algn="ctr" indent="0" marL="0">
-              <a:buNone/>
-            </a:pPr>
-            <a:r>
-              <a:rPr lang="en-US" sz="4000" b="1" dirty="0">
-                <a:solidFill>
-                  <a:schemeClr val="bg1"/>
-                </a:solidFill>
-                <a:latin typeface="Cambria" pitchFamily="34" charset="0"/>
-                <a:ea typeface="Cambria" pitchFamily="34" charset="-122"/>
-                <a:cs typeface="Cambria" pitchFamily="34" charset="-120"/>
-              </a:rPr>
-              <a:t>5</a:t>
-            </a:r>
-            <a:endParaRPr lang="en-US" sz="4000" dirty="0"/>
-          </a:p>
-        </p:txBody>
-      </p:sp>
-      <p:sp>
-        <p:nvSpPr>
-          <p:cNvPr id="4" name="Text 0"/>
-          <p:cNvSpPr/>
-          <p:nvPr>
-            <p:ph idx="100" type="title" hasCustomPrompt="1"/>
-          </p:nvPr>
-        </p:nvSpPr>
-        <p:spPr>
-          <a:xfrm>
-            <a:off x="2011680" y="1737360"/>
-            <a:ext cx="6583680" cy="914400"/>
+            <a:pPr indent="0" marL="0">
+              <a:buNone/>
+            </a:pPr>
+            <a:r>
+              <a:rPr lang="en-US" sz="1400" b="1" dirty="0">
+                <a:solidFill>
+                  <a:schemeClr val="tx1"/>
+                </a:solidFill>
+              </a:rPr>
+              <a:t>Търсене на цитирания</a:t>
+            </a:r>
+            <a:endParaRPr lang="en-US" sz="1400" dirty="0"/>
+          </a:p>
+        </p:txBody>
+      </p:sp>
+      <p:sp>
+        <p:nvSpPr>
+          <p:cNvPr id="7" name="Text 4"/>
+          <p:cNvSpPr txBox="1"/>
+          <p:nvPr/>
+        </p:nvSpPr>
+        <p:spPr>
+          <a:xfrm>
+            <a:off x="621792" y="1965960"/>
+            <a:ext cx="2286000" cy="1691640"/>
           </a:xfrm>
           <a:prstGeom prst="rect">
             <a:avLst/>
@@ -5234,36 +5408,110 @@
           <a:ln/>
         </p:spPr>
         <p:txBody>
-          <a:bodyPr wrap="square" lIns="0" tIns="0" rIns="0" bIns="0" rtlCol="0" anchor="ctr"/>
-          <a:lstStyle/>
-          <a:p>
-            <a:pPr algn="l" indent="0" marL="0">
-              <a:buNone/>
-            </a:pPr>
-            <a:r>
-              <a:rPr lang="en-US" sz="3400" b="1" dirty="0">
-                <a:solidFill>
-                  <a:schemeClr val="bg1"/>
-                </a:solidFill>
-              </a:rPr>
-              <a:t>Нова публикация</a:t>
-            </a:r>
-            <a:endParaRPr lang="en-US" sz="3400" dirty="0"/>
-          </a:p>
-        </p:txBody>
-      </p:sp>
-      <p:sp>
-        <p:nvSpPr>
-          <p:cNvPr id="5" name="Text 0"/>
+          <a:bodyPr wrap="square" lIns="0" tIns="0" rIns="0" bIns="0" rtlCol="0" anchor="t"/>
+          <a:lstStyle/>
+          <a:p>
+            <a:pPr indent="0" marL="0">
+              <a:buNone/>
+            </a:pPr>
+            <a:r>
+              <a:rPr lang="en-US" sz="1200" dirty="0">
+                <a:solidFill>
+                  <a:schemeClr val="tx1"/>
+                </a:solidFill>
+              </a:rPr>
+              <a:t>Веднъж месечно и с бутона „Търси нови цитирания“. Всяко намерено цитиране е проверено; Системата сверява изданието със списъците на Scopus и WoS и предлага показател („← предложено“). Потвърждавате с една отметка.</a:t>
+            </a:r>
+            <a:endParaRPr lang="en-US" sz="1200" dirty="0"/>
+          </a:p>
+        </p:txBody>
+      </p:sp>
+      <p:sp>
+        <p:nvSpPr>
+          <p:cNvPr id="8" name="Shape 5"/>
           <p:cNvSpPr/>
-          <p:nvPr>
-            <p:ph idx="101" type="body" hasCustomPrompt="1"/>
-          </p:nvPr>
-        </p:nvSpPr>
-        <p:spPr>
-          <a:xfrm>
-            <a:off x="2011680" y="2697480"/>
-            <a:ext cx="6583680" cy="822960"/>
+          <p:nvPr/>
+        </p:nvSpPr>
+        <p:spPr>
+          <a:xfrm>
+            <a:off x="3246120" y="1097280"/>
+            <a:ext cx="2606040" cy="2651760"/>
+          </a:xfrm>
+          <a:prstGeom prst="roundRect">
+            <a:avLst>
+              <a:gd name="adj" fmla="val 2807"/>
+            </a:avLst>
+          </a:prstGeom>
+          <a:solidFill>
+            <a:schemeClr val="bg2"/>
+          </a:solidFill>
+          <a:ln w="12700">
+            <a:solidFill>
+              <a:schemeClr val="bg2"/>
+            </a:solidFill>
+            <a:prstDash val="solid"/>
+          </a:ln>
+        </p:spPr>
+      </p:sp>
+      <p:sp>
+        <p:nvSpPr>
+          <p:cNvPr id="9" name="Shape 6"/>
+          <p:cNvSpPr/>
+          <p:nvPr/>
+        </p:nvSpPr>
+        <p:spPr>
+          <a:xfrm>
+            <a:off x="3410712" y="1280160"/>
+            <a:ext cx="502920" cy="502920"/>
+          </a:xfrm>
+          <a:prstGeom prst="ellipse">
+            <a:avLst/>
+          </a:prstGeom>
+          <a:solidFill>
+            <a:schemeClr val="accent3"/>
+          </a:solidFill>
+          <a:ln w="12700">
+            <a:solidFill>
+              <a:schemeClr val="accent3"/>
+            </a:solidFill>
+            <a:prstDash val="solid"/>
+          </a:ln>
+        </p:spPr>
+      </p:sp>
+      <p:pic>
+        <p:nvPicPr>
+          <p:cNvPr id="10" name="Image 1" descr="preencoded.png">    </p:cNvPr>
+          <p:cNvPicPr>
+            <a:picLocks noChangeAspect="1"/>
+          </p:cNvPicPr>
+          <p:nvPr/>
+        </p:nvPicPr>
+        <p:blipFill>
+          <a:blip r:embed="rId2"/>
+          <a:stretch>
+            <a:fillRect/>
+          </a:stretch>
+        </p:blipFill>
+        <p:spPr>
+          <a:xfrm>
+            <a:off x="3521354" y="1390802"/>
+            <a:ext cx="281635" cy="281635"/>
+          </a:xfrm>
+          <a:prstGeom prst="rect">
+            <a:avLst/>
+          </a:prstGeom>
+        </p:spPr>
+      </p:pic>
+      <p:sp>
+        <p:nvSpPr>
+          <p:cNvPr id="11" name="Text 7"/>
+          <p:cNvSpPr txBox="1"/>
+          <p:nvPr/>
+        </p:nvSpPr>
+        <p:spPr>
+          <a:xfrm>
+            <a:off x="4023360" y="1280160"/>
+            <a:ext cx="1737360" cy="502920"/>
           </a:xfrm>
           <a:prstGeom prst="rect">
             <a:avLst/>
@@ -5272,21 +5520,250 @@
           <a:ln/>
         </p:spPr>
         <p:txBody>
+          <a:bodyPr wrap="square" lIns="0" tIns="0" rIns="0" bIns="0" rtlCol="0" anchor="ctr"/>
+          <a:lstStyle/>
+          <a:p>
+            <a:pPr indent="0" marL="0">
+              <a:buNone/>
+            </a:pPr>
+            <a:r>
+              <a:rPr lang="en-US" sz="1400" b="1" dirty="0">
+                <a:solidFill>
+                  <a:schemeClr val="tx1"/>
+                </a:solidFill>
+              </a:rPr>
+              <a:t>„Таблица по имейл“</a:t>
+            </a:r>
+            <a:endParaRPr lang="en-US" sz="1400" dirty="0"/>
+          </a:p>
+        </p:txBody>
+      </p:sp>
+      <p:sp>
+        <p:nvSpPr>
+          <p:cNvPr id="12" name="Text 8"/>
+          <p:cNvSpPr txBox="1"/>
+          <p:nvPr/>
+        </p:nvSpPr>
+        <p:spPr>
+          <a:xfrm>
+            <a:off x="3410712" y="1965960"/>
+            <a:ext cx="2286000" cy="1691640"/>
+          </a:xfrm>
+          <a:prstGeom prst="rect">
+            <a:avLst/>
+          </a:prstGeom>
+          <a:noFill/>
+          <a:ln/>
+        </p:spPr>
+        <p:txBody>
           <a:bodyPr wrap="square" lIns="0" tIns="0" rIns="0" bIns="0" rtlCol="0" anchor="t"/>
           <a:lstStyle/>
           <a:p>
-            <a:pPr algn="l" indent="0" marL="0">
-              <a:buNone/>
-            </a:pPr>
-            <a:r>
-              <a:rPr lang="en-US" sz="1500" dirty="0">
+            <a:pPr indent="0" marL="0">
+              <a:buNone/>
+            </a:pPr>
+            <a:r>
+              <a:rPr lang="en-US" sz="1200" dirty="0">
+                <a:solidFill>
+                  <a:schemeClr val="tx1"/>
+                </a:solidFill>
+              </a:rPr>
+              <a:t>Точките по Минималните национални изисквания, стратегия за следващата длъжност и справка от регистъра на НАЦИД — като PDF само до вас и ръководителя. На сайта няма числа.</a:t>
+            </a:r>
+            <a:endParaRPr lang="en-US" sz="1200" dirty="0"/>
+          </a:p>
+        </p:txBody>
+      </p:sp>
+      <p:sp>
+        <p:nvSpPr>
+          <p:cNvPr id="13" name="Shape 9"/>
+          <p:cNvSpPr/>
+          <p:nvPr/>
+        </p:nvSpPr>
+        <p:spPr>
+          <a:xfrm>
+            <a:off x="6035040" y="1097280"/>
+            <a:ext cx="2606040" cy="2651760"/>
+          </a:xfrm>
+          <a:prstGeom prst="roundRect">
+            <a:avLst>
+              <a:gd name="adj" fmla="val 2807"/>
+            </a:avLst>
+          </a:prstGeom>
+          <a:solidFill>
+            <a:schemeClr val="bg2"/>
+          </a:solidFill>
+          <a:ln w="12700">
+            <a:solidFill>
+              <a:schemeClr val="bg2"/>
+            </a:solidFill>
+            <a:prstDash val="solid"/>
+          </a:ln>
+        </p:spPr>
+      </p:sp>
+      <p:sp>
+        <p:nvSpPr>
+          <p:cNvPr id="14" name="Shape 10"/>
+          <p:cNvSpPr/>
+          <p:nvPr/>
+        </p:nvSpPr>
+        <p:spPr>
+          <a:xfrm>
+            <a:off x="6199632" y="1280160"/>
+            <a:ext cx="502920" cy="502920"/>
+          </a:xfrm>
+          <a:prstGeom prst="ellipse">
+            <a:avLst/>
+          </a:prstGeom>
+          <a:solidFill>
+            <a:schemeClr val="accent1"/>
+          </a:solidFill>
+          <a:ln w="12700">
+            <a:solidFill>
+              <a:schemeClr val="accent1"/>
+            </a:solidFill>
+            <a:prstDash val="solid"/>
+          </a:ln>
+        </p:spPr>
+      </p:sp>
+      <p:pic>
+        <p:nvPicPr>
+          <p:cNvPr id="15" name="Image 2" descr="preencoded.png">    </p:cNvPr>
+          <p:cNvPicPr>
+            <a:picLocks noChangeAspect="1"/>
+          </p:cNvPicPr>
+          <p:nvPr/>
+        </p:nvPicPr>
+        <p:blipFill>
+          <a:blip r:embed="rId3"/>
+          <a:stretch>
+            <a:fillRect/>
+          </a:stretch>
+        </p:blipFill>
+        <p:spPr>
+          <a:xfrm>
+            <a:off x="6310274" y="1390802"/>
+            <a:ext cx="281635" cy="281635"/>
+          </a:xfrm>
+          <a:prstGeom prst="rect">
+            <a:avLst/>
+          </a:prstGeom>
+        </p:spPr>
+      </p:pic>
+      <p:sp>
+        <p:nvSpPr>
+          <p:cNvPr id="16" name="Text 11"/>
+          <p:cNvSpPr txBox="1"/>
+          <p:nvPr/>
+        </p:nvSpPr>
+        <p:spPr>
+          <a:xfrm>
+            <a:off x="6812280" y="1280160"/>
+            <a:ext cx="1737360" cy="502920"/>
+          </a:xfrm>
+          <a:prstGeom prst="rect">
+            <a:avLst/>
+          </a:prstGeom>
+          <a:noFill/>
+          <a:ln/>
+        </p:spPr>
+        <p:txBody>
+          <a:bodyPr wrap="square" lIns="0" tIns="0" rIns="0" bIns="0" rtlCol="0" anchor="ctr"/>
+          <a:lstStyle/>
+          <a:p>
+            <a:pPr indent="0" marL="0">
+              <a:buNone/>
+            </a:pPr>
+            <a:r>
+              <a:rPr lang="en-US" sz="1400" b="1" dirty="0">
+                <a:solidFill>
+                  <a:schemeClr val="tx1"/>
+                </a:solidFill>
+              </a:rPr>
+              <a:t>Писма само при нужда</a:t>
+            </a:r>
+            <a:endParaRPr lang="en-US" sz="1400" dirty="0"/>
+          </a:p>
+        </p:txBody>
+      </p:sp>
+      <p:sp>
+        <p:nvSpPr>
+          <p:cNvPr id="17" name="Text 12"/>
+          <p:cNvSpPr txBox="1"/>
+          <p:nvPr/>
+        </p:nvSpPr>
+        <p:spPr>
+          <a:xfrm>
+            <a:off x="6199632" y="1965960"/>
+            <a:ext cx="2286000" cy="1691640"/>
+          </a:xfrm>
+          <a:prstGeom prst="rect">
+            <a:avLst/>
+          </a:prstGeom>
+          <a:noFill/>
+          <a:ln/>
+        </p:spPr>
+        <p:txBody>
+          <a:bodyPr wrap="square" lIns="0" tIns="0" rIns="0" bIns="0" rtlCol="0" anchor="t"/>
+          <a:lstStyle/>
+          <a:p>
+            <a:pPr indent="0" marL="0">
+              <a:buNone/>
+            </a:pPr>
+            <a:r>
+              <a:rPr lang="en-US" sz="1200" dirty="0">
+                <a:solidFill>
+                  <a:schemeClr val="tx1"/>
+                </a:solidFill>
+              </a:rPr>
+              <a:t>Писмо идва за поискана информация или когато трябва да действате (отказ, грешка). При успех — без писмо: резултатът е в текста на заявката.</a:t>
+            </a:r>
+            <a:endParaRPr lang="en-US" sz="1200" dirty="0"/>
+          </a:p>
+        </p:txBody>
+      </p:sp>
+      <p:sp>
+        <p:nvSpPr>
+          <p:cNvPr id="25" name="Slide Number Placeholder 0"/>
+          <p:cNvSpPr>
+            <a:spLocks noGrp="1"/>
+          </p:cNvSpPr>
+          <p:nvPr>
+            <p:ph type="sldNum" sz="quarter" idx="4294967295"/>
+          </p:nvPr>
+        </p:nvSpPr>
+        <p:spPr>
+          <a:xfrm>
+            <a:off x="8229600" y="4800600"/>
+            <a:ext cx="457200" cy="228600"/>
+          </a:xfrm>
+          <a:prstGeom prst="rect">
+            <a:avLst/>
+          </a:prstGeom>
+          <a:extLst>
+            <a:ext uri="{C572A759-6A51-4108-AA02-DFA0A04FC94B}">
+              <ma14:wrappingTextBoxFlag xmlns:ma14="http://schemas.microsoft.com/office/mac/drawingml/2011/main" val="0"/>
+            </a:ext>
+          </a:extLst>
+        </p:spPr>
+        <p:txBody>
+          <a:bodyPr/>
+          <a:lstStyle>
+            <a:lvl1pPr>
+              <a:defRPr sz="900">
                 <a:solidFill>
                   <a:schemeClr val="accent6"/>
                 </a:solidFill>
-              </a:rPr>
-              <a:t>От формата на сайта до публикуването — пет стъпки</a:t>
-            </a:r>
-            <a:endParaRPr lang="en-US" sz="1500" dirty="0"/>
+              </a:defRPr>
+            </a:lvl1pPr>
+          </a:lstStyle>
+          <a:p>
+            <a:pPr algn="r"/>
+            <a:fld id="{F7021451-1387-4CA6-816F-3879F97B5CBC}" type="slidenum">
+              <a:rPr b="0" lang="en-US"/>
+              <a:t>14</a:t>
+            </a:fld>
+            <a:endParaRPr lang="en-US"/>
           </a:p>
         </p:txBody>
       </p:sp>
@@ -5317,52 +5794,14 @@
       </p:grpSpPr>
       <p:sp>
         <p:nvSpPr>
-          <p:cNvPr id="2" name="Text 0"/>
+          <p:cNvPr id="2" name="Shape 0"/>
           <p:cNvSpPr/>
-          <p:nvPr>
-            <p:ph idx="100" type="title" hasCustomPrompt="1"/>
-          </p:nvPr>
-        </p:nvSpPr>
-        <p:spPr>
-          <a:xfrm>
-            <a:off x="457200" y="274320"/>
-            <a:ext cx="8229600" cy="640080"/>
-          </a:xfrm>
-          <a:prstGeom prst="rect">
-            <a:avLst/>
-          </a:prstGeom>
-          <a:noFill/>
-          <a:ln/>
-        </p:spPr>
-        <p:txBody>
-          <a:bodyPr wrap="square" lIns="0" tIns="0" rIns="0" bIns="0" rtlCol="0" anchor="ctr"/>
-          <a:lstStyle/>
-          <a:p>
-            <a:pPr algn="l" indent="0" marL="0">
-              <a:buNone/>
-            </a:pPr>
-            <a:r>
-              <a:rPr lang="en-US" sz="2600" b="1" dirty="0">
-                <a:solidFill>
-                  <a:schemeClr val="tx1"/>
-                </a:solidFill>
-              </a:rPr>
-              <a:t>Целият път на една нова публикация</a:t>
-            </a:r>
-            <a:endParaRPr lang="en-US" sz="2600" dirty="0"/>
-          </a:p>
-        </p:txBody>
-      </p:sp>
-      <p:sp>
-        <p:nvSpPr>
-          <p:cNvPr id="3" name="Shape 1"/>
-          <p:cNvSpPr/>
-          <p:nvPr/>
-        </p:nvSpPr>
-        <p:spPr>
-          <a:xfrm>
-            <a:off x="914400" y="1234440"/>
-            <a:ext cx="640080" cy="640080"/>
+          <p:nvPr/>
+        </p:nvSpPr>
+        <p:spPr>
+          <a:xfrm>
+            <a:off x="548640" y="1691640"/>
+            <a:ext cx="1097280" cy="1097280"/>
           </a:xfrm>
           <a:prstGeom prst="ellipse">
             <a:avLst/>
@@ -5378,65 +5817,16 @@
           </a:ln>
         </p:spPr>
       </p:sp>
-      <p:pic>
-        <p:nvPicPr>
-          <p:cNvPr id="4" name="Image 0" descr="preencoded.png">    </p:cNvPr>
-          <p:cNvPicPr>
-            <a:picLocks noChangeAspect="1"/>
-          </p:cNvPicPr>
-          <p:nvPr/>
-        </p:nvPicPr>
-        <p:blipFill>
-          <a:blip r:embed="rId1"/>
-          <a:stretch>
-            <a:fillRect/>
-          </a:stretch>
-        </p:blipFill>
-        <p:spPr>
-          <a:xfrm>
-            <a:off x="1055218" y="1375258"/>
-            <a:ext cx="358445" cy="358445"/>
-          </a:xfrm>
-          <a:prstGeom prst="rect">
-            <a:avLst/>
-          </a:prstGeom>
-        </p:spPr>
-      </p:pic>
-      <p:sp>
-        <p:nvSpPr>
-          <p:cNvPr id="5" name="badge 1"/>
-          <p:cNvSpPr/>
-          <p:nvPr/>
-        </p:nvSpPr>
-        <p:spPr>
-          <a:xfrm>
-            <a:off x="804672" y="1143000"/>
-            <a:ext cx="274320" cy="274320"/>
-          </a:xfrm>
-          <a:prstGeom prst="ellipse">
-            <a:avLst/>
-          </a:prstGeom>
-          <a:solidFill>
-            <a:schemeClr val="tx1"/>
-          </a:solidFill>
-          <a:ln w="12700">
-            <a:solidFill>
-              <a:schemeClr val="tx1"/>
-            </a:solidFill>
-            <a:prstDash val="solid"/>
-          </a:ln>
-        </p:spPr>
-      </p:sp>
-      <p:sp>
-        <p:nvSpPr>
-          <p:cNvPr id="6" name="Text 3"/>
+      <p:sp>
+        <p:nvSpPr>
+          <p:cNvPr id="3" name="Text 1"/>
           <p:cNvSpPr txBox="1"/>
           <p:nvPr/>
         </p:nvSpPr>
         <p:spPr>
           <a:xfrm>
-            <a:off x="804672" y="1143000"/>
-            <a:ext cx="274320" cy="274320"/>
+            <a:off x="548640" y="1691640"/>
+            <a:ext cx="1097280" cy="1097280"/>
           </a:xfrm>
           <a:prstGeom prst="rect">
             <a:avLst/>
@@ -5452,52 +5842,32 @@
               <a:buNone/>
             </a:pPr>
             <a:r>
-              <a:rPr lang="en-US" sz="1400" b="1" dirty="0">
+              <a:rPr lang="en-US" sz="4000" b="1" dirty="0">
                 <a:solidFill>
                   <a:schemeClr val="bg1"/>
                 </a:solidFill>
-              </a:rPr>
-              <a:t>1</a:t>
-            </a:r>
-            <a:endParaRPr lang="en-US" sz="1400" dirty="0"/>
-          </a:p>
-        </p:txBody>
-      </p:sp>
-      <p:sp>
-        <p:nvSpPr>
-          <p:cNvPr id="7" name="Shape 4"/>
+                <a:latin typeface="Cambria" pitchFamily="34" charset="0"/>
+                <a:ea typeface="Cambria" pitchFamily="34" charset="-122"/>
+                <a:cs typeface="Cambria" pitchFamily="34" charset="-120"/>
+              </a:rPr>
+              <a:t>5</a:t>
+            </a:r>
+            <a:endParaRPr lang="en-US" sz="4000" dirty="0"/>
+          </a:p>
+        </p:txBody>
+      </p:sp>
+      <p:sp>
+        <p:nvSpPr>
+          <p:cNvPr id="4" name="Text 0"/>
           <p:cNvSpPr/>
-          <p:nvPr/>
-        </p:nvSpPr>
-        <p:spPr>
-          <a:xfrm>
-            <a:off x="1719072" y="1444752"/>
-            <a:ext cx="384048" cy="219456"/>
-          </a:xfrm>
-          <a:prstGeom prst="rightArrow">
-            <a:avLst/>
-          </a:prstGeom>
-          <a:solidFill>
-            <a:schemeClr val="accent6"/>
-          </a:solidFill>
-          <a:ln w="12700">
-            <a:solidFill>
-              <a:schemeClr val="accent6"/>
-            </a:solidFill>
-            <a:prstDash val="solid"/>
-          </a:ln>
-        </p:spPr>
-      </p:sp>
-      <p:sp>
-        <p:nvSpPr>
-          <p:cNvPr id="8" name="Text 5"/>
-          <p:cNvSpPr txBox="1"/>
-          <p:nvPr/>
-        </p:nvSpPr>
-        <p:spPr>
-          <a:xfrm>
-            <a:off x="457200" y="2011680"/>
-            <a:ext cx="1554480" cy="365760"/>
+          <p:nvPr>
+            <p:ph idx="100" type="title" hasCustomPrompt="1"/>
+          </p:nvPr>
+        </p:nvSpPr>
+        <p:spPr>
+          <a:xfrm>
+            <a:off x="2011680" y="1737360"/>
+            <a:ext cx="6583680" cy="914400"/>
           </a:xfrm>
           <a:prstGeom prst="rect">
             <a:avLst/>
@@ -5509,31 +5879,33 @@
           <a:bodyPr wrap="square" lIns="0" tIns="0" rIns="0" bIns="0" rtlCol="0" anchor="ctr"/>
           <a:lstStyle/>
           <a:p>
-            <a:pPr algn="ctr" indent="0" marL="0">
-              <a:buNone/>
-            </a:pPr>
-            <a:r>
-              <a:rPr lang="en-US" sz="1400" b="1" dirty="0">
-                <a:solidFill>
-                  <a:schemeClr val="tx1"/>
-                </a:solidFill>
-              </a:rPr>
-              <a:t>Попълване</a:t>
-            </a:r>
-            <a:endParaRPr lang="en-US" sz="1400" dirty="0"/>
-          </a:p>
-        </p:txBody>
-      </p:sp>
-      <p:sp>
-        <p:nvSpPr>
-          <p:cNvPr id="9" name="Text 6"/>
-          <p:cNvSpPr txBox="1"/>
-          <p:nvPr/>
-        </p:nvSpPr>
-        <p:spPr>
-          <a:xfrm>
-            <a:off x="457200" y="2377440"/>
-            <a:ext cx="1554480" cy="822960"/>
+            <a:pPr algn="l" indent="0" marL="0">
+              <a:buNone/>
+            </a:pPr>
+            <a:r>
+              <a:rPr lang="en-US" sz="3400" b="1" dirty="0">
+                <a:solidFill>
+                  <a:schemeClr val="bg1"/>
+                </a:solidFill>
+              </a:rPr>
+              <a:t>Нова публикация</a:t>
+            </a:r>
+            <a:endParaRPr lang="en-US" sz="3400" dirty="0"/>
+          </a:p>
+        </p:txBody>
+      </p:sp>
+      <p:sp>
+        <p:nvSpPr>
+          <p:cNvPr id="5" name="Text 0"/>
+          <p:cNvSpPr/>
+          <p:nvPr>
+            <p:ph idx="101" type="body" hasCustomPrompt="1"/>
+          </p:nvPr>
+        </p:nvSpPr>
+        <p:spPr>
+          <a:xfrm>
+            <a:off x="2011680" y="2697480"/>
+            <a:ext cx="6583680" cy="822960"/>
           </a:xfrm>
           <a:prstGeom prst="rect">
             <a:avLst/>
@@ -5545,989 +5917,18 @@
           <a:bodyPr wrap="square" lIns="0" tIns="0" rIns="0" bIns="0" rtlCol="0" anchor="t"/>
           <a:lstStyle/>
           <a:p>
-            <a:pPr algn="ctr" indent="0" marL="0">
-              <a:buNone/>
-            </a:pPr>
-            <a:r>
-              <a:rPr lang="en-US" sz="1100" dirty="0">
-                <a:solidFill>
-                  <a:schemeClr val="tx2"/>
-                </a:solidFill>
-              </a:rPr>
-              <a:t>Състав → вашата карта → „+ Нова публикация“</a:t>
-            </a:r>
-            <a:endParaRPr lang="en-US" sz="1100" dirty="0"/>
-          </a:p>
-        </p:txBody>
-      </p:sp>
-      <p:sp>
-        <p:nvSpPr>
-          <p:cNvPr id="10" name="Shape 7"/>
-          <p:cNvSpPr/>
-          <p:nvPr/>
-        </p:nvSpPr>
-        <p:spPr>
-          <a:xfrm>
-            <a:off x="2596896" y="1234440"/>
-            <a:ext cx="640080" cy="640080"/>
-          </a:xfrm>
-          <a:prstGeom prst="ellipse">
-            <a:avLst/>
-          </a:prstGeom>
-          <a:solidFill>
-            <a:schemeClr val="accent1"/>
-          </a:solidFill>
-          <a:ln w="12700">
-            <a:solidFill>
-              <a:schemeClr val="accent1"/>
-            </a:solidFill>
-            <a:prstDash val="solid"/>
-          </a:ln>
-        </p:spPr>
-      </p:sp>
-      <p:pic>
-        <p:nvPicPr>
-          <p:cNvPr id="11" name="Image 1" descr="preencoded.png">    </p:cNvPr>
-          <p:cNvPicPr>
-            <a:picLocks noChangeAspect="1"/>
-          </p:cNvPicPr>
-          <p:nvPr/>
-        </p:nvPicPr>
-        <p:blipFill>
-          <a:blip r:embed="rId2"/>
-          <a:stretch>
-            <a:fillRect/>
-          </a:stretch>
-        </p:blipFill>
-        <p:spPr>
-          <a:xfrm>
-            <a:off x="2737714" y="1375258"/>
-            <a:ext cx="358445" cy="358445"/>
-          </a:xfrm>
-          <a:prstGeom prst="rect">
-            <a:avLst/>
-          </a:prstGeom>
-        </p:spPr>
-      </p:pic>
-      <p:sp>
-        <p:nvSpPr>
-          <p:cNvPr id="12" name="badge 2"/>
-          <p:cNvSpPr/>
-          <p:nvPr/>
-        </p:nvSpPr>
-        <p:spPr>
-          <a:xfrm>
-            <a:off x="2487168" y="1143000"/>
-            <a:ext cx="274320" cy="274320"/>
-          </a:xfrm>
-          <a:prstGeom prst="ellipse">
-            <a:avLst/>
-          </a:prstGeom>
-          <a:solidFill>
-            <a:schemeClr val="tx1"/>
-          </a:solidFill>
-          <a:ln w="12700">
-            <a:solidFill>
-              <a:schemeClr val="tx1"/>
-            </a:solidFill>
-            <a:prstDash val="solid"/>
-          </a:ln>
-        </p:spPr>
-      </p:sp>
-      <p:sp>
-        <p:nvSpPr>
-          <p:cNvPr id="13" name="Text 9"/>
-          <p:cNvSpPr txBox="1"/>
-          <p:nvPr/>
-        </p:nvSpPr>
-        <p:spPr>
-          <a:xfrm>
-            <a:off x="2487168" y="1143000"/>
-            <a:ext cx="274320" cy="274320"/>
-          </a:xfrm>
-          <a:prstGeom prst="rect">
-            <a:avLst/>
-          </a:prstGeom>
-          <a:noFill/>
-          <a:ln/>
-        </p:spPr>
-        <p:txBody>
-          <a:bodyPr wrap="square" lIns="0" tIns="0" rIns="0" bIns="0" rtlCol="0" anchor="ctr"/>
-          <a:lstStyle/>
-          <a:p>
-            <a:pPr algn="ctr" indent="0" marL="0">
-              <a:buNone/>
-            </a:pPr>
-            <a:r>
-              <a:rPr lang="en-US" sz="1400" b="1" dirty="0">
-                <a:solidFill>
-                  <a:schemeClr val="bg1"/>
-                </a:solidFill>
-              </a:rPr>
-              <a:t>2</a:t>
-            </a:r>
-            <a:endParaRPr lang="en-US" sz="1400" dirty="0"/>
-          </a:p>
-        </p:txBody>
-      </p:sp>
-      <p:sp>
-        <p:nvSpPr>
-          <p:cNvPr id="14" name="Shape 10"/>
-          <p:cNvSpPr/>
-          <p:nvPr/>
-        </p:nvSpPr>
-        <p:spPr>
-          <a:xfrm>
-            <a:off x="3401568" y="1444752"/>
-            <a:ext cx="384048" cy="219456"/>
-          </a:xfrm>
-          <a:prstGeom prst="rightArrow">
-            <a:avLst/>
-          </a:prstGeom>
-          <a:solidFill>
-            <a:schemeClr val="accent6"/>
-          </a:solidFill>
-          <a:ln w="12700">
-            <a:solidFill>
-              <a:schemeClr val="accent6"/>
-            </a:solidFill>
-            <a:prstDash val="solid"/>
-          </a:ln>
-        </p:spPr>
-      </p:sp>
-      <p:sp>
-        <p:nvSpPr>
-          <p:cNvPr id="15" name="Text 11"/>
-          <p:cNvSpPr txBox="1"/>
-          <p:nvPr/>
-        </p:nvSpPr>
-        <p:spPr>
-          <a:xfrm>
-            <a:off x="2139696" y="2011680"/>
-            <a:ext cx="1554480" cy="365760"/>
-          </a:xfrm>
-          <a:prstGeom prst="rect">
-            <a:avLst/>
-          </a:prstGeom>
-          <a:noFill/>
-          <a:ln/>
-        </p:spPr>
-        <p:txBody>
-          <a:bodyPr wrap="square" lIns="0" tIns="0" rIns="0" bIns="0" rtlCol="0" anchor="ctr"/>
-          <a:lstStyle/>
-          <a:p>
-            <a:pPr algn="ctr" indent="0" marL="0">
-              <a:buNone/>
-            </a:pPr>
-            <a:r>
-              <a:rPr lang="en-US" sz="1400" b="1" dirty="0">
-                <a:solidFill>
-                  <a:schemeClr val="tx1"/>
-                </a:solidFill>
-              </a:rPr>
-              <a:t>Запиши</a:t>
-            </a:r>
-            <a:endParaRPr lang="en-US" sz="1400" dirty="0"/>
-          </a:p>
-        </p:txBody>
-      </p:sp>
-      <p:sp>
-        <p:nvSpPr>
-          <p:cNvPr id="16" name="Text 12"/>
-          <p:cNvSpPr txBox="1"/>
-          <p:nvPr/>
-        </p:nvSpPr>
-        <p:spPr>
-          <a:xfrm>
-            <a:off x="2139696" y="2377440"/>
-            <a:ext cx="1554480" cy="822960"/>
-          </a:xfrm>
-          <a:prstGeom prst="rect">
-            <a:avLst/>
-          </a:prstGeom>
-          <a:noFill/>
-          <a:ln/>
-        </p:spPr>
-        <p:txBody>
-          <a:bodyPr wrap="square" lIns="0" tIns="0" rIns="0" bIns="0" rtlCol="0" anchor="t"/>
-          <a:lstStyle/>
-          <a:p>
-            <a:pPr algn="ctr" indent="0" marL="0">
-              <a:buNone/>
-            </a:pPr>
-            <a:r>
-              <a:rPr lang="en-US" sz="1100" dirty="0">
-                <a:solidFill>
-                  <a:schemeClr val="tx2"/>
-                </a:solidFill>
-              </a:rPr>
-              <a:t>проверка във формата; грешките са в червено</a:t>
-            </a:r>
-            <a:endParaRPr lang="en-US" sz="1100" dirty="0"/>
-          </a:p>
-        </p:txBody>
-      </p:sp>
-      <p:sp>
-        <p:nvSpPr>
-          <p:cNvPr id="17" name="Shape 13"/>
-          <p:cNvSpPr/>
-          <p:nvPr/>
-        </p:nvSpPr>
-        <p:spPr>
-          <a:xfrm>
-            <a:off x="4279392" y="1234440"/>
-            <a:ext cx="640080" cy="640080"/>
-          </a:xfrm>
-          <a:prstGeom prst="ellipse">
-            <a:avLst/>
-          </a:prstGeom>
-          <a:solidFill>
-            <a:schemeClr val="accent1"/>
-          </a:solidFill>
-          <a:ln w="12700">
-            <a:solidFill>
-              <a:schemeClr val="accent1"/>
-            </a:solidFill>
-            <a:prstDash val="solid"/>
-          </a:ln>
-        </p:spPr>
-      </p:sp>
-      <p:pic>
-        <p:nvPicPr>
-          <p:cNvPr id="18" name="Image 2" descr="preencoded.png">    </p:cNvPr>
-          <p:cNvPicPr>
-            <a:picLocks noChangeAspect="1"/>
-          </p:cNvPicPr>
-          <p:nvPr/>
-        </p:nvPicPr>
-        <p:blipFill>
-          <a:blip r:embed="rId3"/>
-          <a:stretch>
-            <a:fillRect/>
-          </a:stretch>
-        </p:blipFill>
-        <p:spPr>
-          <a:xfrm>
-            <a:off x="4420210" y="1375258"/>
-            <a:ext cx="358445" cy="358445"/>
-          </a:xfrm>
-          <a:prstGeom prst="rect">
-            <a:avLst/>
-          </a:prstGeom>
-        </p:spPr>
-      </p:pic>
-      <p:sp>
-        <p:nvSpPr>
-          <p:cNvPr id="19" name="badge 3"/>
-          <p:cNvSpPr/>
-          <p:nvPr/>
-        </p:nvSpPr>
-        <p:spPr>
-          <a:xfrm>
-            <a:off x="4169664" y="1143000"/>
-            <a:ext cx="274320" cy="274320"/>
-          </a:xfrm>
-          <a:prstGeom prst="ellipse">
-            <a:avLst/>
-          </a:prstGeom>
-          <a:solidFill>
-            <a:schemeClr val="tx1"/>
-          </a:solidFill>
-          <a:ln w="12700">
-            <a:solidFill>
-              <a:schemeClr val="tx1"/>
-            </a:solidFill>
-            <a:prstDash val="solid"/>
-          </a:ln>
-        </p:spPr>
-      </p:sp>
-      <p:sp>
-        <p:nvSpPr>
-          <p:cNvPr id="20" name="Text 15"/>
-          <p:cNvSpPr txBox="1"/>
-          <p:nvPr/>
-        </p:nvSpPr>
-        <p:spPr>
-          <a:xfrm>
-            <a:off x="4169664" y="1143000"/>
-            <a:ext cx="274320" cy="274320"/>
-          </a:xfrm>
-          <a:prstGeom prst="rect">
-            <a:avLst/>
-          </a:prstGeom>
-          <a:noFill/>
-          <a:ln/>
-        </p:spPr>
-        <p:txBody>
-          <a:bodyPr wrap="square" lIns="0" tIns="0" rIns="0" bIns="0" rtlCol="0" anchor="ctr"/>
-          <a:lstStyle/>
-          <a:p>
-            <a:pPr algn="ctr" indent="0" marL="0">
-              <a:buNone/>
-            </a:pPr>
-            <a:r>
-              <a:rPr lang="en-US" sz="1400" b="1" dirty="0">
-                <a:solidFill>
-                  <a:schemeClr val="bg1"/>
-                </a:solidFill>
-              </a:rPr>
-              <a:t>3</a:t>
-            </a:r>
-            <a:endParaRPr lang="en-US" sz="1400" dirty="0"/>
-          </a:p>
-        </p:txBody>
-      </p:sp>
-      <p:sp>
-        <p:nvSpPr>
-          <p:cNvPr id="21" name="Shape 16"/>
-          <p:cNvSpPr/>
-          <p:nvPr/>
-        </p:nvSpPr>
-        <p:spPr>
-          <a:xfrm>
-            <a:off x="5084064" y="1444752"/>
-            <a:ext cx="384048" cy="219456"/>
-          </a:xfrm>
-          <a:prstGeom prst="rightArrow">
-            <a:avLst/>
-          </a:prstGeom>
-          <a:solidFill>
-            <a:schemeClr val="accent6"/>
-          </a:solidFill>
-          <a:ln w="12700">
-            <a:solidFill>
-              <a:schemeClr val="accent6"/>
-            </a:solidFill>
-            <a:prstDash val="solid"/>
-          </a:ln>
-        </p:spPr>
-      </p:sp>
-      <p:sp>
-        <p:nvSpPr>
-          <p:cNvPr id="22" name="Text 17"/>
-          <p:cNvSpPr txBox="1"/>
-          <p:nvPr/>
-        </p:nvSpPr>
-        <p:spPr>
-          <a:xfrm>
-            <a:off x="3822192" y="2011680"/>
-            <a:ext cx="1554480" cy="365760"/>
-          </a:xfrm>
-          <a:prstGeom prst="rect">
-            <a:avLst/>
-          </a:prstGeom>
-          <a:noFill/>
-          <a:ln/>
-        </p:spPr>
-        <p:txBody>
-          <a:bodyPr wrap="square" lIns="0" tIns="0" rIns="0" bIns="0" rtlCol="0" anchor="ctr"/>
-          <a:lstStyle/>
-          <a:p>
-            <a:pPr algn="ctr" indent="0" marL="0">
-              <a:buNone/>
-            </a:pPr>
-            <a:r>
-              <a:rPr lang="en-US" sz="1400" b="1" dirty="0">
-                <a:solidFill>
-                  <a:schemeClr val="tx1"/>
-                </a:solidFill>
-              </a:rPr>
-              <a:t>GitHub</a:t>
-            </a:r>
-            <a:endParaRPr lang="en-US" sz="1400" dirty="0"/>
-          </a:p>
-        </p:txBody>
-      </p:sp>
-      <p:sp>
-        <p:nvSpPr>
-          <p:cNvPr id="23" name="Text 18"/>
-          <p:cNvSpPr txBox="1"/>
-          <p:nvPr/>
-        </p:nvSpPr>
-        <p:spPr>
-          <a:xfrm>
-            <a:off x="3822192" y="2377440"/>
-            <a:ext cx="1554480" cy="822960"/>
-          </a:xfrm>
-          <a:prstGeom prst="rect">
-            <a:avLst/>
-          </a:prstGeom>
-          <a:noFill/>
-          <a:ln/>
-        </p:spPr>
-        <p:txBody>
-          <a:bodyPr wrap="square" lIns="0" tIns="0" rIns="0" bIns="0" rtlCol="0" anchor="t"/>
-          <a:lstStyle/>
-          <a:p>
-            <a:pPr algn="ctr" indent="0" marL="0">
-              <a:buNone/>
-            </a:pPr>
-            <a:r>
-              <a:rPr lang="en-US" sz="1100" dirty="0">
-                <a:solidFill>
-                  <a:schemeClr val="tx2"/>
-                </a:solidFill>
-              </a:rPr>
-              <a:t>вход с вашия акаунт → зелен бутон „Create“</a:t>
-            </a:r>
-            <a:endParaRPr lang="en-US" sz="1100" dirty="0"/>
-          </a:p>
-        </p:txBody>
-      </p:sp>
-      <p:sp>
-        <p:nvSpPr>
-          <p:cNvPr id="24" name="Shape 19"/>
-          <p:cNvSpPr/>
-          <p:nvPr/>
-        </p:nvSpPr>
-        <p:spPr>
-          <a:xfrm>
-            <a:off x="5961888" y="1234440"/>
-            <a:ext cx="640080" cy="640080"/>
-          </a:xfrm>
-          <a:prstGeom prst="ellipse">
-            <a:avLst/>
-          </a:prstGeom>
-          <a:solidFill>
-            <a:schemeClr val="accent1"/>
-          </a:solidFill>
-          <a:ln w="12700">
-            <a:solidFill>
-              <a:schemeClr val="accent1"/>
-            </a:solidFill>
-            <a:prstDash val="solid"/>
-          </a:ln>
-        </p:spPr>
-      </p:sp>
-      <p:pic>
-        <p:nvPicPr>
-          <p:cNvPr id="25" name="Image 3" descr="preencoded.png">    </p:cNvPr>
-          <p:cNvPicPr>
-            <a:picLocks noChangeAspect="1"/>
-          </p:cNvPicPr>
-          <p:nvPr/>
-        </p:nvPicPr>
-        <p:blipFill>
-          <a:blip r:embed="rId4"/>
-          <a:stretch>
-            <a:fillRect/>
-          </a:stretch>
-        </p:blipFill>
-        <p:spPr>
-          <a:xfrm>
-            <a:off x="6102706" y="1375258"/>
-            <a:ext cx="358445" cy="358445"/>
-          </a:xfrm>
-          <a:prstGeom prst="rect">
-            <a:avLst/>
-          </a:prstGeom>
-        </p:spPr>
-      </p:pic>
-      <p:sp>
-        <p:nvSpPr>
-          <p:cNvPr id="26" name="badge 4"/>
-          <p:cNvSpPr/>
-          <p:nvPr/>
-        </p:nvSpPr>
-        <p:spPr>
-          <a:xfrm>
-            <a:off x="5852160" y="1143000"/>
-            <a:ext cx="274320" cy="274320"/>
-          </a:xfrm>
-          <a:prstGeom prst="ellipse">
-            <a:avLst/>
-          </a:prstGeom>
-          <a:solidFill>
-            <a:schemeClr val="tx1"/>
-          </a:solidFill>
-          <a:ln w="12700">
-            <a:solidFill>
-              <a:schemeClr val="tx1"/>
-            </a:solidFill>
-            <a:prstDash val="solid"/>
-          </a:ln>
-        </p:spPr>
-      </p:sp>
-      <p:sp>
-        <p:nvSpPr>
-          <p:cNvPr id="27" name="Text 21"/>
-          <p:cNvSpPr txBox="1"/>
-          <p:nvPr/>
-        </p:nvSpPr>
-        <p:spPr>
-          <a:xfrm>
-            <a:off x="5852160" y="1143000"/>
-            <a:ext cx="274320" cy="274320"/>
-          </a:xfrm>
-          <a:prstGeom prst="rect">
-            <a:avLst/>
-          </a:prstGeom>
-          <a:noFill/>
-          <a:ln/>
-        </p:spPr>
-        <p:txBody>
-          <a:bodyPr wrap="square" lIns="0" tIns="0" rIns="0" bIns="0" rtlCol="0" anchor="ctr"/>
-          <a:lstStyle/>
-          <a:p>
-            <a:pPr algn="ctr" indent="0" marL="0">
-              <a:buNone/>
-            </a:pPr>
-            <a:r>
-              <a:rPr lang="en-US" sz="1400" b="1" dirty="0">
-                <a:solidFill>
-                  <a:schemeClr val="bg1"/>
-                </a:solidFill>
-              </a:rPr>
-              <a:t>4</a:t>
-            </a:r>
-            <a:endParaRPr lang="en-US" sz="1400" dirty="0"/>
-          </a:p>
-        </p:txBody>
-      </p:sp>
-      <p:sp>
-        <p:nvSpPr>
-          <p:cNvPr id="28" name="Shape 22"/>
-          <p:cNvSpPr/>
-          <p:nvPr/>
-        </p:nvSpPr>
-        <p:spPr>
-          <a:xfrm>
-            <a:off x="6766560" y="1444752"/>
-            <a:ext cx="384048" cy="219456"/>
-          </a:xfrm>
-          <a:prstGeom prst="rightArrow">
-            <a:avLst/>
-          </a:prstGeom>
-          <a:solidFill>
-            <a:schemeClr val="accent6"/>
-          </a:solidFill>
-          <a:ln w="12700">
-            <a:solidFill>
-              <a:schemeClr val="accent6"/>
-            </a:solidFill>
-            <a:prstDash val="solid"/>
-          </a:ln>
-        </p:spPr>
-      </p:sp>
-      <p:sp>
-        <p:nvSpPr>
-          <p:cNvPr id="29" name="Text 23"/>
-          <p:cNvSpPr txBox="1"/>
-          <p:nvPr/>
-        </p:nvSpPr>
-        <p:spPr>
-          <a:xfrm>
-            <a:off x="5504688" y="2011680"/>
-            <a:ext cx="1554480" cy="365760"/>
-          </a:xfrm>
-          <a:prstGeom prst="rect">
-            <a:avLst/>
-          </a:prstGeom>
-          <a:noFill/>
-          <a:ln/>
-        </p:spPr>
-        <p:txBody>
-          <a:bodyPr wrap="square" lIns="0" tIns="0" rIns="0" bIns="0" rtlCol="0" anchor="ctr"/>
-          <a:lstStyle/>
-          <a:p>
-            <a:pPr algn="ctr" indent="0" marL="0">
-              <a:buNone/>
-            </a:pPr>
-            <a:r>
-              <a:rPr lang="en-US" sz="1400" b="1" dirty="0">
-                <a:solidFill>
-                  <a:schemeClr val="tx1"/>
-                </a:solidFill>
-              </a:rPr>
-              <a:t>Проверка</a:t>
-            </a:r>
-            <a:endParaRPr lang="en-US" sz="1400" dirty="0"/>
-          </a:p>
-        </p:txBody>
-      </p:sp>
-      <p:sp>
-        <p:nvSpPr>
-          <p:cNvPr id="30" name="Text 24"/>
-          <p:cNvSpPr txBox="1"/>
-          <p:nvPr/>
-        </p:nvSpPr>
-        <p:spPr>
-          <a:xfrm>
-            <a:off x="5504688" y="2377440"/>
-            <a:ext cx="1554480" cy="822960"/>
-          </a:xfrm>
-          <a:prstGeom prst="rect">
-            <a:avLst/>
-          </a:prstGeom>
-          <a:noFill/>
-          <a:ln/>
-        </p:spPr>
-        <p:txBody>
-          <a:bodyPr wrap="square" lIns="0" tIns="0" rIns="0" bIns="0" rtlCol="0" anchor="t"/>
-          <a:lstStyle/>
-          <a:p>
-            <a:pPr algn="ctr" indent="0" marL="0">
-              <a:buNone/>
-            </a:pPr>
-            <a:r>
-              <a:rPr lang="en-US" sz="1100" dirty="0">
-                <a:solidFill>
-                  <a:schemeClr val="tx2"/>
-                </a:solidFill>
-              </a:rPr>
-              <a:t>DOI / ISSN / ISBN в регистрите: ✅ или ❌</a:t>
-            </a:r>
-            <a:endParaRPr lang="en-US" sz="1100" dirty="0"/>
-          </a:p>
-        </p:txBody>
-      </p:sp>
-      <p:sp>
-        <p:nvSpPr>
-          <p:cNvPr id="31" name="Shape 25"/>
-          <p:cNvSpPr/>
-          <p:nvPr/>
-        </p:nvSpPr>
-        <p:spPr>
-          <a:xfrm>
-            <a:off x="7644384" y="1234440"/>
-            <a:ext cx="640080" cy="640080"/>
-          </a:xfrm>
-          <a:prstGeom prst="ellipse">
-            <a:avLst/>
-          </a:prstGeom>
-          <a:solidFill>
-            <a:schemeClr val="accent3"/>
-          </a:solidFill>
-          <a:ln w="12700">
-            <a:solidFill>
-              <a:schemeClr val="accent3"/>
-            </a:solidFill>
-            <a:prstDash val="solid"/>
-          </a:ln>
-        </p:spPr>
-      </p:sp>
-      <p:pic>
-        <p:nvPicPr>
-          <p:cNvPr id="32" name="Image 4" descr="preencoded.png">    </p:cNvPr>
-          <p:cNvPicPr>
-            <a:picLocks noChangeAspect="1"/>
-          </p:cNvPicPr>
-          <p:nvPr/>
-        </p:nvPicPr>
-        <p:blipFill>
-          <a:blip r:embed="rId5"/>
-          <a:stretch>
-            <a:fillRect/>
-          </a:stretch>
-        </p:blipFill>
-        <p:spPr>
-          <a:xfrm>
-            <a:off x="7785202" y="1375258"/>
-            <a:ext cx="358445" cy="358445"/>
-          </a:xfrm>
-          <a:prstGeom prst="rect">
-            <a:avLst/>
-          </a:prstGeom>
-        </p:spPr>
-      </p:pic>
-      <p:sp>
-        <p:nvSpPr>
-          <p:cNvPr id="33" name="badge 5"/>
-          <p:cNvSpPr/>
-          <p:nvPr/>
-        </p:nvSpPr>
-        <p:spPr>
-          <a:xfrm>
-            <a:off x="7534656" y="1143000"/>
-            <a:ext cx="274320" cy="274320"/>
-          </a:xfrm>
-          <a:prstGeom prst="ellipse">
-            <a:avLst/>
-          </a:prstGeom>
-          <a:solidFill>
-            <a:schemeClr val="tx1"/>
-          </a:solidFill>
-          <a:ln w="12700">
-            <a:solidFill>
-              <a:schemeClr val="tx1"/>
-            </a:solidFill>
-            <a:prstDash val="solid"/>
-          </a:ln>
-        </p:spPr>
-      </p:sp>
-      <p:sp>
-        <p:nvSpPr>
-          <p:cNvPr id="34" name="Text 27"/>
-          <p:cNvSpPr txBox="1"/>
-          <p:nvPr/>
-        </p:nvSpPr>
-        <p:spPr>
-          <a:xfrm>
-            <a:off x="7534656" y="1143000"/>
-            <a:ext cx="274320" cy="274320"/>
-          </a:xfrm>
-          <a:prstGeom prst="rect">
-            <a:avLst/>
-          </a:prstGeom>
-          <a:noFill/>
-          <a:ln/>
-        </p:spPr>
-        <p:txBody>
-          <a:bodyPr wrap="square" lIns="0" tIns="0" rIns="0" bIns="0" rtlCol="0" anchor="ctr"/>
-          <a:lstStyle/>
-          <a:p>
-            <a:pPr algn="ctr" indent="0" marL="0">
-              <a:buNone/>
-            </a:pPr>
-            <a:r>
-              <a:rPr lang="en-US" sz="1400" b="1" dirty="0">
-                <a:solidFill>
-                  <a:schemeClr val="bg1"/>
-                </a:solidFill>
-              </a:rPr>
-              <a:t>5</a:t>
-            </a:r>
-            <a:endParaRPr lang="en-US" sz="1400" dirty="0"/>
-          </a:p>
-        </p:txBody>
-      </p:sp>
-      <p:sp>
-        <p:nvSpPr>
-          <p:cNvPr id="35" name="Text 28"/>
-          <p:cNvSpPr txBox="1"/>
-          <p:nvPr/>
-        </p:nvSpPr>
-        <p:spPr>
-          <a:xfrm>
-            <a:off x="7187184" y="2011680"/>
-            <a:ext cx="1554480" cy="365760"/>
-          </a:xfrm>
-          <a:prstGeom prst="rect">
-            <a:avLst/>
-          </a:prstGeom>
-          <a:noFill/>
-          <a:ln/>
-        </p:spPr>
-        <p:txBody>
-          <a:bodyPr wrap="square" lIns="0" tIns="0" rIns="0" bIns="0" rtlCol="0" anchor="ctr"/>
-          <a:lstStyle/>
-          <a:p>
-            <a:pPr algn="ctr" indent="0" marL="0">
-              <a:buNone/>
-            </a:pPr>
-            <a:r>
-              <a:rPr lang="en-US" sz="1400" b="1" dirty="0">
-                <a:solidFill>
-                  <a:schemeClr val="tx1"/>
-                </a:solidFill>
-              </a:rPr>
-              <a:t>На сайта</a:t>
-            </a:r>
-            <a:endParaRPr lang="en-US" sz="1400" dirty="0"/>
-          </a:p>
-        </p:txBody>
-      </p:sp>
-      <p:sp>
-        <p:nvSpPr>
-          <p:cNvPr id="36" name="Text 29"/>
-          <p:cNvSpPr txBox="1"/>
-          <p:nvPr/>
-        </p:nvSpPr>
-        <p:spPr>
-          <a:xfrm>
-            <a:off x="7187184" y="2377440"/>
-            <a:ext cx="1554480" cy="822960"/>
-          </a:xfrm>
-          <a:prstGeom prst="rect">
-            <a:avLst/>
-          </a:prstGeom>
-          <a:noFill/>
-          <a:ln/>
-        </p:spPr>
-        <p:txBody>
-          <a:bodyPr wrap="square" lIns="0" tIns="0" rIns="0" bIns="0" rtlCol="0" anchor="t"/>
-          <a:lstStyle/>
-          <a:p>
-            <a:pPr algn="ctr" indent="0" marL="0">
-              <a:buNone/>
-            </a:pPr>
-            <a:r>
-              <a:rPr lang="en-US" sz="1100" dirty="0">
-                <a:solidFill>
-                  <a:schemeClr val="tx2"/>
-                </a:solidFill>
-              </a:rPr>
-              <a:t>автоматично, до около минута</a:t>
-            </a:r>
-            <a:endParaRPr lang="en-US" sz="1100" dirty="0"/>
-          </a:p>
-        </p:txBody>
-      </p:sp>
-      <p:sp>
-        <p:nvSpPr>
-          <p:cNvPr id="37" name="Shape 30"/>
-          <p:cNvSpPr/>
-          <p:nvPr/>
-        </p:nvSpPr>
-        <p:spPr>
-          <a:xfrm>
-            <a:off x="457200" y="3429000"/>
-            <a:ext cx="8229600" cy="1143000"/>
-          </a:xfrm>
-          <a:prstGeom prst="roundRect">
-            <a:avLst>
-              <a:gd name="adj" fmla="val 6400"/>
-            </a:avLst>
-          </a:prstGeom>
-          <a:solidFill>
-            <a:schemeClr val="bg2"/>
-          </a:solidFill>
-          <a:ln w="12700">
-            <a:solidFill>
-              <a:schemeClr val="bg2"/>
-            </a:solidFill>
-            <a:prstDash val="solid"/>
-          </a:ln>
-        </p:spPr>
-      </p:sp>
-      <p:sp>
-        <p:nvSpPr>
-          <p:cNvPr id="38" name="Shape 31"/>
-          <p:cNvSpPr/>
-          <p:nvPr/>
-        </p:nvSpPr>
-        <p:spPr>
-          <a:xfrm>
-            <a:off x="685800" y="3730752"/>
-            <a:ext cx="548640" cy="548640"/>
-          </a:xfrm>
-          <a:prstGeom prst="ellipse">
-            <a:avLst/>
-          </a:prstGeom>
-          <a:solidFill>
-            <a:schemeClr val="tx1"/>
-          </a:solidFill>
-          <a:ln w="12700">
-            <a:solidFill>
-              <a:schemeClr val="tx1"/>
-            </a:solidFill>
-            <a:prstDash val="solid"/>
-          </a:ln>
-        </p:spPr>
-      </p:sp>
-      <p:pic>
-        <p:nvPicPr>
-          <p:cNvPr id="39" name="Image 5" descr="preencoded.png">    </p:cNvPr>
-          <p:cNvPicPr>
-            <a:picLocks noChangeAspect="1"/>
-          </p:cNvPicPr>
-          <p:nvPr/>
-        </p:nvPicPr>
-        <p:blipFill>
-          <a:blip r:embed="rId6"/>
-          <a:stretch>
-            <a:fillRect/>
-          </a:stretch>
-        </p:blipFill>
-        <p:spPr>
-          <a:xfrm>
-            <a:off x="806501" y="3851453"/>
-            <a:ext cx="307238" cy="307238"/>
-          </a:xfrm>
-          <a:prstGeom prst="rect">
-            <a:avLst/>
-          </a:prstGeom>
-        </p:spPr>
-      </p:pic>
-      <p:sp>
-        <p:nvSpPr>
-          <p:cNvPr id="40" name="Text 32"/>
-          <p:cNvSpPr txBox="1"/>
-          <p:nvPr/>
-        </p:nvSpPr>
-        <p:spPr>
-          <a:xfrm>
-            <a:off x="1417320" y="3520440"/>
-            <a:ext cx="7132320" cy="960120"/>
-          </a:xfrm>
-          <a:prstGeom prst="rect">
-            <a:avLst/>
-          </a:prstGeom>
-          <a:noFill/>
-          <a:ln/>
-        </p:spPr>
-        <p:txBody>
-          <a:bodyPr wrap="square" lIns="0" tIns="0" rIns="0" bIns="0" rtlCol="0" anchor="ctr"/>
-          <a:lstStyle/>
-          <a:p>
-            <a:pPr indent="0" marL="0">
-              <a:buNone/>
-            </a:pPr>
-            <a:r>
-              <a:rPr lang="en-US" sz="1200" b="1" dirty="0">
-                <a:solidFill>
-                  <a:schemeClr val="tx1"/>
-                </a:solidFill>
-              </a:rPr>
-              <a:t>Защо GitHub? </a:t>
-            </a:r>
-            <a:pPr indent="0" marL="0">
-              <a:buNone/>
-            </a:pPr>
-            <a:r>
-              <a:rPr lang="en-US" sz="1200" dirty="0">
-                <a:solidFill>
-                  <a:schemeClr val="tx1"/>
-                </a:solidFill>
-              </a:rPr>
-              <a:t>Сайтът няма собствен вход и не пази пароли. Самоличността се проверява от GitHub: заявка се приема само от акаунта на члена (или на ръководителя). Хранилището е публично — за статии под рецензия въвеждайте само резюме, никога пълен текст.</a:t>
-            </a:r>
-            <a:endParaRPr lang="en-US" sz="1200" dirty="0"/>
-          </a:p>
-        </p:txBody>
-      </p:sp>
-      <p:sp>
-        <p:nvSpPr>
-          <p:cNvPr id="25" name="Slide Number Placeholder 0"/>
-          <p:cNvSpPr>
-            <a:spLocks noGrp="1"/>
-          </p:cNvSpPr>
-          <p:nvPr>
-            <p:ph type="sldNum" sz="quarter" idx="4294967295"/>
-          </p:nvPr>
-        </p:nvSpPr>
-        <p:spPr>
-          <a:xfrm>
-            <a:off x="8229600" y="4800600"/>
-            <a:ext cx="457200" cy="228600"/>
-          </a:xfrm>
-          <a:prstGeom prst="rect">
-            <a:avLst/>
-          </a:prstGeom>
-          <a:extLst>
-            <a:ext uri="{C572A759-6A51-4108-AA02-DFA0A04FC94B}">
-              <ma14:wrappingTextBoxFlag xmlns:ma14="http://schemas.microsoft.com/office/mac/drawingml/2011/main" val="0"/>
-            </a:ext>
-          </a:extLst>
-        </p:spPr>
-        <p:txBody>
-          <a:bodyPr/>
-          <a:lstStyle>
-            <a:lvl1pPr>
-              <a:defRPr sz="900">
+            <a:pPr algn="l" indent="0" marL="0">
+              <a:buNone/>
+            </a:pPr>
+            <a:r>
+              <a:rPr lang="en-US" sz="1500" dirty="0">
                 <a:solidFill>
                   <a:schemeClr val="accent6"/>
                 </a:solidFill>
-              </a:defRPr>
-            </a:lvl1pPr>
-          </a:lstStyle>
-          <a:p>
-            <a:pPr algn="r"/>
-            <a:fld id="{F7021451-1387-4CA6-816F-3879F97B5CBC}" type="slidenum">
-              <a:rPr b="0" lang="en-US"/>
-              <a:t>15</a:t>
-            </a:fld>
-            <a:endParaRPr lang="en-US"/>
+              </a:rPr>
+              <a:t>От формата на сайта до публикуването — пет стъпки</a:t>
+            </a:r>
+            <a:endParaRPr lang="en-US" sz="1500" dirty="0"/>
           </a:p>
         </p:txBody>
       </p:sp>
@@ -6588,6 +5989,1247 @@
                   <a:schemeClr val="tx1"/>
                 </a:solidFill>
               </a:rPr>
+              <a:t>Целият път на една нова публикация</a:t>
+            </a:r>
+            <a:endParaRPr lang="en-US" sz="2600" dirty="0"/>
+          </a:p>
+        </p:txBody>
+      </p:sp>
+      <p:sp>
+        <p:nvSpPr>
+          <p:cNvPr id="3" name="Shape 1"/>
+          <p:cNvSpPr/>
+          <p:nvPr/>
+        </p:nvSpPr>
+        <p:spPr>
+          <a:xfrm>
+            <a:off x="914400" y="1234440"/>
+            <a:ext cx="640080" cy="640080"/>
+          </a:xfrm>
+          <a:prstGeom prst="ellipse">
+            <a:avLst/>
+          </a:prstGeom>
+          <a:solidFill>
+            <a:schemeClr val="accent1"/>
+          </a:solidFill>
+          <a:ln w="12700">
+            <a:solidFill>
+              <a:schemeClr val="accent1"/>
+            </a:solidFill>
+            <a:prstDash val="solid"/>
+          </a:ln>
+        </p:spPr>
+      </p:sp>
+      <p:pic>
+        <p:nvPicPr>
+          <p:cNvPr id="4" name="Image 0" descr="preencoded.png">    </p:cNvPr>
+          <p:cNvPicPr>
+            <a:picLocks noChangeAspect="1"/>
+          </p:cNvPicPr>
+          <p:nvPr/>
+        </p:nvPicPr>
+        <p:blipFill>
+          <a:blip r:embed="rId1"/>
+          <a:stretch>
+            <a:fillRect/>
+          </a:stretch>
+        </p:blipFill>
+        <p:spPr>
+          <a:xfrm>
+            <a:off x="1055218" y="1375258"/>
+            <a:ext cx="358445" cy="358445"/>
+          </a:xfrm>
+          <a:prstGeom prst="rect">
+            <a:avLst/>
+          </a:prstGeom>
+        </p:spPr>
+      </p:pic>
+      <p:sp>
+        <p:nvSpPr>
+          <p:cNvPr id="5" name="badge 1"/>
+          <p:cNvSpPr/>
+          <p:nvPr/>
+        </p:nvSpPr>
+        <p:spPr>
+          <a:xfrm>
+            <a:off x="804672" y="1143000"/>
+            <a:ext cx="274320" cy="274320"/>
+          </a:xfrm>
+          <a:prstGeom prst="ellipse">
+            <a:avLst/>
+          </a:prstGeom>
+          <a:solidFill>
+            <a:schemeClr val="tx1"/>
+          </a:solidFill>
+          <a:ln w="12700">
+            <a:solidFill>
+              <a:schemeClr val="tx1"/>
+            </a:solidFill>
+            <a:prstDash val="solid"/>
+          </a:ln>
+        </p:spPr>
+      </p:sp>
+      <p:sp>
+        <p:nvSpPr>
+          <p:cNvPr id="6" name="Text 3"/>
+          <p:cNvSpPr txBox="1"/>
+          <p:nvPr/>
+        </p:nvSpPr>
+        <p:spPr>
+          <a:xfrm>
+            <a:off x="804672" y="1143000"/>
+            <a:ext cx="274320" cy="274320"/>
+          </a:xfrm>
+          <a:prstGeom prst="rect">
+            <a:avLst/>
+          </a:prstGeom>
+          <a:noFill/>
+          <a:ln/>
+        </p:spPr>
+        <p:txBody>
+          <a:bodyPr wrap="square" lIns="0" tIns="0" rIns="0" bIns="0" rtlCol="0" anchor="ctr"/>
+          <a:lstStyle/>
+          <a:p>
+            <a:pPr algn="ctr" indent="0" marL="0">
+              <a:buNone/>
+            </a:pPr>
+            <a:r>
+              <a:rPr lang="en-US" sz="1400" b="1" dirty="0">
+                <a:solidFill>
+                  <a:schemeClr val="bg1"/>
+                </a:solidFill>
+              </a:rPr>
+              <a:t>1</a:t>
+            </a:r>
+            <a:endParaRPr lang="en-US" sz="1400" dirty="0"/>
+          </a:p>
+        </p:txBody>
+      </p:sp>
+      <p:sp>
+        <p:nvSpPr>
+          <p:cNvPr id="7" name="Shape 4"/>
+          <p:cNvSpPr/>
+          <p:nvPr/>
+        </p:nvSpPr>
+        <p:spPr>
+          <a:xfrm>
+            <a:off x="1719072" y="1444752"/>
+            <a:ext cx="384048" cy="219456"/>
+          </a:xfrm>
+          <a:prstGeom prst="rightArrow">
+            <a:avLst/>
+          </a:prstGeom>
+          <a:solidFill>
+            <a:schemeClr val="accent6"/>
+          </a:solidFill>
+          <a:ln w="12700">
+            <a:solidFill>
+              <a:schemeClr val="accent6"/>
+            </a:solidFill>
+            <a:prstDash val="solid"/>
+          </a:ln>
+        </p:spPr>
+      </p:sp>
+      <p:sp>
+        <p:nvSpPr>
+          <p:cNvPr id="8" name="Text 5"/>
+          <p:cNvSpPr txBox="1"/>
+          <p:nvPr/>
+        </p:nvSpPr>
+        <p:spPr>
+          <a:xfrm>
+            <a:off x="457200" y="2011680"/>
+            <a:ext cx="1554480" cy="365760"/>
+          </a:xfrm>
+          <a:prstGeom prst="rect">
+            <a:avLst/>
+          </a:prstGeom>
+          <a:noFill/>
+          <a:ln/>
+        </p:spPr>
+        <p:txBody>
+          <a:bodyPr wrap="square" lIns="0" tIns="0" rIns="0" bIns="0" rtlCol="0" anchor="ctr"/>
+          <a:lstStyle/>
+          <a:p>
+            <a:pPr algn="ctr" indent="0" marL="0">
+              <a:buNone/>
+            </a:pPr>
+            <a:r>
+              <a:rPr lang="en-US" sz="1400" b="1" dirty="0">
+                <a:solidFill>
+                  <a:schemeClr val="tx1"/>
+                </a:solidFill>
+              </a:rPr>
+              <a:t>Попълване</a:t>
+            </a:r>
+            <a:endParaRPr lang="en-US" sz="1400" dirty="0"/>
+          </a:p>
+        </p:txBody>
+      </p:sp>
+      <p:sp>
+        <p:nvSpPr>
+          <p:cNvPr id="9" name="Text 6"/>
+          <p:cNvSpPr txBox="1"/>
+          <p:nvPr/>
+        </p:nvSpPr>
+        <p:spPr>
+          <a:xfrm>
+            <a:off x="457200" y="2377440"/>
+            <a:ext cx="1554480" cy="822960"/>
+          </a:xfrm>
+          <a:prstGeom prst="rect">
+            <a:avLst/>
+          </a:prstGeom>
+          <a:noFill/>
+          <a:ln/>
+        </p:spPr>
+        <p:txBody>
+          <a:bodyPr wrap="square" lIns="0" tIns="0" rIns="0" bIns="0" rtlCol="0" anchor="t"/>
+          <a:lstStyle/>
+          <a:p>
+            <a:pPr algn="ctr" indent="0" marL="0">
+              <a:buNone/>
+            </a:pPr>
+            <a:r>
+              <a:rPr lang="en-US" sz="1100" dirty="0">
+                <a:solidFill>
+                  <a:schemeClr val="tx2"/>
+                </a:solidFill>
+              </a:rPr>
+              <a:t>Състав → вашата карта → „+ Нова публикация“</a:t>
+            </a:r>
+            <a:endParaRPr lang="en-US" sz="1100" dirty="0"/>
+          </a:p>
+        </p:txBody>
+      </p:sp>
+      <p:sp>
+        <p:nvSpPr>
+          <p:cNvPr id="10" name="Shape 7"/>
+          <p:cNvSpPr/>
+          <p:nvPr/>
+        </p:nvSpPr>
+        <p:spPr>
+          <a:xfrm>
+            <a:off x="2596896" y="1234440"/>
+            <a:ext cx="640080" cy="640080"/>
+          </a:xfrm>
+          <a:prstGeom prst="ellipse">
+            <a:avLst/>
+          </a:prstGeom>
+          <a:solidFill>
+            <a:schemeClr val="accent1"/>
+          </a:solidFill>
+          <a:ln w="12700">
+            <a:solidFill>
+              <a:schemeClr val="accent1"/>
+            </a:solidFill>
+            <a:prstDash val="solid"/>
+          </a:ln>
+        </p:spPr>
+      </p:sp>
+      <p:pic>
+        <p:nvPicPr>
+          <p:cNvPr id="11" name="Image 1" descr="preencoded.png">    </p:cNvPr>
+          <p:cNvPicPr>
+            <a:picLocks noChangeAspect="1"/>
+          </p:cNvPicPr>
+          <p:nvPr/>
+        </p:nvPicPr>
+        <p:blipFill>
+          <a:blip r:embed="rId2"/>
+          <a:stretch>
+            <a:fillRect/>
+          </a:stretch>
+        </p:blipFill>
+        <p:spPr>
+          <a:xfrm>
+            <a:off x="2737714" y="1375258"/>
+            <a:ext cx="358445" cy="358445"/>
+          </a:xfrm>
+          <a:prstGeom prst="rect">
+            <a:avLst/>
+          </a:prstGeom>
+        </p:spPr>
+      </p:pic>
+      <p:sp>
+        <p:nvSpPr>
+          <p:cNvPr id="12" name="badge 2"/>
+          <p:cNvSpPr/>
+          <p:nvPr/>
+        </p:nvSpPr>
+        <p:spPr>
+          <a:xfrm>
+            <a:off x="2487168" y="1143000"/>
+            <a:ext cx="274320" cy="274320"/>
+          </a:xfrm>
+          <a:prstGeom prst="ellipse">
+            <a:avLst/>
+          </a:prstGeom>
+          <a:solidFill>
+            <a:schemeClr val="tx1"/>
+          </a:solidFill>
+          <a:ln w="12700">
+            <a:solidFill>
+              <a:schemeClr val="tx1"/>
+            </a:solidFill>
+            <a:prstDash val="solid"/>
+          </a:ln>
+        </p:spPr>
+      </p:sp>
+      <p:sp>
+        <p:nvSpPr>
+          <p:cNvPr id="13" name="Text 9"/>
+          <p:cNvSpPr txBox="1"/>
+          <p:nvPr/>
+        </p:nvSpPr>
+        <p:spPr>
+          <a:xfrm>
+            <a:off x="2487168" y="1143000"/>
+            <a:ext cx="274320" cy="274320"/>
+          </a:xfrm>
+          <a:prstGeom prst="rect">
+            <a:avLst/>
+          </a:prstGeom>
+          <a:noFill/>
+          <a:ln/>
+        </p:spPr>
+        <p:txBody>
+          <a:bodyPr wrap="square" lIns="0" tIns="0" rIns="0" bIns="0" rtlCol="0" anchor="ctr"/>
+          <a:lstStyle/>
+          <a:p>
+            <a:pPr algn="ctr" indent="0" marL="0">
+              <a:buNone/>
+            </a:pPr>
+            <a:r>
+              <a:rPr lang="en-US" sz="1400" b="1" dirty="0">
+                <a:solidFill>
+                  <a:schemeClr val="bg1"/>
+                </a:solidFill>
+              </a:rPr>
+              <a:t>2</a:t>
+            </a:r>
+            <a:endParaRPr lang="en-US" sz="1400" dirty="0"/>
+          </a:p>
+        </p:txBody>
+      </p:sp>
+      <p:sp>
+        <p:nvSpPr>
+          <p:cNvPr id="14" name="Shape 10"/>
+          <p:cNvSpPr/>
+          <p:nvPr/>
+        </p:nvSpPr>
+        <p:spPr>
+          <a:xfrm>
+            <a:off x="3401568" y="1444752"/>
+            <a:ext cx="384048" cy="219456"/>
+          </a:xfrm>
+          <a:prstGeom prst="rightArrow">
+            <a:avLst/>
+          </a:prstGeom>
+          <a:solidFill>
+            <a:schemeClr val="accent6"/>
+          </a:solidFill>
+          <a:ln w="12700">
+            <a:solidFill>
+              <a:schemeClr val="accent6"/>
+            </a:solidFill>
+            <a:prstDash val="solid"/>
+          </a:ln>
+        </p:spPr>
+      </p:sp>
+      <p:sp>
+        <p:nvSpPr>
+          <p:cNvPr id="15" name="Text 11"/>
+          <p:cNvSpPr txBox="1"/>
+          <p:nvPr/>
+        </p:nvSpPr>
+        <p:spPr>
+          <a:xfrm>
+            <a:off x="2139696" y="2011680"/>
+            <a:ext cx="1554480" cy="365760"/>
+          </a:xfrm>
+          <a:prstGeom prst="rect">
+            <a:avLst/>
+          </a:prstGeom>
+          <a:noFill/>
+          <a:ln/>
+        </p:spPr>
+        <p:txBody>
+          <a:bodyPr wrap="square" lIns="0" tIns="0" rIns="0" bIns="0" rtlCol="0" anchor="ctr"/>
+          <a:lstStyle/>
+          <a:p>
+            <a:pPr algn="ctr" indent="0" marL="0">
+              <a:buNone/>
+            </a:pPr>
+            <a:r>
+              <a:rPr lang="en-US" sz="1400" b="1" dirty="0">
+                <a:solidFill>
+                  <a:schemeClr val="tx1"/>
+                </a:solidFill>
+              </a:rPr>
+              <a:t>Запиши</a:t>
+            </a:r>
+            <a:endParaRPr lang="en-US" sz="1400" dirty="0"/>
+          </a:p>
+        </p:txBody>
+      </p:sp>
+      <p:sp>
+        <p:nvSpPr>
+          <p:cNvPr id="16" name="Text 12"/>
+          <p:cNvSpPr txBox="1"/>
+          <p:nvPr/>
+        </p:nvSpPr>
+        <p:spPr>
+          <a:xfrm>
+            <a:off x="2139696" y="2377440"/>
+            <a:ext cx="1554480" cy="822960"/>
+          </a:xfrm>
+          <a:prstGeom prst="rect">
+            <a:avLst/>
+          </a:prstGeom>
+          <a:noFill/>
+          <a:ln/>
+        </p:spPr>
+        <p:txBody>
+          <a:bodyPr wrap="square" lIns="0" tIns="0" rIns="0" bIns="0" rtlCol="0" anchor="t"/>
+          <a:lstStyle/>
+          <a:p>
+            <a:pPr algn="ctr" indent="0" marL="0">
+              <a:buNone/>
+            </a:pPr>
+            <a:r>
+              <a:rPr lang="en-US" sz="1100" dirty="0">
+                <a:solidFill>
+                  <a:schemeClr val="tx2"/>
+                </a:solidFill>
+              </a:rPr>
+              <a:t>проверка във формата; грешките са в червено</a:t>
+            </a:r>
+            <a:endParaRPr lang="en-US" sz="1100" dirty="0"/>
+          </a:p>
+        </p:txBody>
+      </p:sp>
+      <p:sp>
+        <p:nvSpPr>
+          <p:cNvPr id="17" name="Shape 13"/>
+          <p:cNvSpPr/>
+          <p:nvPr/>
+        </p:nvSpPr>
+        <p:spPr>
+          <a:xfrm>
+            <a:off x="4279392" y="1234440"/>
+            <a:ext cx="640080" cy="640080"/>
+          </a:xfrm>
+          <a:prstGeom prst="ellipse">
+            <a:avLst/>
+          </a:prstGeom>
+          <a:solidFill>
+            <a:schemeClr val="accent1"/>
+          </a:solidFill>
+          <a:ln w="12700">
+            <a:solidFill>
+              <a:schemeClr val="accent1"/>
+            </a:solidFill>
+            <a:prstDash val="solid"/>
+          </a:ln>
+        </p:spPr>
+      </p:sp>
+      <p:pic>
+        <p:nvPicPr>
+          <p:cNvPr id="18" name="Image 2" descr="preencoded.png">    </p:cNvPr>
+          <p:cNvPicPr>
+            <a:picLocks noChangeAspect="1"/>
+          </p:cNvPicPr>
+          <p:nvPr/>
+        </p:nvPicPr>
+        <p:blipFill>
+          <a:blip r:embed="rId3"/>
+          <a:stretch>
+            <a:fillRect/>
+          </a:stretch>
+        </p:blipFill>
+        <p:spPr>
+          <a:xfrm>
+            <a:off x="4420210" y="1375258"/>
+            <a:ext cx="358445" cy="358445"/>
+          </a:xfrm>
+          <a:prstGeom prst="rect">
+            <a:avLst/>
+          </a:prstGeom>
+        </p:spPr>
+      </p:pic>
+      <p:sp>
+        <p:nvSpPr>
+          <p:cNvPr id="19" name="badge 3"/>
+          <p:cNvSpPr/>
+          <p:nvPr/>
+        </p:nvSpPr>
+        <p:spPr>
+          <a:xfrm>
+            <a:off x="4169664" y="1143000"/>
+            <a:ext cx="274320" cy="274320"/>
+          </a:xfrm>
+          <a:prstGeom prst="ellipse">
+            <a:avLst/>
+          </a:prstGeom>
+          <a:solidFill>
+            <a:schemeClr val="tx1"/>
+          </a:solidFill>
+          <a:ln w="12700">
+            <a:solidFill>
+              <a:schemeClr val="tx1"/>
+            </a:solidFill>
+            <a:prstDash val="solid"/>
+          </a:ln>
+        </p:spPr>
+      </p:sp>
+      <p:sp>
+        <p:nvSpPr>
+          <p:cNvPr id="20" name="Text 15"/>
+          <p:cNvSpPr txBox="1"/>
+          <p:nvPr/>
+        </p:nvSpPr>
+        <p:spPr>
+          <a:xfrm>
+            <a:off x="4169664" y="1143000"/>
+            <a:ext cx="274320" cy="274320"/>
+          </a:xfrm>
+          <a:prstGeom prst="rect">
+            <a:avLst/>
+          </a:prstGeom>
+          <a:noFill/>
+          <a:ln/>
+        </p:spPr>
+        <p:txBody>
+          <a:bodyPr wrap="square" lIns="0" tIns="0" rIns="0" bIns="0" rtlCol="0" anchor="ctr"/>
+          <a:lstStyle/>
+          <a:p>
+            <a:pPr algn="ctr" indent="0" marL="0">
+              <a:buNone/>
+            </a:pPr>
+            <a:r>
+              <a:rPr lang="en-US" sz="1400" b="1" dirty="0">
+                <a:solidFill>
+                  <a:schemeClr val="bg1"/>
+                </a:solidFill>
+              </a:rPr>
+              <a:t>3</a:t>
+            </a:r>
+            <a:endParaRPr lang="en-US" sz="1400" dirty="0"/>
+          </a:p>
+        </p:txBody>
+      </p:sp>
+      <p:sp>
+        <p:nvSpPr>
+          <p:cNvPr id="21" name="Shape 16"/>
+          <p:cNvSpPr/>
+          <p:nvPr/>
+        </p:nvSpPr>
+        <p:spPr>
+          <a:xfrm>
+            <a:off x="5084064" y="1444752"/>
+            <a:ext cx="384048" cy="219456"/>
+          </a:xfrm>
+          <a:prstGeom prst="rightArrow">
+            <a:avLst/>
+          </a:prstGeom>
+          <a:solidFill>
+            <a:schemeClr val="accent6"/>
+          </a:solidFill>
+          <a:ln w="12700">
+            <a:solidFill>
+              <a:schemeClr val="accent6"/>
+            </a:solidFill>
+            <a:prstDash val="solid"/>
+          </a:ln>
+        </p:spPr>
+      </p:sp>
+      <p:sp>
+        <p:nvSpPr>
+          <p:cNvPr id="22" name="Text 17"/>
+          <p:cNvSpPr txBox="1"/>
+          <p:nvPr/>
+        </p:nvSpPr>
+        <p:spPr>
+          <a:xfrm>
+            <a:off x="3822192" y="2011680"/>
+            <a:ext cx="1554480" cy="365760"/>
+          </a:xfrm>
+          <a:prstGeom prst="rect">
+            <a:avLst/>
+          </a:prstGeom>
+          <a:noFill/>
+          <a:ln/>
+        </p:spPr>
+        <p:txBody>
+          <a:bodyPr wrap="square" lIns="0" tIns="0" rIns="0" bIns="0" rtlCol="0" anchor="ctr"/>
+          <a:lstStyle/>
+          <a:p>
+            <a:pPr algn="ctr" indent="0" marL="0">
+              <a:buNone/>
+            </a:pPr>
+            <a:r>
+              <a:rPr lang="en-US" sz="1400" b="1" dirty="0">
+                <a:solidFill>
+                  <a:schemeClr val="tx1"/>
+                </a:solidFill>
+              </a:rPr>
+              <a:t>GitHub</a:t>
+            </a:r>
+            <a:endParaRPr lang="en-US" sz="1400" dirty="0"/>
+          </a:p>
+        </p:txBody>
+      </p:sp>
+      <p:sp>
+        <p:nvSpPr>
+          <p:cNvPr id="23" name="Text 18"/>
+          <p:cNvSpPr txBox="1"/>
+          <p:nvPr/>
+        </p:nvSpPr>
+        <p:spPr>
+          <a:xfrm>
+            <a:off x="3822192" y="2377440"/>
+            <a:ext cx="1554480" cy="822960"/>
+          </a:xfrm>
+          <a:prstGeom prst="rect">
+            <a:avLst/>
+          </a:prstGeom>
+          <a:noFill/>
+          <a:ln/>
+        </p:spPr>
+        <p:txBody>
+          <a:bodyPr wrap="square" lIns="0" tIns="0" rIns="0" bIns="0" rtlCol="0" anchor="t"/>
+          <a:lstStyle/>
+          <a:p>
+            <a:pPr algn="ctr" indent="0" marL="0">
+              <a:buNone/>
+            </a:pPr>
+            <a:r>
+              <a:rPr lang="en-US" sz="1100" dirty="0">
+                <a:solidFill>
+                  <a:schemeClr val="tx2"/>
+                </a:solidFill>
+              </a:rPr>
+              <a:t>вход с вашия акаунт → зелен бутон „Create“</a:t>
+            </a:r>
+            <a:endParaRPr lang="en-US" sz="1100" dirty="0"/>
+          </a:p>
+        </p:txBody>
+      </p:sp>
+      <p:sp>
+        <p:nvSpPr>
+          <p:cNvPr id="24" name="Shape 19"/>
+          <p:cNvSpPr/>
+          <p:nvPr/>
+        </p:nvSpPr>
+        <p:spPr>
+          <a:xfrm>
+            <a:off x="5961888" y="1234440"/>
+            <a:ext cx="640080" cy="640080"/>
+          </a:xfrm>
+          <a:prstGeom prst="ellipse">
+            <a:avLst/>
+          </a:prstGeom>
+          <a:solidFill>
+            <a:schemeClr val="accent1"/>
+          </a:solidFill>
+          <a:ln w="12700">
+            <a:solidFill>
+              <a:schemeClr val="accent1"/>
+            </a:solidFill>
+            <a:prstDash val="solid"/>
+          </a:ln>
+        </p:spPr>
+      </p:sp>
+      <p:pic>
+        <p:nvPicPr>
+          <p:cNvPr id="25" name="Image 3" descr="preencoded.png">    </p:cNvPr>
+          <p:cNvPicPr>
+            <a:picLocks noChangeAspect="1"/>
+          </p:cNvPicPr>
+          <p:nvPr/>
+        </p:nvPicPr>
+        <p:blipFill>
+          <a:blip r:embed="rId4"/>
+          <a:stretch>
+            <a:fillRect/>
+          </a:stretch>
+        </p:blipFill>
+        <p:spPr>
+          <a:xfrm>
+            <a:off x="6102706" y="1375258"/>
+            <a:ext cx="358445" cy="358445"/>
+          </a:xfrm>
+          <a:prstGeom prst="rect">
+            <a:avLst/>
+          </a:prstGeom>
+        </p:spPr>
+      </p:pic>
+      <p:sp>
+        <p:nvSpPr>
+          <p:cNvPr id="26" name="badge 4"/>
+          <p:cNvSpPr/>
+          <p:nvPr/>
+        </p:nvSpPr>
+        <p:spPr>
+          <a:xfrm>
+            <a:off x="5852160" y="1143000"/>
+            <a:ext cx="274320" cy="274320"/>
+          </a:xfrm>
+          <a:prstGeom prst="ellipse">
+            <a:avLst/>
+          </a:prstGeom>
+          <a:solidFill>
+            <a:schemeClr val="tx1"/>
+          </a:solidFill>
+          <a:ln w="12700">
+            <a:solidFill>
+              <a:schemeClr val="tx1"/>
+            </a:solidFill>
+            <a:prstDash val="solid"/>
+          </a:ln>
+        </p:spPr>
+      </p:sp>
+      <p:sp>
+        <p:nvSpPr>
+          <p:cNvPr id="27" name="Text 21"/>
+          <p:cNvSpPr txBox="1"/>
+          <p:nvPr/>
+        </p:nvSpPr>
+        <p:spPr>
+          <a:xfrm>
+            <a:off x="5852160" y="1143000"/>
+            <a:ext cx="274320" cy="274320"/>
+          </a:xfrm>
+          <a:prstGeom prst="rect">
+            <a:avLst/>
+          </a:prstGeom>
+          <a:noFill/>
+          <a:ln/>
+        </p:spPr>
+        <p:txBody>
+          <a:bodyPr wrap="square" lIns="0" tIns="0" rIns="0" bIns="0" rtlCol="0" anchor="ctr"/>
+          <a:lstStyle/>
+          <a:p>
+            <a:pPr algn="ctr" indent="0" marL="0">
+              <a:buNone/>
+            </a:pPr>
+            <a:r>
+              <a:rPr lang="en-US" sz="1400" b="1" dirty="0">
+                <a:solidFill>
+                  <a:schemeClr val="bg1"/>
+                </a:solidFill>
+              </a:rPr>
+              <a:t>4</a:t>
+            </a:r>
+            <a:endParaRPr lang="en-US" sz="1400" dirty="0"/>
+          </a:p>
+        </p:txBody>
+      </p:sp>
+      <p:sp>
+        <p:nvSpPr>
+          <p:cNvPr id="28" name="Shape 22"/>
+          <p:cNvSpPr/>
+          <p:nvPr/>
+        </p:nvSpPr>
+        <p:spPr>
+          <a:xfrm>
+            <a:off x="6766560" y="1444752"/>
+            <a:ext cx="384048" cy="219456"/>
+          </a:xfrm>
+          <a:prstGeom prst="rightArrow">
+            <a:avLst/>
+          </a:prstGeom>
+          <a:solidFill>
+            <a:schemeClr val="accent6"/>
+          </a:solidFill>
+          <a:ln w="12700">
+            <a:solidFill>
+              <a:schemeClr val="accent6"/>
+            </a:solidFill>
+            <a:prstDash val="solid"/>
+          </a:ln>
+        </p:spPr>
+      </p:sp>
+      <p:sp>
+        <p:nvSpPr>
+          <p:cNvPr id="29" name="Text 23"/>
+          <p:cNvSpPr txBox="1"/>
+          <p:nvPr/>
+        </p:nvSpPr>
+        <p:spPr>
+          <a:xfrm>
+            <a:off x="5504688" y="2011680"/>
+            <a:ext cx="1554480" cy="365760"/>
+          </a:xfrm>
+          <a:prstGeom prst="rect">
+            <a:avLst/>
+          </a:prstGeom>
+          <a:noFill/>
+          <a:ln/>
+        </p:spPr>
+        <p:txBody>
+          <a:bodyPr wrap="square" lIns="0" tIns="0" rIns="0" bIns="0" rtlCol="0" anchor="ctr"/>
+          <a:lstStyle/>
+          <a:p>
+            <a:pPr algn="ctr" indent="0" marL="0">
+              <a:buNone/>
+            </a:pPr>
+            <a:r>
+              <a:rPr lang="en-US" sz="1400" b="1" dirty="0">
+                <a:solidFill>
+                  <a:schemeClr val="tx1"/>
+                </a:solidFill>
+              </a:rPr>
+              <a:t>Проверка</a:t>
+            </a:r>
+            <a:endParaRPr lang="en-US" sz="1400" dirty="0"/>
+          </a:p>
+        </p:txBody>
+      </p:sp>
+      <p:sp>
+        <p:nvSpPr>
+          <p:cNvPr id="30" name="Text 24"/>
+          <p:cNvSpPr txBox="1"/>
+          <p:nvPr/>
+        </p:nvSpPr>
+        <p:spPr>
+          <a:xfrm>
+            <a:off x="5504688" y="2377440"/>
+            <a:ext cx="1554480" cy="822960"/>
+          </a:xfrm>
+          <a:prstGeom prst="rect">
+            <a:avLst/>
+          </a:prstGeom>
+          <a:noFill/>
+          <a:ln/>
+        </p:spPr>
+        <p:txBody>
+          <a:bodyPr wrap="square" lIns="0" tIns="0" rIns="0" bIns="0" rtlCol="0" anchor="t"/>
+          <a:lstStyle/>
+          <a:p>
+            <a:pPr algn="ctr" indent="0" marL="0">
+              <a:buNone/>
+            </a:pPr>
+            <a:r>
+              <a:rPr lang="en-US" sz="1100" dirty="0">
+                <a:solidFill>
+                  <a:schemeClr val="tx2"/>
+                </a:solidFill>
+              </a:rPr>
+              <a:t>DOI / ISSN / ISBN в регистрите: ✅ или ❌</a:t>
+            </a:r>
+            <a:endParaRPr lang="en-US" sz="1100" dirty="0"/>
+          </a:p>
+        </p:txBody>
+      </p:sp>
+      <p:sp>
+        <p:nvSpPr>
+          <p:cNvPr id="31" name="Shape 25"/>
+          <p:cNvSpPr/>
+          <p:nvPr/>
+        </p:nvSpPr>
+        <p:spPr>
+          <a:xfrm>
+            <a:off x="7644384" y="1234440"/>
+            <a:ext cx="640080" cy="640080"/>
+          </a:xfrm>
+          <a:prstGeom prst="ellipse">
+            <a:avLst/>
+          </a:prstGeom>
+          <a:solidFill>
+            <a:schemeClr val="accent3"/>
+          </a:solidFill>
+          <a:ln w="12700">
+            <a:solidFill>
+              <a:schemeClr val="accent3"/>
+            </a:solidFill>
+            <a:prstDash val="solid"/>
+          </a:ln>
+        </p:spPr>
+      </p:sp>
+      <p:pic>
+        <p:nvPicPr>
+          <p:cNvPr id="32" name="Image 4" descr="preencoded.png">    </p:cNvPr>
+          <p:cNvPicPr>
+            <a:picLocks noChangeAspect="1"/>
+          </p:cNvPicPr>
+          <p:nvPr/>
+        </p:nvPicPr>
+        <p:blipFill>
+          <a:blip r:embed="rId5"/>
+          <a:stretch>
+            <a:fillRect/>
+          </a:stretch>
+        </p:blipFill>
+        <p:spPr>
+          <a:xfrm>
+            <a:off x="7785202" y="1375258"/>
+            <a:ext cx="358445" cy="358445"/>
+          </a:xfrm>
+          <a:prstGeom prst="rect">
+            <a:avLst/>
+          </a:prstGeom>
+        </p:spPr>
+      </p:pic>
+      <p:sp>
+        <p:nvSpPr>
+          <p:cNvPr id="33" name="badge 5"/>
+          <p:cNvSpPr/>
+          <p:nvPr/>
+        </p:nvSpPr>
+        <p:spPr>
+          <a:xfrm>
+            <a:off x="7534656" y="1143000"/>
+            <a:ext cx="274320" cy="274320"/>
+          </a:xfrm>
+          <a:prstGeom prst="ellipse">
+            <a:avLst/>
+          </a:prstGeom>
+          <a:solidFill>
+            <a:schemeClr val="tx1"/>
+          </a:solidFill>
+          <a:ln w="12700">
+            <a:solidFill>
+              <a:schemeClr val="tx1"/>
+            </a:solidFill>
+            <a:prstDash val="solid"/>
+          </a:ln>
+        </p:spPr>
+      </p:sp>
+      <p:sp>
+        <p:nvSpPr>
+          <p:cNvPr id="34" name="Text 27"/>
+          <p:cNvSpPr txBox="1"/>
+          <p:nvPr/>
+        </p:nvSpPr>
+        <p:spPr>
+          <a:xfrm>
+            <a:off x="7534656" y="1143000"/>
+            <a:ext cx="274320" cy="274320"/>
+          </a:xfrm>
+          <a:prstGeom prst="rect">
+            <a:avLst/>
+          </a:prstGeom>
+          <a:noFill/>
+          <a:ln/>
+        </p:spPr>
+        <p:txBody>
+          <a:bodyPr wrap="square" lIns="0" tIns="0" rIns="0" bIns="0" rtlCol="0" anchor="ctr"/>
+          <a:lstStyle/>
+          <a:p>
+            <a:pPr algn="ctr" indent="0" marL="0">
+              <a:buNone/>
+            </a:pPr>
+            <a:r>
+              <a:rPr lang="en-US" sz="1400" b="1" dirty="0">
+                <a:solidFill>
+                  <a:schemeClr val="bg1"/>
+                </a:solidFill>
+              </a:rPr>
+              <a:t>5</a:t>
+            </a:r>
+            <a:endParaRPr lang="en-US" sz="1400" dirty="0"/>
+          </a:p>
+        </p:txBody>
+      </p:sp>
+      <p:sp>
+        <p:nvSpPr>
+          <p:cNvPr id="35" name="Text 28"/>
+          <p:cNvSpPr txBox="1"/>
+          <p:nvPr/>
+        </p:nvSpPr>
+        <p:spPr>
+          <a:xfrm>
+            <a:off x="7187184" y="2011680"/>
+            <a:ext cx="1554480" cy="365760"/>
+          </a:xfrm>
+          <a:prstGeom prst="rect">
+            <a:avLst/>
+          </a:prstGeom>
+          <a:noFill/>
+          <a:ln/>
+        </p:spPr>
+        <p:txBody>
+          <a:bodyPr wrap="square" lIns="0" tIns="0" rIns="0" bIns="0" rtlCol="0" anchor="ctr"/>
+          <a:lstStyle/>
+          <a:p>
+            <a:pPr algn="ctr" indent="0" marL="0">
+              <a:buNone/>
+            </a:pPr>
+            <a:r>
+              <a:rPr lang="en-US" sz="1400" b="1" dirty="0">
+                <a:solidFill>
+                  <a:schemeClr val="tx1"/>
+                </a:solidFill>
+              </a:rPr>
+              <a:t>На сайта</a:t>
+            </a:r>
+            <a:endParaRPr lang="en-US" sz="1400" dirty="0"/>
+          </a:p>
+        </p:txBody>
+      </p:sp>
+      <p:sp>
+        <p:nvSpPr>
+          <p:cNvPr id="36" name="Text 29"/>
+          <p:cNvSpPr txBox="1"/>
+          <p:nvPr/>
+        </p:nvSpPr>
+        <p:spPr>
+          <a:xfrm>
+            <a:off x="7187184" y="2377440"/>
+            <a:ext cx="1554480" cy="822960"/>
+          </a:xfrm>
+          <a:prstGeom prst="rect">
+            <a:avLst/>
+          </a:prstGeom>
+          <a:noFill/>
+          <a:ln/>
+        </p:spPr>
+        <p:txBody>
+          <a:bodyPr wrap="square" lIns="0" tIns="0" rIns="0" bIns="0" rtlCol="0" anchor="t"/>
+          <a:lstStyle/>
+          <a:p>
+            <a:pPr algn="ctr" indent="0" marL="0">
+              <a:buNone/>
+            </a:pPr>
+            <a:r>
+              <a:rPr lang="en-US" sz="1100" dirty="0">
+                <a:solidFill>
+                  <a:schemeClr val="tx2"/>
+                </a:solidFill>
+              </a:rPr>
+              <a:t>автоматично, до около минута</a:t>
+            </a:r>
+            <a:endParaRPr lang="en-US" sz="1100" dirty="0"/>
+          </a:p>
+        </p:txBody>
+      </p:sp>
+      <p:sp>
+        <p:nvSpPr>
+          <p:cNvPr id="37" name="Shape 30"/>
+          <p:cNvSpPr/>
+          <p:nvPr/>
+        </p:nvSpPr>
+        <p:spPr>
+          <a:xfrm>
+            <a:off x="457200" y="3429000"/>
+            <a:ext cx="8229600" cy="1143000"/>
+          </a:xfrm>
+          <a:prstGeom prst="roundRect">
+            <a:avLst>
+              <a:gd name="adj" fmla="val 6400"/>
+            </a:avLst>
+          </a:prstGeom>
+          <a:solidFill>
+            <a:schemeClr val="bg2"/>
+          </a:solidFill>
+          <a:ln w="12700">
+            <a:solidFill>
+              <a:schemeClr val="bg2"/>
+            </a:solidFill>
+            <a:prstDash val="solid"/>
+          </a:ln>
+        </p:spPr>
+      </p:sp>
+      <p:sp>
+        <p:nvSpPr>
+          <p:cNvPr id="38" name="Shape 31"/>
+          <p:cNvSpPr/>
+          <p:nvPr/>
+        </p:nvSpPr>
+        <p:spPr>
+          <a:xfrm>
+            <a:off x="685800" y="3730752"/>
+            <a:ext cx="548640" cy="548640"/>
+          </a:xfrm>
+          <a:prstGeom prst="ellipse">
+            <a:avLst/>
+          </a:prstGeom>
+          <a:solidFill>
+            <a:schemeClr val="tx1"/>
+          </a:solidFill>
+          <a:ln w="12700">
+            <a:solidFill>
+              <a:schemeClr val="tx1"/>
+            </a:solidFill>
+            <a:prstDash val="solid"/>
+          </a:ln>
+        </p:spPr>
+      </p:sp>
+      <p:pic>
+        <p:nvPicPr>
+          <p:cNvPr id="39" name="Image 5" descr="preencoded.png">    </p:cNvPr>
+          <p:cNvPicPr>
+            <a:picLocks noChangeAspect="1"/>
+          </p:cNvPicPr>
+          <p:nvPr/>
+        </p:nvPicPr>
+        <p:blipFill>
+          <a:blip r:embed="rId6"/>
+          <a:stretch>
+            <a:fillRect/>
+          </a:stretch>
+        </p:blipFill>
+        <p:spPr>
+          <a:xfrm>
+            <a:off x="806501" y="3851453"/>
+            <a:ext cx="307238" cy="307238"/>
+          </a:xfrm>
+          <a:prstGeom prst="rect">
+            <a:avLst/>
+          </a:prstGeom>
+        </p:spPr>
+      </p:pic>
+      <p:sp>
+        <p:nvSpPr>
+          <p:cNvPr id="40" name="Text 32"/>
+          <p:cNvSpPr txBox="1"/>
+          <p:nvPr/>
+        </p:nvSpPr>
+        <p:spPr>
+          <a:xfrm>
+            <a:off x="1417320" y="3520440"/>
+            <a:ext cx="7132320" cy="960120"/>
+          </a:xfrm>
+          <a:prstGeom prst="rect">
+            <a:avLst/>
+          </a:prstGeom>
+          <a:noFill/>
+          <a:ln/>
+        </p:spPr>
+        <p:txBody>
+          <a:bodyPr wrap="square" lIns="0" tIns="0" rIns="0" bIns="0" rtlCol="0" anchor="ctr"/>
+          <a:lstStyle/>
+          <a:p>
+            <a:pPr indent="0" marL="0">
+              <a:buNone/>
+            </a:pPr>
+            <a:r>
+              <a:rPr lang="en-US" sz="1200" b="1" dirty="0">
+                <a:solidFill>
+                  <a:schemeClr val="tx1"/>
+                </a:solidFill>
+              </a:rPr>
+              <a:t>Защо GitHub? </a:t>
+            </a:r>
+            <a:pPr indent="0" marL="0">
+              <a:buNone/>
+            </a:pPr>
+            <a:r>
+              <a:rPr lang="en-US" sz="1200" dirty="0">
+                <a:solidFill>
+                  <a:schemeClr val="tx1"/>
+                </a:solidFill>
+              </a:rPr>
+              <a:t>Сайтът няма собствен вход и не пази пароли. Самоличността се проверява от GitHub: заявка се приема само от акаунта на потребителя (или на ръководителя). Хранилището е публично — за статии под рецензия въвеждайте само резюме, никога пълен текст.</a:t>
+            </a:r>
+            <a:endParaRPr lang="en-US" sz="1200" dirty="0"/>
+          </a:p>
+        </p:txBody>
+      </p:sp>
+      <p:sp>
+        <p:nvSpPr>
+          <p:cNvPr id="25" name="Slide Number Placeholder 0"/>
+          <p:cNvSpPr>
+            <a:spLocks noGrp="1"/>
+          </p:cNvSpPr>
+          <p:nvPr>
+            <p:ph type="sldNum" sz="quarter" idx="4294967295"/>
+          </p:nvPr>
+        </p:nvSpPr>
+        <p:spPr>
+          <a:xfrm>
+            <a:off x="8229600" y="4800600"/>
+            <a:ext cx="457200" cy="228600"/>
+          </a:xfrm>
+          <a:prstGeom prst="rect">
+            <a:avLst/>
+          </a:prstGeom>
+          <a:extLst>
+            <a:ext uri="{C572A759-6A51-4108-AA02-DFA0A04FC94B}">
+              <ma14:wrappingTextBoxFlag xmlns:ma14="http://schemas.microsoft.com/office/mac/drawingml/2011/main" val="0"/>
+            </a:ext>
+          </a:extLst>
+        </p:spPr>
+        <p:txBody>
+          <a:bodyPr/>
+          <a:lstStyle>
+            <a:lvl1pPr>
+              <a:defRPr sz="900">
+                <a:solidFill>
+                  <a:schemeClr val="accent6"/>
+                </a:solidFill>
+              </a:defRPr>
+            </a:lvl1pPr>
+          </a:lstStyle>
+          <a:p>
+            <a:pPr algn="r"/>
+            <a:fld id="{F7021451-1387-4CA6-816F-3879F97B5CBC}" type="slidenum">
+              <a:rPr b="0" lang="en-US"/>
+              <a:t>16</a:t>
+            </a:fld>
+            <a:endParaRPr lang="en-US"/>
+          </a:p>
+        </p:txBody>
+      </p:sp>
+    </p:spTree>
+  </p:cSld>
+  <p:clrMapOvr>
+    <a:masterClrMapping/>
+  </p:clrMapOvr>
+</p:sld>
+</file>
+
+<file path=ppt/slides/slide17.xml><?xml version="1.0" encoding="utf-8"?>
+<p:sld xmlns:a="http://schemas.openxmlformats.org/drawingml/2006/main" xmlns:r="http://schemas.openxmlformats.org/officeDocument/2006/relationships" xmlns:p="http://schemas.openxmlformats.org/presentationml/2006/main">
+  <p:cSld name="Slide 17">
+    <p:spTree>
+      <p:nvGrpSpPr>
+        <p:cNvPr id="1" name=""/>
+        <p:cNvGrpSpPr/>
+        <p:nvPr/>
+      </p:nvGrpSpPr>
+      <p:grpSpPr>
+        <a:xfrm>
+          <a:off x="0" y="0"/>
+          <a:ext cx="0" cy="0"/>
+          <a:chOff x="0" y="0"/>
+          <a:chExt cx="0" cy="0"/>
+        </a:xfrm>
+      </p:grpSpPr>
+      <p:sp>
+        <p:nvSpPr>
+          <p:cNvPr id="2" name="Text 0"/>
+          <p:cNvSpPr/>
+          <p:nvPr>
+            <p:ph idx="100" type="title" hasCustomPrompt="1"/>
+          </p:nvPr>
+        </p:nvSpPr>
+        <p:spPr>
+          <a:xfrm>
+            <a:off x="457200" y="274320"/>
+            <a:ext cx="8229600" cy="640080"/>
+          </a:xfrm>
+          <a:prstGeom prst="rect">
+            <a:avLst/>
+          </a:prstGeom>
+          <a:noFill/>
+          <a:ln/>
+        </p:spPr>
+        <p:txBody>
+          <a:bodyPr wrap="square" lIns="0" tIns="0" rIns="0" bIns="0" rtlCol="0" anchor="ctr"/>
+          <a:lstStyle/>
+          <a:p>
+            <a:pPr algn="l" indent="0" marL="0">
+              <a:buNone/>
+            </a:pPr>
+            <a:r>
+              <a:rPr lang="en-US" sz="2600" b="1" dirty="0">
+                <a:solidFill>
+                  <a:schemeClr val="tx1"/>
+                </a:solidFill>
+              </a:rPr>
               <a:t>Формата: полета и подсказки</a:t>
             </a:r>
             <a:endParaRPr lang="en-US" sz="2600" dirty="0"/>
@@ -6652,7 +7294,7 @@
       </p:pic>
       <p:graphicFrame>
         <p:nvGraphicFramePr>
-          <p:cNvPr id="17" name="Table 0"/>
+          <p:cNvPr id="18" name="Table 0"/>
           <p:cNvGraphicFramePr>
             <a:graphicFrameLocks noGrp="1"/>
           </p:cNvGraphicFramePr>
@@ -8207,906 +8849,6 @@
             <a:pPr algn="r"/>
             <a:fld id="{F7021451-1387-4CA6-816F-3879F97B5CBC}" type="slidenum">
               <a:rPr b="0" lang="en-US"/>
-              <a:t>16</a:t>
-            </a:fld>
-            <a:endParaRPr lang="en-US"/>
-          </a:p>
-        </p:txBody>
-      </p:sp>
-    </p:spTree>
-  </p:cSld>
-  <p:clrMapOvr>
-    <a:masterClrMapping/>
-  </p:clrMapOvr>
-</p:sld>
-</file>
-
-<file path=ppt/slides/slide17.xml><?xml version="1.0" encoding="utf-8"?>
-<p:sld xmlns:a="http://schemas.openxmlformats.org/drawingml/2006/main" xmlns:r="http://schemas.openxmlformats.org/officeDocument/2006/relationships" xmlns:p="http://schemas.openxmlformats.org/presentationml/2006/main">
-  <p:cSld name="Slide 17">
-    <p:spTree>
-      <p:nvGrpSpPr>
-        <p:cNvPr id="1" name=""/>
-        <p:cNvGrpSpPr/>
-        <p:nvPr/>
-      </p:nvGrpSpPr>
-      <p:grpSpPr>
-        <a:xfrm>
-          <a:off x="0" y="0"/>
-          <a:ext cx="0" cy="0"/>
-          <a:chOff x="0" y="0"/>
-          <a:chExt cx="0" cy="0"/>
-        </a:xfrm>
-      </p:grpSpPr>
-      <p:sp>
-        <p:nvSpPr>
-          <p:cNvPr id="2" name="Text 0"/>
-          <p:cNvSpPr/>
-          <p:nvPr>
-            <p:ph idx="100" type="title" hasCustomPrompt="1"/>
-          </p:nvPr>
-        </p:nvSpPr>
-        <p:spPr>
-          <a:xfrm>
-            <a:off x="457200" y="274320"/>
-            <a:ext cx="8229600" cy="640080"/>
-          </a:xfrm>
-          <a:prstGeom prst="rect">
-            <a:avLst/>
-          </a:prstGeom>
-          <a:noFill/>
-          <a:ln/>
-        </p:spPr>
-        <p:txBody>
-          <a:bodyPr wrap="square" lIns="0" tIns="0" rIns="0" bIns="0" rtlCol="0" anchor="ctr"/>
-          <a:lstStyle/>
-          <a:p>
-            <a:pPr algn="l" indent="0" marL="0">
-              <a:buNone/>
-            </a:pPr>
-            <a:r>
-              <a:rPr lang="en-US" sz="2600" b="1" dirty="0">
-                <a:solidFill>
-                  <a:schemeClr val="tx1"/>
-                </a:solidFill>
-              </a:rPr>
-              <a:t>Авторите в APA стил</a:t>
-            </a:r>
-            <a:endParaRPr lang="en-US" sz="2600" dirty="0"/>
-          </a:p>
-        </p:txBody>
-      </p:sp>
-      <p:sp>
-        <p:nvSpPr>
-          <p:cNvPr id="3" name="badge 1"/>
-          <p:cNvSpPr/>
-          <p:nvPr/>
-        </p:nvSpPr>
-        <p:spPr>
-          <a:xfrm>
-            <a:off x="457200" y="1143000"/>
-            <a:ext cx="384048" cy="384048"/>
-          </a:xfrm>
-          <a:prstGeom prst="ellipse">
-            <a:avLst/>
-          </a:prstGeom>
-          <a:solidFill>
-            <a:schemeClr val="accent1"/>
-          </a:solidFill>
-          <a:ln w="12700">
-            <a:solidFill>
-              <a:schemeClr val="accent1"/>
-            </a:solidFill>
-            <a:prstDash val="solid"/>
-          </a:ln>
-        </p:spPr>
-      </p:sp>
-      <p:sp>
-        <p:nvSpPr>
-          <p:cNvPr id="4" name="Text 2"/>
-          <p:cNvSpPr txBox="1"/>
-          <p:nvPr/>
-        </p:nvSpPr>
-        <p:spPr>
-          <a:xfrm>
-            <a:off x="457200" y="1143000"/>
-            <a:ext cx="384048" cy="384048"/>
-          </a:xfrm>
-          <a:prstGeom prst="rect">
-            <a:avLst/>
-          </a:prstGeom>
-          <a:noFill/>
-          <a:ln/>
-        </p:spPr>
-        <p:txBody>
-          <a:bodyPr wrap="square" lIns="0" tIns="0" rIns="0" bIns="0" rtlCol="0" anchor="ctr"/>
-          <a:lstStyle/>
-          <a:p>
-            <a:pPr algn="ctr" indent="0" marL="0">
-              <a:buNone/>
-            </a:pPr>
-            <a:r>
-              <a:rPr lang="en-US" sz="1400" b="1" dirty="0">
-                <a:solidFill>
-                  <a:schemeClr val="bg1"/>
-                </a:solidFill>
-              </a:rPr>
-              <a:t>1</a:t>
-            </a:r>
-            <a:endParaRPr lang="en-US" sz="1400" dirty="0"/>
-          </a:p>
-        </p:txBody>
-      </p:sp>
-      <p:sp>
-        <p:nvSpPr>
-          <p:cNvPr id="5" name="Text 3"/>
-          <p:cNvSpPr txBox="1"/>
-          <p:nvPr/>
-        </p:nvSpPr>
-        <p:spPr>
-          <a:xfrm>
-            <a:off x="1005840" y="1115568"/>
-            <a:ext cx="3566160" cy="457200"/>
-          </a:xfrm>
-          <a:prstGeom prst="rect">
-            <a:avLst/>
-          </a:prstGeom>
-          <a:noFill/>
-          <a:ln/>
-        </p:spPr>
-        <p:txBody>
-          <a:bodyPr wrap="square" lIns="0" tIns="0" rIns="0" bIns="0" rtlCol="0" anchor="ctr"/>
-          <a:lstStyle/>
-          <a:p>
-            <a:pPr indent="0" marL="0">
-              <a:buNone/>
-            </a:pPr>
-            <a:r>
-              <a:rPr lang="en-US" sz="1350" dirty="0">
-                <a:solidFill>
-                  <a:schemeClr val="tx1"/>
-                </a:solidFill>
-              </a:rPr>
-              <a:t>Всеки автор: фамилия, запетая, инициали с точка.</a:t>
-            </a:r>
-            <a:endParaRPr lang="en-US" sz="1350" dirty="0"/>
-          </a:p>
-        </p:txBody>
-      </p:sp>
-      <p:sp>
-        <p:nvSpPr>
-          <p:cNvPr id="6" name="badge 2"/>
-          <p:cNvSpPr/>
-          <p:nvPr/>
-        </p:nvSpPr>
-        <p:spPr>
-          <a:xfrm>
-            <a:off x="457200" y="1783080"/>
-            <a:ext cx="384048" cy="384048"/>
-          </a:xfrm>
-          <a:prstGeom prst="ellipse">
-            <a:avLst/>
-          </a:prstGeom>
-          <a:solidFill>
-            <a:schemeClr val="accent1"/>
-          </a:solidFill>
-          <a:ln w="12700">
-            <a:solidFill>
-              <a:schemeClr val="accent1"/>
-            </a:solidFill>
-            <a:prstDash val="solid"/>
-          </a:ln>
-        </p:spPr>
-      </p:sp>
-      <p:sp>
-        <p:nvSpPr>
-          <p:cNvPr id="7" name="Text 5"/>
-          <p:cNvSpPr txBox="1"/>
-          <p:nvPr/>
-        </p:nvSpPr>
-        <p:spPr>
-          <a:xfrm>
-            <a:off x="457200" y="1783080"/>
-            <a:ext cx="384048" cy="384048"/>
-          </a:xfrm>
-          <a:prstGeom prst="rect">
-            <a:avLst/>
-          </a:prstGeom>
-          <a:noFill/>
-          <a:ln/>
-        </p:spPr>
-        <p:txBody>
-          <a:bodyPr wrap="square" lIns="0" tIns="0" rIns="0" bIns="0" rtlCol="0" anchor="ctr"/>
-          <a:lstStyle/>
-          <a:p>
-            <a:pPr algn="ctr" indent="0" marL="0">
-              <a:buNone/>
-            </a:pPr>
-            <a:r>
-              <a:rPr lang="en-US" sz="1400" b="1" dirty="0">
-                <a:solidFill>
-                  <a:schemeClr val="bg1"/>
-                </a:solidFill>
-              </a:rPr>
-              <a:t>2</a:t>
-            </a:r>
-            <a:endParaRPr lang="en-US" sz="1400" dirty="0"/>
-          </a:p>
-        </p:txBody>
-      </p:sp>
-      <p:sp>
-        <p:nvSpPr>
-          <p:cNvPr id="8" name="Text 6"/>
-          <p:cNvSpPr txBox="1"/>
-          <p:nvPr/>
-        </p:nvSpPr>
-        <p:spPr>
-          <a:xfrm>
-            <a:off x="1005840" y="1755648"/>
-            <a:ext cx="3566160" cy="457200"/>
-          </a:xfrm>
-          <a:prstGeom prst="rect">
-            <a:avLst/>
-          </a:prstGeom>
-          <a:noFill/>
-          <a:ln/>
-        </p:spPr>
-        <p:txBody>
-          <a:bodyPr wrap="square" lIns="0" tIns="0" rIns="0" bIns="0" rtlCol="0" anchor="ctr"/>
-          <a:lstStyle/>
-          <a:p>
-            <a:pPr indent="0" marL="0">
-              <a:buNone/>
-            </a:pPr>
-            <a:r>
-              <a:rPr lang="en-US" sz="1350" dirty="0">
-                <a:solidFill>
-                  <a:schemeClr val="tx1"/>
-                </a:solidFill>
-              </a:rPr>
-              <a:t>Авторите се разделят със запетая.</a:t>
-            </a:r>
-            <a:endParaRPr lang="en-US" sz="1350" dirty="0"/>
-          </a:p>
-        </p:txBody>
-      </p:sp>
-      <p:sp>
-        <p:nvSpPr>
-          <p:cNvPr id="9" name="badge 3"/>
-          <p:cNvSpPr/>
-          <p:nvPr/>
-        </p:nvSpPr>
-        <p:spPr>
-          <a:xfrm>
-            <a:off x="457200" y="2423160"/>
-            <a:ext cx="384048" cy="384048"/>
-          </a:xfrm>
-          <a:prstGeom prst="ellipse">
-            <a:avLst/>
-          </a:prstGeom>
-          <a:solidFill>
-            <a:schemeClr val="accent1"/>
-          </a:solidFill>
-          <a:ln w="12700">
-            <a:solidFill>
-              <a:schemeClr val="accent1"/>
-            </a:solidFill>
-            <a:prstDash val="solid"/>
-          </a:ln>
-        </p:spPr>
-      </p:sp>
-      <p:sp>
-        <p:nvSpPr>
-          <p:cNvPr id="10" name="Text 8"/>
-          <p:cNvSpPr txBox="1"/>
-          <p:nvPr/>
-        </p:nvSpPr>
-        <p:spPr>
-          <a:xfrm>
-            <a:off x="457200" y="2423160"/>
-            <a:ext cx="384048" cy="384048"/>
-          </a:xfrm>
-          <a:prstGeom prst="rect">
-            <a:avLst/>
-          </a:prstGeom>
-          <a:noFill/>
-          <a:ln/>
-        </p:spPr>
-        <p:txBody>
-          <a:bodyPr wrap="square" lIns="0" tIns="0" rIns="0" bIns="0" rtlCol="0" anchor="ctr"/>
-          <a:lstStyle/>
-          <a:p>
-            <a:pPr algn="ctr" indent="0" marL="0">
-              <a:buNone/>
-            </a:pPr>
-            <a:r>
-              <a:rPr lang="en-US" sz="1400" b="1" dirty="0">
-                <a:solidFill>
-                  <a:schemeClr val="bg1"/>
-                </a:solidFill>
-              </a:rPr>
-              <a:t>3</a:t>
-            </a:r>
-            <a:endParaRPr lang="en-US" sz="1400" dirty="0"/>
-          </a:p>
-        </p:txBody>
-      </p:sp>
-      <p:sp>
-        <p:nvSpPr>
-          <p:cNvPr id="11" name="Text 9"/>
-          <p:cNvSpPr txBox="1"/>
-          <p:nvPr/>
-        </p:nvSpPr>
-        <p:spPr>
-          <a:xfrm>
-            <a:off x="1005840" y="2395728"/>
-            <a:ext cx="3566160" cy="457200"/>
-          </a:xfrm>
-          <a:prstGeom prst="rect">
-            <a:avLst/>
-          </a:prstGeom>
-          <a:noFill/>
-          <a:ln/>
-        </p:spPr>
-        <p:txBody>
-          <a:bodyPr wrap="square" lIns="0" tIns="0" rIns="0" bIns="0" rtlCol="0" anchor="ctr"/>
-          <a:lstStyle/>
-          <a:p>
-            <a:pPr indent="0" marL="0">
-              <a:buNone/>
-            </a:pPr>
-            <a:r>
-              <a:rPr lang="en-US" sz="1350" dirty="0">
-                <a:solidFill>
-                  <a:schemeClr val="tx1"/>
-                </a:solidFill>
-              </a:rPr>
-              <a:t>Преди последния автор: „&amp;“ (запетая пред него при 3+ автори).</a:t>
-            </a:r>
-            <a:endParaRPr lang="en-US" sz="1350" dirty="0"/>
-          </a:p>
-        </p:txBody>
-      </p:sp>
-      <p:sp>
-        <p:nvSpPr>
-          <p:cNvPr id="12" name="badge 4"/>
-          <p:cNvSpPr/>
-          <p:nvPr/>
-        </p:nvSpPr>
-        <p:spPr>
-          <a:xfrm>
-            <a:off x="457200" y="3063240"/>
-            <a:ext cx="384048" cy="384048"/>
-          </a:xfrm>
-          <a:prstGeom prst="ellipse">
-            <a:avLst/>
-          </a:prstGeom>
-          <a:solidFill>
-            <a:schemeClr val="accent1"/>
-          </a:solidFill>
-          <a:ln w="12700">
-            <a:solidFill>
-              <a:schemeClr val="accent1"/>
-            </a:solidFill>
-            <a:prstDash val="solid"/>
-          </a:ln>
-        </p:spPr>
-      </p:sp>
-      <p:sp>
-        <p:nvSpPr>
-          <p:cNvPr id="13" name="Text 11"/>
-          <p:cNvSpPr txBox="1"/>
-          <p:nvPr/>
-        </p:nvSpPr>
-        <p:spPr>
-          <a:xfrm>
-            <a:off x="457200" y="3063240"/>
-            <a:ext cx="384048" cy="384048"/>
-          </a:xfrm>
-          <a:prstGeom prst="rect">
-            <a:avLst/>
-          </a:prstGeom>
-          <a:noFill/>
-          <a:ln/>
-        </p:spPr>
-        <p:txBody>
-          <a:bodyPr wrap="square" lIns="0" tIns="0" rIns="0" bIns="0" rtlCol="0" anchor="ctr"/>
-          <a:lstStyle/>
-          <a:p>
-            <a:pPr algn="ctr" indent="0" marL="0">
-              <a:buNone/>
-            </a:pPr>
-            <a:r>
-              <a:rPr lang="en-US" sz="1400" b="1" dirty="0">
-                <a:solidFill>
-                  <a:schemeClr val="bg1"/>
-                </a:solidFill>
-              </a:rPr>
-              <a:t>4</a:t>
-            </a:r>
-            <a:endParaRPr lang="en-US" sz="1400" dirty="0"/>
-          </a:p>
-        </p:txBody>
-      </p:sp>
-      <p:sp>
-        <p:nvSpPr>
-          <p:cNvPr id="14" name="Text 12"/>
-          <p:cNvSpPr txBox="1"/>
-          <p:nvPr/>
-        </p:nvSpPr>
-        <p:spPr>
-          <a:xfrm>
-            <a:off x="1005840" y="3035808"/>
-            <a:ext cx="3566160" cy="457200"/>
-          </a:xfrm>
-          <a:prstGeom prst="rect">
-            <a:avLst/>
-          </a:prstGeom>
-          <a:noFill/>
-          <a:ln/>
-        </p:spPr>
-        <p:txBody>
-          <a:bodyPr wrap="square" lIns="0" tIns="0" rIns="0" bIns="0" rtlCol="0" anchor="ctr"/>
-          <a:lstStyle/>
-          <a:p>
-            <a:pPr indent="0" marL="0">
-              <a:buNone/>
-            </a:pPr>
-            <a:r>
-              <a:rPr lang="en-US" sz="1350" dirty="0">
-                <a:solidFill>
-                  <a:schemeClr val="tx1"/>
-                </a:solidFill>
-              </a:rPr>
-              <a:t>Редът е като в статията; без „et al.“</a:t>
-            </a:r>
-            <a:endParaRPr lang="en-US" sz="1350" dirty="0"/>
-          </a:p>
-        </p:txBody>
-      </p:sp>
-      <p:sp>
-        <p:nvSpPr>
-          <p:cNvPr id="15" name="badge 5"/>
-          <p:cNvSpPr/>
-          <p:nvPr/>
-        </p:nvSpPr>
-        <p:spPr>
-          <a:xfrm>
-            <a:off x="457200" y="3703320"/>
-            <a:ext cx="384048" cy="384048"/>
-          </a:xfrm>
-          <a:prstGeom prst="ellipse">
-            <a:avLst/>
-          </a:prstGeom>
-          <a:solidFill>
-            <a:schemeClr val="accent1"/>
-          </a:solidFill>
-          <a:ln w="12700">
-            <a:solidFill>
-              <a:schemeClr val="accent1"/>
-            </a:solidFill>
-            <a:prstDash val="solid"/>
-          </a:ln>
-        </p:spPr>
-      </p:sp>
-      <p:sp>
-        <p:nvSpPr>
-          <p:cNvPr id="16" name="Text 14"/>
-          <p:cNvSpPr txBox="1"/>
-          <p:nvPr/>
-        </p:nvSpPr>
-        <p:spPr>
-          <a:xfrm>
-            <a:off x="457200" y="3703320"/>
-            <a:ext cx="384048" cy="384048"/>
-          </a:xfrm>
-          <a:prstGeom prst="rect">
-            <a:avLst/>
-          </a:prstGeom>
-          <a:noFill/>
-          <a:ln/>
-        </p:spPr>
-        <p:txBody>
-          <a:bodyPr wrap="square" lIns="0" tIns="0" rIns="0" bIns="0" rtlCol="0" anchor="ctr"/>
-          <a:lstStyle/>
-          <a:p>
-            <a:pPr algn="ctr" indent="0" marL="0">
-              <a:buNone/>
-            </a:pPr>
-            <a:r>
-              <a:rPr lang="en-US" sz="1400" b="1" dirty="0">
-                <a:solidFill>
-                  <a:schemeClr val="bg1"/>
-                </a:solidFill>
-              </a:rPr>
-              <a:t>5</a:t>
-            </a:r>
-            <a:endParaRPr lang="en-US" sz="1400" dirty="0"/>
-          </a:p>
-        </p:txBody>
-      </p:sp>
-      <p:sp>
-        <p:nvSpPr>
-          <p:cNvPr id="17" name="Text 15"/>
-          <p:cNvSpPr txBox="1"/>
-          <p:nvPr/>
-        </p:nvSpPr>
-        <p:spPr>
-          <a:xfrm>
-            <a:off x="1005840" y="3675888"/>
-            <a:ext cx="3566160" cy="457200"/>
-          </a:xfrm>
-          <a:prstGeom prst="rect">
-            <a:avLst/>
-          </a:prstGeom>
-          <a:noFill/>
-          <a:ln/>
-        </p:spPr>
-        <p:txBody>
-          <a:bodyPr wrap="square" lIns="0" tIns="0" rIns="0" bIns="0" rtlCol="0" anchor="ctr"/>
-          <a:lstStyle/>
-          <a:p>
-            <a:pPr indent="0" marL="0">
-              <a:buNone/>
-            </a:pPr>
-            <a:r>
-              <a:rPr lang="en-US" sz="1350" dirty="0">
-                <a:solidFill>
-                  <a:schemeClr val="tx1"/>
-                </a:solidFill>
-              </a:rPr>
-              <a:t>Частиците остават малки: „del Estad Herrero, A.“</a:t>
-            </a:r>
-            <a:endParaRPr lang="en-US" sz="1350" dirty="0"/>
-          </a:p>
-        </p:txBody>
-      </p:sp>
-      <p:sp>
-        <p:nvSpPr>
-          <p:cNvPr id="18" name="Shape 16"/>
-          <p:cNvSpPr/>
-          <p:nvPr/>
-        </p:nvSpPr>
-        <p:spPr>
-          <a:xfrm>
-            <a:off x="4846320" y="1051560"/>
-            <a:ext cx="3840480" cy="3520440"/>
-          </a:xfrm>
-          <a:prstGeom prst="roundRect">
-            <a:avLst>
-              <a:gd name="adj" fmla="val 2078"/>
-            </a:avLst>
-          </a:prstGeom>
-          <a:solidFill>
-            <a:schemeClr val="tx1"/>
-          </a:solidFill>
-          <a:ln w="12700">
-            <a:solidFill>
-              <a:schemeClr val="tx1"/>
-            </a:solidFill>
-            <a:prstDash val="solid"/>
-          </a:ln>
-        </p:spPr>
-      </p:sp>
-      <p:sp>
-        <p:nvSpPr>
-          <p:cNvPr id="19" name="Text 17"/>
-          <p:cNvSpPr txBox="1"/>
-          <p:nvPr/>
-        </p:nvSpPr>
-        <p:spPr>
-          <a:xfrm>
-            <a:off x="5074920" y="1188720"/>
-            <a:ext cx="3383280" cy="320040"/>
-          </a:xfrm>
-          <a:prstGeom prst="rect">
-            <a:avLst/>
-          </a:prstGeom>
-          <a:noFill/>
-          <a:ln/>
-        </p:spPr>
-        <p:txBody>
-          <a:bodyPr wrap="square" lIns="0" tIns="0" rIns="0" bIns="0" rtlCol="0" anchor="ctr"/>
-          <a:lstStyle/>
-          <a:p>
-            <a:pPr indent="0" marL="0">
-              <a:buNone/>
-            </a:pPr>
-            <a:r>
-              <a:rPr lang="en-US" sz="1300" b="1" dirty="0">
-                <a:solidFill>
-                  <a:schemeClr val="accent1"/>
-                </a:solidFill>
-              </a:rPr>
-              <a:t>Примери</a:t>
-            </a:r>
-            <a:endParaRPr lang="en-US" sz="1300" dirty="0"/>
-          </a:p>
-        </p:txBody>
-      </p:sp>
-      <p:sp>
-        <p:nvSpPr>
-          <p:cNvPr id="20" name="Text 18"/>
-          <p:cNvSpPr txBox="1"/>
-          <p:nvPr/>
-        </p:nvSpPr>
-        <p:spPr>
-          <a:xfrm>
-            <a:off x="5074920" y="1600200"/>
-            <a:ext cx="3474720" cy="2834640"/>
-          </a:xfrm>
-          <a:prstGeom prst="rect">
-            <a:avLst/>
-          </a:prstGeom>
-          <a:noFill/>
-          <a:ln/>
-        </p:spPr>
-        <p:txBody>
-          <a:bodyPr wrap="square" lIns="0" tIns="0" rIns="0" bIns="0" rtlCol="0" anchor="t"/>
-          <a:lstStyle/>
-          <a:p>
-            <a:pPr indent="0" marL="0">
-              <a:spcAft>
-                <a:spcPts val="800"/>
-              </a:spcAft>
-              <a:buNone/>
-            </a:pPr>
-            <a:r>
-              <a:rPr lang="en-US" sz="1250" b="1" dirty="0">
-                <a:solidFill>
-                  <a:srgbClr val="6FCF97"/>
-                </a:solidFill>
-                <a:latin typeface="Courier New" pitchFamily="34" charset="0"/>
-                <a:ea typeface="Courier New" pitchFamily="34" charset="-122"/>
-                <a:cs typeface="Courier New" pitchFamily="34" charset="-120"/>
-              </a:rPr>
-              <a:t>✓  </a:t>
-            </a:r>
-            <a:pPr indent="0" marL="0">
-              <a:spcAft>
-                <a:spcPts val="800"/>
-              </a:spcAft>
-              <a:buNone/>
-            </a:pPr>
-            <a:r>
-              <a:rPr lang="en-US" sz="1250" dirty="0">
-                <a:solidFill>
-                  <a:srgbClr val="E9EEF2"/>
-                </a:solidFill>
-                <a:latin typeface="Courier New" pitchFamily="34" charset="0"/>
-                <a:ea typeface="Courier New" pitchFamily="34" charset="-122"/>
-                <a:cs typeface="Courier New" pitchFamily="34" charset="-120"/>
-              </a:rPr>
-              <a:t>Madzharov, A.</a:t>
-            </a:r>
-            <a:endParaRPr lang="en-US" sz="1250" dirty="0"/>
-          </a:p>
-          <a:p>
-            <a:pPr indent="0" marL="0">
-              <a:spcAft>
-                <a:spcPts val="800"/>
-              </a:spcAft>
-              <a:buNone/>
-            </a:pPr>
-            <a:r>
-              <a:rPr lang="en-US" sz="1250" b="1" dirty="0">
-                <a:solidFill>
-                  <a:srgbClr val="6FCF97"/>
-                </a:solidFill>
-                <a:latin typeface="Courier New" pitchFamily="34" charset="0"/>
-                <a:ea typeface="Courier New" pitchFamily="34" charset="-122"/>
-                <a:cs typeface="Courier New" pitchFamily="34" charset="-120"/>
-              </a:rPr>
-              <a:t>✓  </a:t>
-            </a:r>
-            <a:pPr indent="0" marL="0">
-              <a:spcAft>
-                <a:spcPts val="800"/>
-              </a:spcAft>
-              <a:buNone/>
-            </a:pPr>
-            <a:r>
-              <a:rPr lang="en-US" sz="1250" dirty="0">
-                <a:solidFill>
-                  <a:srgbClr val="E9EEF2"/>
-                </a:solidFill>
-                <a:latin typeface="Courier New" pitchFamily="34" charset="0"/>
-                <a:ea typeface="Courier New" pitchFamily="34" charset="-122"/>
-                <a:cs typeface="Courier New" pitchFamily="34" charset="-120"/>
-              </a:rPr>
-              <a:t>Gaidarski, I., &amp; Madzharov, A.</a:t>
-            </a:r>
-            <a:endParaRPr lang="en-US" sz="1250" dirty="0"/>
-          </a:p>
-          <a:p>
-            <a:pPr indent="0" marL="0">
-              <a:spcAft>
-                <a:spcPts val="800"/>
-              </a:spcAft>
-              <a:buNone/>
-            </a:pPr>
-            <a:r>
-              <a:rPr lang="en-US" sz="1250" b="1" dirty="0">
-                <a:solidFill>
-                  <a:srgbClr val="6FCF97"/>
-                </a:solidFill>
-                <a:latin typeface="Courier New" pitchFamily="34" charset="0"/>
-                <a:ea typeface="Courier New" pitchFamily="34" charset="-122"/>
-                <a:cs typeface="Courier New" pitchFamily="34" charset="-120"/>
-              </a:rPr>
-              <a:t>✓  </a:t>
-            </a:r>
-            <a:pPr indent="0" marL="0">
-              <a:spcAft>
-                <a:spcPts val="800"/>
-              </a:spcAft>
-              <a:buNone/>
-            </a:pPr>
-            <a:r>
-              <a:rPr lang="en-US" sz="1250" dirty="0">
-                <a:solidFill>
-                  <a:srgbClr val="E9EEF2"/>
-                </a:solidFill>
-                <a:latin typeface="Courier New" pitchFamily="34" charset="0"/>
-                <a:ea typeface="Courier New" pitchFamily="34" charset="-122"/>
-                <a:cs typeface="Courier New" pitchFamily="34" charset="-120"/>
-              </a:rPr>
-              <a:t>Madzharov, A., Hristozov, S., &amp; Gaidarski, I.</a:t>
-            </a:r>
-            <a:endParaRPr lang="en-US" sz="1250" dirty="0"/>
-          </a:p>
-          <a:p>
-            <a:pPr indent="0" marL="0">
-              <a:spcAft>
-                <a:spcPts val="800"/>
-              </a:spcAft>
-              <a:buNone/>
-            </a:pPr>
-            <a:r>
-              <a:rPr lang="en-US" sz="1250" b="1" dirty="0">
-                <a:solidFill>
-                  <a:srgbClr val="6FCF97"/>
-                </a:solidFill>
-                <a:latin typeface="Courier New" pitchFamily="34" charset="0"/>
-                <a:ea typeface="Courier New" pitchFamily="34" charset="-122"/>
-                <a:cs typeface="Courier New" pitchFamily="34" charset="-120"/>
-              </a:rPr>
-              <a:t>✓  </a:t>
-            </a:r>
-            <a:pPr indent="0" marL="0">
-              <a:spcAft>
-                <a:spcPts val="800"/>
-              </a:spcAft>
-              <a:buNone/>
-            </a:pPr>
-            <a:r>
-              <a:rPr lang="en-US" sz="1250" dirty="0">
-                <a:solidFill>
-                  <a:srgbClr val="E9EEF2"/>
-                </a:solidFill>
-                <a:latin typeface="Courier New" pitchFamily="34" charset="0"/>
-                <a:ea typeface="Courier New" pitchFamily="34" charset="-122"/>
-                <a:cs typeface="Courier New" pitchFamily="34" charset="-120"/>
-              </a:rPr>
-              <a:t>Чехларова, Н., &amp; Чехларова, К.</a:t>
-            </a:r>
-            <a:endParaRPr lang="en-US" sz="1250" dirty="0"/>
-          </a:p>
-          <a:p>
-            <a:pPr indent="0" marL="0">
-              <a:spcAft>
-                <a:spcPts val="800"/>
-              </a:spcAft>
-              <a:buNone/>
-            </a:pPr>
-            <a:r>
-              <a:rPr lang="en-US" sz="1250" b="1" dirty="0">
-                <a:solidFill>
-                  <a:srgbClr val="FF8A80"/>
-                </a:solidFill>
-                <a:latin typeface="Courier New" pitchFamily="34" charset="0"/>
-                <a:ea typeface="Courier New" pitchFamily="34" charset="-122"/>
-                <a:cs typeface="Courier New" pitchFamily="34" charset="-120"/>
-              </a:rPr>
-              <a:t>✗  </a:t>
-            </a:r>
-            <a:pPr indent="0" marL="0">
-              <a:spcAft>
-                <a:spcPts val="800"/>
-              </a:spcAft>
-              <a:buNone/>
-            </a:pPr>
-            <a:r>
-              <a:rPr lang="en-US" sz="1250" dirty="0">
-                <a:solidFill>
-                  <a:srgbClr val="E9EEF2"/>
-                </a:solidFill>
-                <a:latin typeface="Courier New" pitchFamily="34" charset="0"/>
-                <a:ea typeface="Courier New" pitchFamily="34" charset="-122"/>
-                <a:cs typeface="Courier New" pitchFamily="34" charset="-120"/>
-              </a:rPr>
-              <a:t>Madzharov A., Hristozov S.</a:t>
-            </a:r>
-            <a:endParaRPr lang="en-US" sz="1250" dirty="0"/>
-          </a:p>
-          <a:p>
-            <a:pPr indent="0" marL="0">
-              <a:spcAft>
-                <a:spcPts val="800"/>
-              </a:spcAft>
-              <a:buNone/>
-            </a:pPr>
-            <a:r>
-              <a:rPr lang="en-US" sz="1250" b="1" dirty="0">
-                <a:solidFill>
-                  <a:srgbClr val="FF8A80"/>
-                </a:solidFill>
-                <a:latin typeface="Courier New" pitchFamily="34" charset="0"/>
-                <a:ea typeface="Courier New" pitchFamily="34" charset="-122"/>
-                <a:cs typeface="Courier New" pitchFamily="34" charset="-120"/>
-              </a:rPr>
-              <a:t>✗  </a:t>
-            </a:r>
-            <a:pPr indent="0" marL="0">
-              <a:spcAft>
-                <a:spcPts val="800"/>
-              </a:spcAft>
-              <a:buNone/>
-            </a:pPr>
-            <a:r>
-              <a:rPr lang="en-US" sz="1250" dirty="0">
-                <a:solidFill>
-                  <a:srgbClr val="E9EEF2"/>
-                </a:solidFill>
-                <a:latin typeface="Courier New" pitchFamily="34" charset="0"/>
-                <a:ea typeface="Courier New" pitchFamily="34" charset="-122"/>
-                <a:cs typeface="Courier New" pitchFamily="34" charset="-120"/>
-              </a:rPr>
-              <a:t>A. Madzharov, S. Hristozov</a:t>
-            </a:r>
-            <a:endParaRPr lang="en-US" sz="1250" dirty="0"/>
-          </a:p>
-        </p:txBody>
-      </p:sp>
-      <p:sp>
-        <p:nvSpPr>
-          <p:cNvPr id="25" name="Slide Number Placeholder 0"/>
-          <p:cNvSpPr>
-            <a:spLocks noGrp="1"/>
-          </p:cNvSpPr>
-          <p:nvPr>
-            <p:ph type="sldNum" sz="quarter" idx="4294967295"/>
-          </p:nvPr>
-        </p:nvSpPr>
-        <p:spPr>
-          <a:xfrm>
-            <a:off x="8229600" y="4800600"/>
-            <a:ext cx="457200" cy="228600"/>
-          </a:xfrm>
-          <a:prstGeom prst="rect">
-            <a:avLst/>
-          </a:prstGeom>
-          <a:extLst>
-            <a:ext uri="{C572A759-6A51-4108-AA02-DFA0A04FC94B}">
-              <ma14:wrappingTextBoxFlag xmlns:ma14="http://schemas.microsoft.com/office/mac/drawingml/2011/main" val="0"/>
-            </a:ext>
-          </a:extLst>
-        </p:spPr>
-        <p:txBody>
-          <a:bodyPr/>
-          <a:lstStyle>
-            <a:lvl1pPr>
-              <a:defRPr sz="900">
-                <a:solidFill>
-                  <a:schemeClr val="accent6"/>
-                </a:solidFill>
-              </a:defRPr>
-            </a:lvl1pPr>
-          </a:lstStyle>
-          <a:p>
-            <a:pPr algn="r"/>
-            <a:fld id="{F7021451-1387-4CA6-816F-3879F97B5CBC}" type="slidenum">
-              <a:rPr b="0" lang="en-US"/>
               <a:t>17</a:t>
             </a:fld>
             <a:endParaRPr lang="en-US"/>
@@ -9170,7 +8912,7 @@
                   <a:schemeClr val="tx1"/>
                 </a:solidFill>
               </a:rPr>
-              <a:t>Проверка във формата: грешка и успех</a:t>
+              <a:t>Авторите в APA стил</a:t>
             </a:r>
             <a:endParaRPr lang="en-US" sz="2600" dirty="0"/>
           </a:p>
@@ -9178,150 +8920,136 @@
       </p:sp>
       <p:sp>
         <p:nvSpPr>
-          <p:cNvPr id="3" name="Грешки frame"/>
+          <p:cNvPr id="3" name="badge 1"/>
           <p:cNvSpPr/>
           <p:nvPr/>
         </p:nvSpPr>
         <p:spPr>
           <a:xfrm>
-            <a:off x="624840" y="1051560"/>
-            <a:ext cx="3688080" cy="3017520"/>
-          </a:xfrm>
-          <a:prstGeom prst="rect">
+            <a:off x="457200" y="1143000"/>
+            <a:ext cx="384048" cy="384048"/>
+          </a:xfrm>
+          <a:prstGeom prst="ellipse">
             <a:avLst/>
           </a:prstGeom>
           <a:solidFill>
-            <a:schemeClr val="bg2"/>
+            <a:schemeClr val="accent1"/>
           </a:solidFill>
-          <a:ln w="9525">
+          <a:ln w="12700">
             <a:solidFill>
-              <a:srgbClr val="DDE2E6"/>
+              <a:schemeClr val="accent1"/>
             </a:solidFill>
             <a:prstDash val="solid"/>
           </a:ln>
-          <a:effectLst>
-            <a:outerShdw sx="100000" sy="100000" kx="0" ky="0" algn="bl" rotWithShape="0" blurRad="76200" dist="25400" dir="5400000">
-              <a:srgbClr val="0B1622">
-                <a:alpha val="18000"/>
-              </a:srgbClr>
-            </a:outerShdw>
-          </a:effectLst>
-        </p:spPr>
-      </p:sp>
-      <p:pic>
-        <p:nvPicPr>
-          <p:cNvPr id="4" name="Грешки" descr="Грешки">    </p:cNvPr>
-          <p:cNvPicPr>
-            <a:picLocks noChangeAspect="1"/>
-          </p:cNvPicPr>
-          <p:nvPr/>
-        </p:nvPicPr>
-        <p:blipFill>
-          <a:blip r:embed="rId1"/>
-          <a:stretch>
-            <a:fillRect/>
-          </a:stretch>
-        </p:blipFill>
-        <p:spPr>
-          <a:xfrm>
-            <a:off x="624840" y="1051560"/>
-            <a:ext cx="3688080" cy="3017520"/>
-          </a:xfrm>
-          <a:prstGeom prst="rect">
-            <a:avLst/>
-          </a:prstGeom>
-        </p:spPr>
-      </p:pic>
-      <p:sp>
-        <p:nvSpPr>
-          <p:cNvPr id="5" name="Успех frame"/>
+        </p:spPr>
+      </p:sp>
+      <p:sp>
+        <p:nvSpPr>
+          <p:cNvPr id="4" name="Text 2"/>
+          <p:cNvSpPr txBox="1"/>
+          <p:nvPr/>
+        </p:nvSpPr>
+        <p:spPr>
+          <a:xfrm>
+            <a:off x="457200" y="1143000"/>
+            <a:ext cx="384048" cy="384048"/>
+          </a:xfrm>
+          <a:prstGeom prst="rect">
+            <a:avLst/>
+          </a:prstGeom>
+          <a:noFill/>
+          <a:ln/>
+        </p:spPr>
+        <p:txBody>
+          <a:bodyPr wrap="square" lIns="0" tIns="0" rIns="0" bIns="0" rtlCol="0" anchor="ctr"/>
+          <a:lstStyle/>
+          <a:p>
+            <a:pPr algn="ctr" indent="0" marL="0">
+              <a:buNone/>
+            </a:pPr>
+            <a:r>
+              <a:rPr lang="en-US" sz="1400" b="1" dirty="0">
+                <a:solidFill>
+                  <a:schemeClr val="bg1"/>
+                </a:solidFill>
+              </a:rPr>
+              <a:t>1</a:t>
+            </a:r>
+            <a:endParaRPr lang="en-US" sz="1400" dirty="0"/>
+          </a:p>
+        </p:txBody>
+      </p:sp>
+      <p:sp>
+        <p:nvSpPr>
+          <p:cNvPr id="5" name="Text 3"/>
+          <p:cNvSpPr txBox="1"/>
+          <p:nvPr/>
+        </p:nvSpPr>
+        <p:spPr>
+          <a:xfrm>
+            <a:off x="1005840" y="1115568"/>
+            <a:ext cx="3566160" cy="457200"/>
+          </a:xfrm>
+          <a:prstGeom prst="rect">
+            <a:avLst/>
+          </a:prstGeom>
+          <a:noFill/>
+          <a:ln/>
+        </p:spPr>
+        <p:txBody>
+          <a:bodyPr wrap="square" lIns="0" tIns="0" rIns="0" bIns="0" rtlCol="0" anchor="ctr"/>
+          <a:lstStyle/>
+          <a:p>
+            <a:pPr indent="0" marL="0">
+              <a:buNone/>
+            </a:pPr>
+            <a:r>
+              <a:rPr lang="en-US" sz="1350" dirty="0">
+                <a:solidFill>
+                  <a:schemeClr val="tx1"/>
+                </a:solidFill>
+              </a:rPr>
+              <a:t>Всеки автор: фамилия, запетая, инициали с точка.</a:t>
+            </a:r>
+            <a:endParaRPr lang="en-US" sz="1350" dirty="0"/>
+          </a:p>
+        </p:txBody>
+      </p:sp>
+      <p:sp>
+        <p:nvSpPr>
+          <p:cNvPr id="6" name="badge 2"/>
           <p:cNvSpPr/>
           <p:nvPr/>
         </p:nvSpPr>
         <p:spPr>
           <a:xfrm>
-            <a:off x="4831080" y="1051560"/>
-            <a:ext cx="3688080" cy="3017520"/>
-          </a:xfrm>
-          <a:prstGeom prst="rect">
+            <a:off x="457200" y="1783080"/>
+            <a:ext cx="384048" cy="384048"/>
+          </a:xfrm>
+          <a:prstGeom prst="ellipse">
             <a:avLst/>
           </a:prstGeom>
           <a:solidFill>
-            <a:schemeClr val="bg2"/>
+            <a:schemeClr val="accent1"/>
           </a:solidFill>
-          <a:ln w="9525">
+          <a:ln w="12700">
             <a:solidFill>
-              <a:srgbClr val="DDE2E6"/>
+              <a:schemeClr val="accent1"/>
             </a:solidFill>
             <a:prstDash val="solid"/>
           </a:ln>
-          <a:effectLst>
-            <a:outerShdw sx="100000" sy="100000" kx="0" ky="0" algn="bl" rotWithShape="0" blurRad="76200" dist="25400" dir="5400000">
-              <a:srgbClr val="0B1622">
-                <a:alpha val="18000"/>
-              </a:srgbClr>
-            </a:outerShdw>
-          </a:effectLst>
-        </p:spPr>
-      </p:sp>
-      <p:pic>
-        <p:nvPicPr>
-          <p:cNvPr id="6" name="Успех" descr="Успех">    </p:cNvPr>
-          <p:cNvPicPr>
-            <a:picLocks noChangeAspect="1"/>
-          </p:cNvPicPr>
-          <p:nvPr/>
-        </p:nvPicPr>
-        <p:blipFill>
-          <a:blip r:embed="rId2"/>
-          <a:stretch>
-            <a:fillRect/>
-          </a:stretch>
-        </p:blipFill>
-        <p:spPr>
-          <a:xfrm>
-            <a:off x="4831080" y="1051560"/>
-            <a:ext cx="3688080" cy="3017520"/>
-          </a:xfrm>
-          <a:prstGeom prst="rect">
-            <a:avLst/>
-          </a:prstGeom>
-        </p:spPr>
-      </p:pic>
-      <p:pic>
-        <p:nvPicPr>
-          <p:cNvPr id="7" name="Image 2" descr="preencoded.png">    </p:cNvPr>
-          <p:cNvPicPr>
-            <a:picLocks noChangeAspect="1"/>
-          </p:cNvPicPr>
-          <p:nvPr/>
-        </p:nvPicPr>
-        <p:blipFill>
-          <a:blip r:embed="rId3"/>
-          <a:stretch>
-            <a:fillRect/>
-          </a:stretch>
-        </p:blipFill>
-        <p:spPr>
-          <a:xfrm>
-            <a:off x="457200" y="4224528"/>
-            <a:ext cx="292608" cy="292608"/>
-          </a:xfrm>
-          <a:prstGeom prst="rect">
-            <a:avLst/>
-          </a:prstGeom>
-        </p:spPr>
-      </p:pic>
-      <p:sp>
-        <p:nvSpPr>
-          <p:cNvPr id="8" name="Text 3"/>
+        </p:spPr>
+      </p:sp>
+      <p:sp>
+        <p:nvSpPr>
+          <p:cNvPr id="7" name="Text 5"/>
           <p:cNvSpPr txBox="1"/>
           <p:nvPr/>
         </p:nvSpPr>
         <p:spPr>
           <a:xfrm>
-            <a:off x="841248" y="4160520"/>
-            <a:ext cx="3657600" cy="457200"/>
+            <a:off x="457200" y="1783080"/>
+            <a:ext cx="384048" cy="384048"/>
           </a:xfrm>
           <a:prstGeom prst="rect">
             <a:avLst/>
@@ -9333,55 +9061,31 @@
           <a:bodyPr wrap="square" lIns="0" tIns="0" rIns="0" bIns="0" rtlCol="0" anchor="ctr"/>
           <a:lstStyle/>
           <a:p>
-            <a:pPr indent="0" marL="0">
-              <a:buNone/>
-            </a:pPr>
-            <a:r>
-              <a:rPr lang="en-US" sz="1100" dirty="0">
-                <a:solidFill>
-                  <a:schemeClr val="tx1"/>
-                </a:solidFill>
-              </a:rPr>
-              <a:t>Грешните полета се оцветяват в червено с обяснение. Поправете и натиснете „Запиши“ отново.</a:t>
-            </a:r>
-            <a:endParaRPr lang="en-US" sz="1100" dirty="0"/>
-          </a:p>
-        </p:txBody>
-      </p:sp>
-      <p:pic>
-        <p:nvPicPr>
-          <p:cNvPr id="9" name="Image 3" descr="preencoded.png">    </p:cNvPr>
-          <p:cNvPicPr>
-            <a:picLocks noChangeAspect="1"/>
-          </p:cNvPicPr>
-          <p:nvPr/>
-        </p:nvPicPr>
-        <p:blipFill>
-          <a:blip r:embed="rId4"/>
-          <a:stretch>
-            <a:fillRect/>
-          </a:stretch>
-        </p:blipFill>
-        <p:spPr>
-          <a:xfrm>
-            <a:off x="4663440" y="4224528"/>
-            <a:ext cx="292608" cy="292608"/>
-          </a:xfrm>
-          <a:prstGeom prst="rect">
-            <a:avLst/>
-          </a:prstGeom>
-        </p:spPr>
-      </p:pic>
-      <p:sp>
-        <p:nvSpPr>
-          <p:cNvPr id="10" name="Text 4"/>
+            <a:pPr algn="ctr" indent="0" marL="0">
+              <a:buNone/>
+            </a:pPr>
+            <a:r>
+              <a:rPr lang="en-US" sz="1400" b="1" dirty="0">
+                <a:solidFill>
+                  <a:schemeClr val="bg1"/>
+                </a:solidFill>
+              </a:rPr>
+              <a:t>2</a:t>
+            </a:r>
+            <a:endParaRPr lang="en-US" sz="1400" dirty="0"/>
+          </a:p>
+        </p:txBody>
+      </p:sp>
+      <p:sp>
+        <p:nvSpPr>
+          <p:cNvPr id="8" name="Text 6"/>
           <p:cNvSpPr txBox="1"/>
           <p:nvPr/>
         </p:nvSpPr>
         <p:spPr>
           <a:xfrm>
-            <a:off x="5047488" y="4160520"/>
-            <a:ext cx="3657600" cy="457200"/>
+            <a:off x="1005840" y="1755648"/>
+            <a:ext cx="3566160" cy="457200"/>
           </a:xfrm>
           <a:prstGeom prst="rect">
             <a:avLst/>
@@ -9397,14 +9101,612 @@
               <a:buNone/>
             </a:pPr>
             <a:r>
-              <a:rPr lang="en-US" sz="1100" dirty="0">
+              <a:rPr lang="en-US" sz="1350" dirty="0">
                 <a:solidFill>
                   <a:schemeClr val="tx1"/>
                 </a:solidFill>
               </a:rPr>
-              <a:t>Прегледът в APA стил е готов; GitHub се отваря в нов прозорец с готова заявка.</a:t>
-            </a:r>
-            <a:endParaRPr lang="en-US" sz="1100" dirty="0"/>
+              <a:t>Авторите се разделят със запетая.</a:t>
+            </a:r>
+            <a:endParaRPr lang="en-US" sz="1350" dirty="0"/>
+          </a:p>
+        </p:txBody>
+      </p:sp>
+      <p:sp>
+        <p:nvSpPr>
+          <p:cNvPr id="9" name="badge 3"/>
+          <p:cNvSpPr/>
+          <p:nvPr/>
+        </p:nvSpPr>
+        <p:spPr>
+          <a:xfrm>
+            <a:off x="457200" y="2423160"/>
+            <a:ext cx="384048" cy="384048"/>
+          </a:xfrm>
+          <a:prstGeom prst="ellipse">
+            <a:avLst/>
+          </a:prstGeom>
+          <a:solidFill>
+            <a:schemeClr val="accent1"/>
+          </a:solidFill>
+          <a:ln w="12700">
+            <a:solidFill>
+              <a:schemeClr val="accent1"/>
+            </a:solidFill>
+            <a:prstDash val="solid"/>
+          </a:ln>
+        </p:spPr>
+      </p:sp>
+      <p:sp>
+        <p:nvSpPr>
+          <p:cNvPr id="10" name="Text 8"/>
+          <p:cNvSpPr txBox="1"/>
+          <p:nvPr/>
+        </p:nvSpPr>
+        <p:spPr>
+          <a:xfrm>
+            <a:off x="457200" y="2423160"/>
+            <a:ext cx="384048" cy="384048"/>
+          </a:xfrm>
+          <a:prstGeom prst="rect">
+            <a:avLst/>
+          </a:prstGeom>
+          <a:noFill/>
+          <a:ln/>
+        </p:spPr>
+        <p:txBody>
+          <a:bodyPr wrap="square" lIns="0" tIns="0" rIns="0" bIns="0" rtlCol="0" anchor="ctr"/>
+          <a:lstStyle/>
+          <a:p>
+            <a:pPr algn="ctr" indent="0" marL="0">
+              <a:buNone/>
+            </a:pPr>
+            <a:r>
+              <a:rPr lang="en-US" sz="1400" b="1" dirty="0">
+                <a:solidFill>
+                  <a:schemeClr val="bg1"/>
+                </a:solidFill>
+              </a:rPr>
+              <a:t>3</a:t>
+            </a:r>
+            <a:endParaRPr lang="en-US" sz="1400" dirty="0"/>
+          </a:p>
+        </p:txBody>
+      </p:sp>
+      <p:sp>
+        <p:nvSpPr>
+          <p:cNvPr id="11" name="Text 9"/>
+          <p:cNvSpPr txBox="1"/>
+          <p:nvPr/>
+        </p:nvSpPr>
+        <p:spPr>
+          <a:xfrm>
+            <a:off x="1005840" y="2395728"/>
+            <a:ext cx="3566160" cy="457200"/>
+          </a:xfrm>
+          <a:prstGeom prst="rect">
+            <a:avLst/>
+          </a:prstGeom>
+          <a:noFill/>
+          <a:ln/>
+        </p:spPr>
+        <p:txBody>
+          <a:bodyPr wrap="square" lIns="0" tIns="0" rIns="0" bIns="0" rtlCol="0" anchor="ctr"/>
+          <a:lstStyle/>
+          <a:p>
+            <a:pPr indent="0" marL="0">
+              <a:buNone/>
+            </a:pPr>
+            <a:r>
+              <a:rPr lang="en-US" sz="1350" dirty="0">
+                <a:solidFill>
+                  <a:schemeClr val="tx1"/>
+                </a:solidFill>
+              </a:rPr>
+              <a:t>Преди последния автор: „&amp;“ (запетая пред него при 3+ автори).</a:t>
+            </a:r>
+            <a:endParaRPr lang="en-US" sz="1350" dirty="0"/>
+          </a:p>
+        </p:txBody>
+      </p:sp>
+      <p:sp>
+        <p:nvSpPr>
+          <p:cNvPr id="12" name="badge 4"/>
+          <p:cNvSpPr/>
+          <p:nvPr/>
+        </p:nvSpPr>
+        <p:spPr>
+          <a:xfrm>
+            <a:off x="457200" y="3063240"/>
+            <a:ext cx="384048" cy="384048"/>
+          </a:xfrm>
+          <a:prstGeom prst="ellipse">
+            <a:avLst/>
+          </a:prstGeom>
+          <a:solidFill>
+            <a:schemeClr val="accent1"/>
+          </a:solidFill>
+          <a:ln w="12700">
+            <a:solidFill>
+              <a:schemeClr val="accent1"/>
+            </a:solidFill>
+            <a:prstDash val="solid"/>
+          </a:ln>
+        </p:spPr>
+      </p:sp>
+      <p:sp>
+        <p:nvSpPr>
+          <p:cNvPr id="13" name="Text 11"/>
+          <p:cNvSpPr txBox="1"/>
+          <p:nvPr/>
+        </p:nvSpPr>
+        <p:spPr>
+          <a:xfrm>
+            <a:off x="457200" y="3063240"/>
+            <a:ext cx="384048" cy="384048"/>
+          </a:xfrm>
+          <a:prstGeom prst="rect">
+            <a:avLst/>
+          </a:prstGeom>
+          <a:noFill/>
+          <a:ln/>
+        </p:spPr>
+        <p:txBody>
+          <a:bodyPr wrap="square" lIns="0" tIns="0" rIns="0" bIns="0" rtlCol="0" anchor="ctr"/>
+          <a:lstStyle/>
+          <a:p>
+            <a:pPr algn="ctr" indent="0" marL="0">
+              <a:buNone/>
+            </a:pPr>
+            <a:r>
+              <a:rPr lang="en-US" sz="1400" b="1" dirty="0">
+                <a:solidFill>
+                  <a:schemeClr val="bg1"/>
+                </a:solidFill>
+              </a:rPr>
+              <a:t>4</a:t>
+            </a:r>
+            <a:endParaRPr lang="en-US" sz="1400" dirty="0"/>
+          </a:p>
+        </p:txBody>
+      </p:sp>
+      <p:sp>
+        <p:nvSpPr>
+          <p:cNvPr id="14" name="Text 12"/>
+          <p:cNvSpPr txBox="1"/>
+          <p:nvPr/>
+        </p:nvSpPr>
+        <p:spPr>
+          <a:xfrm>
+            <a:off x="1005840" y="3035808"/>
+            <a:ext cx="3566160" cy="457200"/>
+          </a:xfrm>
+          <a:prstGeom prst="rect">
+            <a:avLst/>
+          </a:prstGeom>
+          <a:noFill/>
+          <a:ln/>
+        </p:spPr>
+        <p:txBody>
+          <a:bodyPr wrap="square" lIns="0" tIns="0" rIns="0" bIns="0" rtlCol="0" anchor="ctr"/>
+          <a:lstStyle/>
+          <a:p>
+            <a:pPr indent="0" marL="0">
+              <a:buNone/>
+            </a:pPr>
+            <a:r>
+              <a:rPr lang="en-US" sz="1350" dirty="0">
+                <a:solidFill>
+                  <a:schemeClr val="tx1"/>
+                </a:solidFill>
+              </a:rPr>
+              <a:t>Редът е като в статията; без „et al.“</a:t>
+            </a:r>
+            <a:endParaRPr lang="en-US" sz="1350" dirty="0"/>
+          </a:p>
+        </p:txBody>
+      </p:sp>
+      <p:sp>
+        <p:nvSpPr>
+          <p:cNvPr id="15" name="badge 5"/>
+          <p:cNvSpPr/>
+          <p:nvPr/>
+        </p:nvSpPr>
+        <p:spPr>
+          <a:xfrm>
+            <a:off x="457200" y="3703320"/>
+            <a:ext cx="384048" cy="384048"/>
+          </a:xfrm>
+          <a:prstGeom prst="ellipse">
+            <a:avLst/>
+          </a:prstGeom>
+          <a:solidFill>
+            <a:schemeClr val="accent1"/>
+          </a:solidFill>
+          <a:ln w="12700">
+            <a:solidFill>
+              <a:schemeClr val="accent1"/>
+            </a:solidFill>
+            <a:prstDash val="solid"/>
+          </a:ln>
+        </p:spPr>
+      </p:sp>
+      <p:sp>
+        <p:nvSpPr>
+          <p:cNvPr id="16" name="Text 14"/>
+          <p:cNvSpPr txBox="1"/>
+          <p:nvPr/>
+        </p:nvSpPr>
+        <p:spPr>
+          <a:xfrm>
+            <a:off x="457200" y="3703320"/>
+            <a:ext cx="384048" cy="384048"/>
+          </a:xfrm>
+          <a:prstGeom prst="rect">
+            <a:avLst/>
+          </a:prstGeom>
+          <a:noFill/>
+          <a:ln/>
+        </p:spPr>
+        <p:txBody>
+          <a:bodyPr wrap="square" lIns="0" tIns="0" rIns="0" bIns="0" rtlCol="0" anchor="ctr"/>
+          <a:lstStyle/>
+          <a:p>
+            <a:pPr algn="ctr" indent="0" marL="0">
+              <a:buNone/>
+            </a:pPr>
+            <a:r>
+              <a:rPr lang="en-US" sz="1400" b="1" dirty="0">
+                <a:solidFill>
+                  <a:schemeClr val="bg1"/>
+                </a:solidFill>
+              </a:rPr>
+              <a:t>5</a:t>
+            </a:r>
+            <a:endParaRPr lang="en-US" sz="1400" dirty="0"/>
+          </a:p>
+        </p:txBody>
+      </p:sp>
+      <p:sp>
+        <p:nvSpPr>
+          <p:cNvPr id="17" name="Text 15"/>
+          <p:cNvSpPr txBox="1"/>
+          <p:nvPr/>
+        </p:nvSpPr>
+        <p:spPr>
+          <a:xfrm>
+            <a:off x="1005840" y="3675888"/>
+            <a:ext cx="3566160" cy="457200"/>
+          </a:xfrm>
+          <a:prstGeom prst="rect">
+            <a:avLst/>
+          </a:prstGeom>
+          <a:noFill/>
+          <a:ln/>
+        </p:spPr>
+        <p:txBody>
+          <a:bodyPr wrap="square" lIns="0" tIns="0" rIns="0" bIns="0" rtlCol="0" anchor="ctr"/>
+          <a:lstStyle/>
+          <a:p>
+            <a:pPr indent="0" marL="0">
+              <a:buNone/>
+            </a:pPr>
+            <a:r>
+              <a:rPr lang="en-US" sz="1350" dirty="0">
+                <a:solidFill>
+                  <a:schemeClr val="tx1"/>
+                </a:solidFill>
+              </a:rPr>
+              <a:t>Частиците остават малки: „del Estad Herrero, A.“</a:t>
+            </a:r>
+            <a:endParaRPr lang="en-US" sz="1350" dirty="0"/>
+          </a:p>
+        </p:txBody>
+      </p:sp>
+      <p:sp>
+        <p:nvSpPr>
+          <p:cNvPr id="18" name="Shape 16"/>
+          <p:cNvSpPr/>
+          <p:nvPr/>
+        </p:nvSpPr>
+        <p:spPr>
+          <a:xfrm>
+            <a:off x="4846320" y="1051560"/>
+            <a:ext cx="3840480" cy="3520440"/>
+          </a:xfrm>
+          <a:prstGeom prst="roundRect">
+            <a:avLst>
+              <a:gd name="adj" fmla="val 2078"/>
+            </a:avLst>
+          </a:prstGeom>
+          <a:solidFill>
+            <a:schemeClr val="tx1"/>
+          </a:solidFill>
+          <a:ln w="12700">
+            <a:solidFill>
+              <a:schemeClr val="tx1"/>
+            </a:solidFill>
+            <a:prstDash val="solid"/>
+          </a:ln>
+        </p:spPr>
+      </p:sp>
+      <p:sp>
+        <p:nvSpPr>
+          <p:cNvPr id="19" name="Text 17"/>
+          <p:cNvSpPr txBox="1"/>
+          <p:nvPr/>
+        </p:nvSpPr>
+        <p:spPr>
+          <a:xfrm>
+            <a:off x="5074920" y="1188720"/>
+            <a:ext cx="3383280" cy="320040"/>
+          </a:xfrm>
+          <a:prstGeom prst="rect">
+            <a:avLst/>
+          </a:prstGeom>
+          <a:noFill/>
+          <a:ln/>
+        </p:spPr>
+        <p:txBody>
+          <a:bodyPr wrap="square" lIns="0" tIns="0" rIns="0" bIns="0" rtlCol="0" anchor="ctr"/>
+          <a:lstStyle/>
+          <a:p>
+            <a:pPr indent="0" marL="0">
+              <a:buNone/>
+            </a:pPr>
+            <a:r>
+              <a:rPr lang="en-US" sz="1300" b="1" dirty="0">
+                <a:solidFill>
+                  <a:schemeClr val="accent1"/>
+                </a:solidFill>
+              </a:rPr>
+              <a:t>Примери</a:t>
+            </a:r>
+            <a:endParaRPr lang="en-US" sz="1300" dirty="0"/>
+          </a:p>
+        </p:txBody>
+      </p:sp>
+      <p:sp>
+        <p:nvSpPr>
+          <p:cNvPr id="20" name="Text 18"/>
+          <p:cNvSpPr txBox="1"/>
+          <p:nvPr/>
+        </p:nvSpPr>
+        <p:spPr>
+          <a:xfrm>
+            <a:off x="5074920" y="1600200"/>
+            <a:ext cx="3474720" cy="2834640"/>
+          </a:xfrm>
+          <a:prstGeom prst="rect">
+            <a:avLst/>
+          </a:prstGeom>
+          <a:noFill/>
+          <a:ln/>
+        </p:spPr>
+        <p:txBody>
+          <a:bodyPr wrap="square" lIns="0" tIns="0" rIns="0" bIns="0" rtlCol="0" anchor="t"/>
+          <a:lstStyle/>
+          <a:p>
+            <a:pPr indent="0" marL="0">
+              <a:spcAft>
+                <a:spcPts val="800"/>
+              </a:spcAft>
+              <a:buNone/>
+            </a:pPr>
+            <a:r>
+              <a:rPr lang="en-US" sz="1250" b="1" dirty="0">
+                <a:solidFill>
+                  <a:srgbClr val="6FCF97"/>
+                </a:solidFill>
+                <a:latin typeface="Courier New" pitchFamily="34" charset="0"/>
+                <a:ea typeface="Courier New" pitchFamily="34" charset="-122"/>
+                <a:cs typeface="Courier New" pitchFamily="34" charset="-120"/>
+              </a:rPr>
+              <a:t>✓  </a:t>
+            </a:r>
+            <a:pPr indent="0" marL="0">
+              <a:spcAft>
+                <a:spcPts val="800"/>
+              </a:spcAft>
+              <a:buNone/>
+            </a:pPr>
+            <a:r>
+              <a:rPr lang="en-US" sz="1250" dirty="0">
+                <a:solidFill>
+                  <a:srgbClr val="E9EEF2"/>
+                </a:solidFill>
+                <a:latin typeface="Courier New" pitchFamily="34" charset="0"/>
+                <a:ea typeface="Courier New" pitchFamily="34" charset="-122"/>
+                <a:cs typeface="Courier New" pitchFamily="34" charset="-120"/>
+              </a:rPr>
+              <a:t>Madzharov, A.</a:t>
+            </a:r>
+            <a:endParaRPr lang="en-US" sz="1250" dirty="0"/>
+          </a:p>
+          <a:p>
+            <a:pPr indent="0" marL="0">
+              <a:spcAft>
+                <a:spcPts val="800"/>
+              </a:spcAft>
+              <a:buNone/>
+            </a:pPr>
+            <a:r>
+              <a:rPr lang="en-US" sz="1250" b="1" dirty="0">
+                <a:solidFill>
+                  <a:srgbClr val="6FCF97"/>
+                </a:solidFill>
+                <a:latin typeface="Courier New" pitchFamily="34" charset="0"/>
+                <a:ea typeface="Courier New" pitchFamily="34" charset="-122"/>
+                <a:cs typeface="Courier New" pitchFamily="34" charset="-120"/>
+              </a:rPr>
+              <a:t>✓  </a:t>
+            </a:r>
+            <a:pPr indent="0" marL="0">
+              <a:spcAft>
+                <a:spcPts val="800"/>
+              </a:spcAft>
+              <a:buNone/>
+            </a:pPr>
+            <a:r>
+              <a:rPr lang="en-US" sz="1250" dirty="0">
+                <a:solidFill>
+                  <a:srgbClr val="E9EEF2"/>
+                </a:solidFill>
+                <a:latin typeface="Courier New" pitchFamily="34" charset="0"/>
+                <a:ea typeface="Courier New" pitchFamily="34" charset="-122"/>
+                <a:cs typeface="Courier New" pitchFamily="34" charset="-120"/>
+              </a:rPr>
+              <a:t>Gaidarski, I., &amp; Madzharov, A.</a:t>
+            </a:r>
+            <a:endParaRPr lang="en-US" sz="1250" dirty="0"/>
+          </a:p>
+          <a:p>
+            <a:pPr indent="0" marL="0">
+              <a:spcAft>
+                <a:spcPts val="800"/>
+              </a:spcAft>
+              <a:buNone/>
+            </a:pPr>
+            <a:r>
+              <a:rPr lang="en-US" sz="1250" b="1" dirty="0">
+                <a:solidFill>
+                  <a:srgbClr val="6FCF97"/>
+                </a:solidFill>
+                <a:latin typeface="Courier New" pitchFamily="34" charset="0"/>
+                <a:ea typeface="Courier New" pitchFamily="34" charset="-122"/>
+                <a:cs typeface="Courier New" pitchFamily="34" charset="-120"/>
+              </a:rPr>
+              <a:t>✓  </a:t>
+            </a:r>
+            <a:pPr indent="0" marL="0">
+              <a:spcAft>
+                <a:spcPts val="800"/>
+              </a:spcAft>
+              <a:buNone/>
+            </a:pPr>
+            <a:r>
+              <a:rPr lang="en-US" sz="1250" dirty="0">
+                <a:solidFill>
+                  <a:srgbClr val="E9EEF2"/>
+                </a:solidFill>
+                <a:latin typeface="Courier New" pitchFamily="34" charset="0"/>
+                <a:ea typeface="Courier New" pitchFamily="34" charset="-122"/>
+                <a:cs typeface="Courier New" pitchFamily="34" charset="-120"/>
+              </a:rPr>
+              <a:t>Madzharov, A., Hristozov, S., &amp; Gaidarski, I.</a:t>
+            </a:r>
+            <a:endParaRPr lang="en-US" sz="1250" dirty="0"/>
+          </a:p>
+          <a:p>
+            <a:pPr indent="0" marL="0">
+              <a:spcAft>
+                <a:spcPts val="800"/>
+              </a:spcAft>
+              <a:buNone/>
+            </a:pPr>
+            <a:r>
+              <a:rPr lang="en-US" sz="1250" b="1" dirty="0">
+                <a:solidFill>
+                  <a:srgbClr val="6FCF97"/>
+                </a:solidFill>
+                <a:latin typeface="Courier New" pitchFamily="34" charset="0"/>
+                <a:ea typeface="Courier New" pitchFamily="34" charset="-122"/>
+                <a:cs typeface="Courier New" pitchFamily="34" charset="-120"/>
+              </a:rPr>
+              <a:t>✓  </a:t>
+            </a:r>
+            <a:pPr indent="0" marL="0">
+              <a:spcAft>
+                <a:spcPts val="800"/>
+              </a:spcAft>
+              <a:buNone/>
+            </a:pPr>
+            <a:r>
+              <a:rPr lang="en-US" sz="1250" dirty="0">
+                <a:solidFill>
+                  <a:srgbClr val="E9EEF2"/>
+                </a:solidFill>
+                <a:latin typeface="Courier New" pitchFamily="34" charset="0"/>
+                <a:ea typeface="Courier New" pitchFamily="34" charset="-122"/>
+                <a:cs typeface="Courier New" pitchFamily="34" charset="-120"/>
+              </a:rPr>
+              <a:t>Чехларова, Н., &amp; Чехларова, К.</a:t>
+            </a:r>
+            <a:endParaRPr lang="en-US" sz="1250" dirty="0"/>
+          </a:p>
+          <a:p>
+            <a:pPr indent="0" marL="0">
+              <a:spcAft>
+                <a:spcPts val="800"/>
+              </a:spcAft>
+              <a:buNone/>
+            </a:pPr>
+            <a:r>
+              <a:rPr lang="en-US" sz="1250" b="1" dirty="0">
+                <a:solidFill>
+                  <a:srgbClr val="FF8A80"/>
+                </a:solidFill>
+                <a:latin typeface="Courier New" pitchFamily="34" charset="0"/>
+                <a:ea typeface="Courier New" pitchFamily="34" charset="-122"/>
+                <a:cs typeface="Courier New" pitchFamily="34" charset="-120"/>
+              </a:rPr>
+              <a:t>✗  </a:t>
+            </a:r>
+            <a:pPr indent="0" marL="0">
+              <a:spcAft>
+                <a:spcPts val="800"/>
+              </a:spcAft>
+              <a:buNone/>
+            </a:pPr>
+            <a:r>
+              <a:rPr lang="en-US" sz="1250" dirty="0">
+                <a:solidFill>
+                  <a:srgbClr val="E9EEF2"/>
+                </a:solidFill>
+                <a:latin typeface="Courier New" pitchFamily="34" charset="0"/>
+                <a:ea typeface="Courier New" pitchFamily="34" charset="-122"/>
+                <a:cs typeface="Courier New" pitchFamily="34" charset="-120"/>
+              </a:rPr>
+              <a:t>Madzharov A., Hristozov S.</a:t>
+            </a:r>
+            <a:endParaRPr lang="en-US" sz="1250" dirty="0"/>
+          </a:p>
+          <a:p>
+            <a:pPr indent="0" marL="0">
+              <a:spcAft>
+                <a:spcPts val="800"/>
+              </a:spcAft>
+              <a:buNone/>
+            </a:pPr>
+            <a:r>
+              <a:rPr lang="en-US" sz="1250" b="1" dirty="0">
+                <a:solidFill>
+                  <a:srgbClr val="FF8A80"/>
+                </a:solidFill>
+                <a:latin typeface="Courier New" pitchFamily="34" charset="0"/>
+                <a:ea typeface="Courier New" pitchFamily="34" charset="-122"/>
+                <a:cs typeface="Courier New" pitchFamily="34" charset="-120"/>
+              </a:rPr>
+              <a:t>✗  </a:t>
+            </a:r>
+            <a:pPr indent="0" marL="0">
+              <a:spcAft>
+                <a:spcPts val="800"/>
+              </a:spcAft>
+              <a:buNone/>
+            </a:pPr>
+            <a:r>
+              <a:rPr lang="en-US" sz="1250" dirty="0">
+                <a:solidFill>
+                  <a:srgbClr val="E9EEF2"/>
+                </a:solidFill>
+                <a:latin typeface="Courier New" pitchFamily="34" charset="0"/>
+                <a:ea typeface="Courier New" pitchFamily="34" charset="-122"/>
+                <a:cs typeface="Courier New" pitchFamily="34" charset="-120"/>
+              </a:rPr>
+              <a:t>A. Madzharov, S. Hristozov</a:t>
+            </a:r>
+            <a:endParaRPr lang="en-US" sz="1250" dirty="0"/>
           </a:p>
         </p:txBody>
       </p:sp>
@@ -9510,7 +9812,7 @@
                   <a:schemeClr val="tx1"/>
                 </a:solidFill>
               </a:rPr>
-              <a:t>В GitHub: заявка, проверка, публикуване</a:t>
+              <a:t>Проверка във формата: грешка и успех</a:t>
             </a:r>
             <a:endParaRPr lang="en-US" sz="2600" dirty="0"/>
           </a:p>
@@ -9518,59 +9820,39 @@
       </p:sp>
       <p:sp>
         <p:nvSpPr>
-          <p:cNvPr id="3" name="Shape 1"/>
+          <p:cNvPr id="3" name="Грешки frame"/>
           <p:cNvSpPr/>
           <p:nvPr/>
         </p:nvSpPr>
         <p:spPr>
           <a:xfrm>
-            <a:off x="457200" y="1097280"/>
-            <a:ext cx="8229600" cy="749808"/>
-          </a:xfrm>
-          <a:prstGeom prst="roundRect">
-            <a:avLst>
-              <a:gd name="adj" fmla="val 9756"/>
-            </a:avLst>
+            <a:off x="624840" y="1051560"/>
+            <a:ext cx="3688080" cy="3017520"/>
+          </a:xfrm>
+          <a:prstGeom prst="rect">
+            <a:avLst/>
           </a:prstGeom>
           <a:solidFill>
             <a:schemeClr val="bg2"/>
           </a:solidFill>
-          <a:ln w="12700">
+          <a:ln w="9525">
             <a:solidFill>
-              <a:schemeClr val="bg2"/>
+              <a:srgbClr val="DDE2E6"/>
             </a:solidFill>
             <a:prstDash val="solid"/>
           </a:ln>
-        </p:spPr>
-      </p:sp>
-      <p:sp>
-        <p:nvSpPr>
-          <p:cNvPr id="4" name="Shape 2"/>
-          <p:cNvSpPr/>
-          <p:nvPr/>
-        </p:nvSpPr>
-        <p:spPr>
-          <a:xfrm>
-            <a:off x="621792" y="1216152"/>
-            <a:ext cx="512064" cy="512064"/>
-          </a:xfrm>
-          <a:prstGeom prst="ellipse">
-            <a:avLst/>
-          </a:prstGeom>
-          <a:solidFill>
-            <a:schemeClr val="tx1"/>
-          </a:solidFill>
-          <a:ln w="19050">
-            <a:solidFill>
-              <a:schemeClr val="tx1"/>
-            </a:solidFill>
-            <a:prstDash val="solid"/>
-          </a:ln>
+          <a:effectLst>
+            <a:outerShdw sx="100000" sy="100000" kx="0" ky="0" algn="bl" rotWithShape="0" blurRad="76200" dist="25400" dir="5400000">
+              <a:srgbClr val="0B1622">
+                <a:alpha val="18000"/>
+              </a:srgbClr>
+            </a:outerShdw>
+          </a:effectLst>
         </p:spPr>
       </p:sp>
       <p:pic>
         <p:nvPicPr>
-          <p:cNvPr id="5" name="Image 0" descr="preencoded.png">    </p:cNvPr>
+          <p:cNvPr id="4" name="Грешки" descr="Грешки">    </p:cNvPr>
           <p:cNvPicPr>
             <a:picLocks noChangeAspect="1"/>
           </p:cNvPicPr>
@@ -9584,8 +9866,8 @@
         </p:blipFill>
         <p:spPr>
           <a:xfrm>
-            <a:off x="731520" y="1325880"/>
-            <a:ext cx="292608" cy="292608"/>
+            <a:off x="624840" y="1051560"/>
+            <a:ext cx="3688080" cy="3017520"/>
           </a:xfrm>
           <a:prstGeom prst="rect">
             <a:avLst/>
@@ -9594,131 +9876,39 @@
       </p:pic>
       <p:sp>
         <p:nvSpPr>
-          <p:cNvPr id="6" name="Text 3"/>
-          <p:cNvSpPr txBox="1"/>
-          <p:nvPr/>
-        </p:nvSpPr>
-        <p:spPr>
-          <a:xfrm>
-            <a:off x="1325880" y="1097280"/>
-            <a:ext cx="1325880" cy="749808"/>
-          </a:xfrm>
-          <a:prstGeom prst="rect">
-            <a:avLst/>
-          </a:prstGeom>
-          <a:noFill/>
-          <a:ln/>
-        </p:spPr>
-        <p:txBody>
-          <a:bodyPr wrap="square" lIns="0" tIns="0" rIns="0" bIns="0" rtlCol="0" anchor="ctr"/>
-          <a:lstStyle/>
-          <a:p>
-            <a:pPr indent="0" marL="0">
-              <a:buNone/>
-            </a:pPr>
-            <a:r>
-              <a:rPr lang="en-US" sz="1500" b="1" dirty="0">
-                <a:solidFill>
-                  <a:schemeClr val="tx1"/>
-                </a:solidFill>
-              </a:rPr>
-              <a:t>Create</a:t>
-            </a:r>
-            <a:endParaRPr lang="en-US" sz="1500" dirty="0"/>
-          </a:p>
-        </p:txBody>
-      </p:sp>
-      <p:sp>
-        <p:nvSpPr>
-          <p:cNvPr id="7" name="Text 4"/>
-          <p:cNvSpPr txBox="1"/>
-          <p:nvPr/>
-        </p:nvSpPr>
-        <p:spPr>
-          <a:xfrm>
-            <a:off x="2697480" y="1097280"/>
-            <a:ext cx="5852160" cy="749808"/>
-          </a:xfrm>
-          <a:prstGeom prst="rect">
-            <a:avLst/>
-          </a:prstGeom>
-          <a:noFill/>
-          <a:ln/>
-        </p:spPr>
-        <p:txBody>
-          <a:bodyPr wrap="square" lIns="0" tIns="0" rIns="0" bIns="0" rtlCol="0" anchor="ctr"/>
-          <a:lstStyle/>
-          <a:p>
-            <a:pPr indent="0" marL="0">
-              <a:buNone/>
-            </a:pPr>
-            <a:r>
-              <a:rPr lang="en-US" sz="1200" dirty="0">
-                <a:solidFill>
-                  <a:schemeClr val="tx1"/>
-                </a:solidFill>
-              </a:rPr>
-              <a:t>Влезте със своя акаунт и натиснете зеления бутон „Create“. Не променяйте текста на заявката.</a:t>
-            </a:r>
-            <a:endParaRPr lang="en-US" sz="1200" dirty="0"/>
-          </a:p>
-        </p:txBody>
-      </p:sp>
-      <p:sp>
-        <p:nvSpPr>
-          <p:cNvPr id="8" name="Shape 5"/>
+          <p:cNvPr id="5" name="Успех frame"/>
           <p:cNvSpPr/>
           <p:nvPr/>
         </p:nvSpPr>
         <p:spPr>
           <a:xfrm>
-            <a:off x="457200" y="1984248"/>
-            <a:ext cx="8229600" cy="749808"/>
-          </a:xfrm>
-          <a:prstGeom prst="roundRect">
-            <a:avLst>
-              <a:gd name="adj" fmla="val 9756"/>
-            </a:avLst>
+            <a:off x="4831080" y="1051560"/>
+            <a:ext cx="3688080" cy="3017520"/>
+          </a:xfrm>
+          <a:prstGeom prst="rect">
+            <a:avLst/>
           </a:prstGeom>
           <a:solidFill>
             <a:schemeClr val="bg2"/>
           </a:solidFill>
-          <a:ln w="12700">
+          <a:ln w="9525">
             <a:solidFill>
-              <a:schemeClr val="bg2"/>
+              <a:srgbClr val="DDE2E6"/>
             </a:solidFill>
             <a:prstDash val="solid"/>
           </a:ln>
-        </p:spPr>
-      </p:sp>
-      <p:sp>
-        <p:nvSpPr>
-          <p:cNvPr id="9" name="Shape 6"/>
-          <p:cNvSpPr/>
-          <p:nvPr/>
-        </p:nvSpPr>
-        <p:spPr>
-          <a:xfrm>
-            <a:off x="621792" y="2103120"/>
-            <a:ext cx="512064" cy="512064"/>
-          </a:xfrm>
-          <a:prstGeom prst="ellipse">
-            <a:avLst/>
-          </a:prstGeom>
-          <a:solidFill>
-            <a:schemeClr val="bg1"/>
-          </a:solidFill>
-          <a:ln w="19050">
-            <a:solidFill>
-              <a:schemeClr val="accent3"/>
-            </a:solidFill>
-            <a:prstDash val="solid"/>
-          </a:ln>
+          <a:effectLst>
+            <a:outerShdw sx="100000" sy="100000" kx="0" ky="0" algn="bl" rotWithShape="0" blurRad="76200" dist="25400" dir="5400000">
+              <a:srgbClr val="0B1622">
+                <a:alpha val="18000"/>
+              </a:srgbClr>
+            </a:outerShdw>
+          </a:effectLst>
         </p:spPr>
       </p:sp>
       <p:pic>
         <p:nvPicPr>
-          <p:cNvPr id="10" name="Image 1" descr="preencoded.png">    </p:cNvPr>
+          <p:cNvPr id="6" name="Успех" descr="Успех">    </p:cNvPr>
           <p:cNvPicPr>
             <a:picLocks noChangeAspect="1"/>
           </p:cNvPicPr>
@@ -9732,141 +9922,17 @@
         </p:blipFill>
         <p:spPr>
           <a:xfrm>
-            <a:off x="731520" y="2212848"/>
-            <a:ext cx="292608" cy="292608"/>
+            <a:off x="4831080" y="1051560"/>
+            <a:ext cx="3688080" cy="3017520"/>
           </a:xfrm>
           <a:prstGeom prst="rect">
             <a:avLst/>
           </a:prstGeom>
         </p:spPr>
       </p:pic>
-      <p:sp>
-        <p:nvSpPr>
-          <p:cNvPr id="11" name="Text 7"/>
-          <p:cNvSpPr txBox="1"/>
-          <p:nvPr/>
-        </p:nvSpPr>
-        <p:spPr>
-          <a:xfrm>
-            <a:off x="1325880" y="1984248"/>
-            <a:ext cx="1325880" cy="749808"/>
-          </a:xfrm>
-          <a:prstGeom prst="rect">
-            <a:avLst/>
-          </a:prstGeom>
-          <a:noFill/>
-          <a:ln/>
-        </p:spPr>
-        <p:txBody>
-          <a:bodyPr wrap="square" lIns="0" tIns="0" rIns="0" bIns="0" rtlCol="0" anchor="ctr"/>
-          <a:lstStyle/>
-          <a:p>
-            <a:pPr indent="0" marL="0">
-              <a:buNone/>
-            </a:pPr>
-            <a:r>
-              <a:rPr lang="en-US" sz="1500" b="1" dirty="0">
-                <a:solidFill>
-                  <a:schemeClr val="tx1"/>
-                </a:solidFill>
-              </a:rPr>
-              <a:t>Приета</a:t>
-            </a:r>
-            <a:endParaRPr lang="en-US" sz="1500" dirty="0"/>
-          </a:p>
-        </p:txBody>
-      </p:sp>
-      <p:sp>
-        <p:nvSpPr>
-          <p:cNvPr id="12" name="Text 8"/>
-          <p:cNvSpPr txBox="1"/>
-          <p:nvPr/>
-        </p:nvSpPr>
-        <p:spPr>
-          <a:xfrm>
-            <a:off x="2697480" y="1984248"/>
-            <a:ext cx="5852160" cy="749808"/>
-          </a:xfrm>
-          <a:prstGeom prst="rect">
-            <a:avLst/>
-          </a:prstGeom>
-          <a:noFill/>
-          <a:ln/>
-        </p:spPr>
-        <p:txBody>
-          <a:bodyPr wrap="square" lIns="0" tIns="0" rIns="0" bIns="0" rtlCol="0" anchor="ctr"/>
-          <a:lstStyle/>
-          <a:p>
-            <a:pPr indent="0" marL="0">
-              <a:buNone/>
-            </a:pPr>
-            <a:r>
-              <a:rPr lang="en-US" sz="1200" dirty="0">
-                <a:solidFill>
-                  <a:schemeClr val="tx1"/>
-                </a:solidFill>
-              </a:rPr>
-              <a:t>DOI, ISSN или ISBN е намерен в регистрите (doi.org, Crossref, НАЦИД НРС, ISSN Portal, Open Library) — публикацията излиза на сайта сама.</a:t>
-            </a:r>
-            <a:endParaRPr lang="en-US" sz="1200" dirty="0"/>
-          </a:p>
-        </p:txBody>
-      </p:sp>
-      <p:sp>
-        <p:nvSpPr>
-          <p:cNvPr id="13" name="Shape 9"/>
-          <p:cNvSpPr/>
-          <p:nvPr/>
-        </p:nvSpPr>
-        <p:spPr>
-          <a:xfrm>
-            <a:off x="457200" y="2871216"/>
-            <a:ext cx="8229600" cy="749808"/>
-          </a:xfrm>
-          <a:prstGeom prst="roundRect">
-            <a:avLst>
-              <a:gd name="adj" fmla="val 9756"/>
-            </a:avLst>
-          </a:prstGeom>
-          <a:solidFill>
-            <a:schemeClr val="bg2"/>
-          </a:solidFill>
-          <a:ln w="12700">
-            <a:solidFill>
-              <a:schemeClr val="bg2"/>
-            </a:solidFill>
-            <a:prstDash val="solid"/>
-          </a:ln>
-        </p:spPr>
-      </p:sp>
-      <p:sp>
-        <p:nvSpPr>
-          <p:cNvPr id="14" name="Shape 10"/>
-          <p:cNvSpPr/>
-          <p:nvPr/>
-        </p:nvSpPr>
-        <p:spPr>
-          <a:xfrm>
-            <a:off x="621792" y="2990088"/>
-            <a:ext cx="512064" cy="512064"/>
-          </a:xfrm>
-          <a:prstGeom prst="ellipse">
-            <a:avLst/>
-          </a:prstGeom>
-          <a:solidFill>
-            <a:schemeClr val="bg1"/>
-          </a:solidFill>
-          <a:ln w="19050">
-            <a:solidFill>
-              <a:schemeClr val="accent4"/>
-            </a:solidFill>
-            <a:prstDash val="solid"/>
-          </a:ln>
-        </p:spPr>
-      </p:sp>
       <p:pic>
         <p:nvPicPr>
-          <p:cNvPr id="15" name="Image 2" descr="preencoded.png">    </p:cNvPr>
+          <p:cNvPr id="7" name="Image 2" descr="preencoded.png">    </p:cNvPr>
           <p:cNvPicPr>
             <a:picLocks noChangeAspect="1"/>
           </p:cNvPicPr>
@@ -9880,7 +9946,7 @@
         </p:blipFill>
         <p:spPr>
           <a:xfrm>
-            <a:off x="731520" y="3099816"/>
+            <a:off x="457200" y="4224528"/>
             <a:ext cx="292608" cy="292608"/>
           </a:xfrm>
           <a:prstGeom prst="rect">
@@ -9890,14 +9956,14 @@
       </p:pic>
       <p:sp>
         <p:nvSpPr>
-          <p:cNvPr id="16" name="Text 11"/>
+          <p:cNvPr id="8" name="Text 3"/>
           <p:cNvSpPr txBox="1"/>
           <p:nvPr/>
         </p:nvSpPr>
         <p:spPr>
           <a:xfrm>
-            <a:off x="1325880" y="2871216"/>
-            <a:ext cx="1325880" cy="749808"/>
+            <a:off x="841248" y="4160520"/>
+            <a:ext cx="3657600" cy="457200"/>
           </a:xfrm>
           <a:prstGeom prst="rect">
             <a:avLst/>
@@ -9913,108 +9979,20 @@
               <a:buNone/>
             </a:pPr>
             <a:r>
-              <a:rPr lang="en-US" sz="1500" b="1" dirty="0">
+              <a:rPr lang="en-US" sz="1100" dirty="0">
                 <a:solidFill>
                   <a:schemeClr val="tx1"/>
                 </a:solidFill>
               </a:rPr>
-              <a:t>Грешка</a:t>
-            </a:r>
-            <a:endParaRPr lang="en-US" sz="1500" dirty="0"/>
-          </a:p>
-        </p:txBody>
-      </p:sp>
-      <p:sp>
-        <p:nvSpPr>
-          <p:cNvPr id="17" name="Text 12"/>
-          <p:cNvSpPr txBox="1"/>
-          <p:nvPr/>
-        </p:nvSpPr>
-        <p:spPr>
-          <a:xfrm>
-            <a:off x="2697480" y="2871216"/>
-            <a:ext cx="5852160" cy="749808"/>
-          </a:xfrm>
-          <a:prstGeom prst="rect">
-            <a:avLst/>
-          </a:prstGeom>
-          <a:noFill/>
-          <a:ln/>
-        </p:spPr>
-        <p:txBody>
-          <a:bodyPr wrap="square" lIns="0" tIns="0" rIns="0" bIns="0" rtlCol="0" anchor="ctr"/>
-          <a:lstStyle/>
-          <a:p>
-            <a:pPr indent="0" marL="0">
-              <a:buNone/>
-            </a:pPr>
-            <a:r>
-              <a:rPr lang="en-US" sz="1200" dirty="0">
-                <a:solidFill>
-                  <a:schemeClr val="tx1"/>
-                </a:solidFill>
-              </a:rPr>
-              <a:t>Грешка или номер, който не е в регистрите — списък и връзка „Поправете във формата“ (данните са попълнени). Поправете и „Запиши“ отново.</a:t>
-            </a:r>
-            <a:endParaRPr lang="en-US" sz="1200" dirty="0"/>
-          </a:p>
-        </p:txBody>
-      </p:sp>
-      <p:sp>
-        <p:nvSpPr>
-          <p:cNvPr id="18" name="Shape 13"/>
-          <p:cNvSpPr/>
-          <p:nvPr/>
-        </p:nvSpPr>
-        <p:spPr>
-          <a:xfrm>
-            <a:off x="457200" y="3758184"/>
-            <a:ext cx="8229600" cy="749808"/>
-          </a:xfrm>
-          <a:prstGeom prst="roundRect">
-            <a:avLst>
-              <a:gd name="adj" fmla="val 9756"/>
-            </a:avLst>
-          </a:prstGeom>
-          <a:solidFill>
-            <a:schemeClr val="bg2"/>
-          </a:solidFill>
-          <a:ln w="12700">
-            <a:solidFill>
-              <a:schemeClr val="bg2"/>
-            </a:solidFill>
-            <a:prstDash val="solid"/>
-          </a:ln>
-        </p:spPr>
-      </p:sp>
-      <p:sp>
-        <p:nvSpPr>
-          <p:cNvPr id="19" name="Shape 14"/>
-          <p:cNvSpPr/>
-          <p:nvPr/>
-        </p:nvSpPr>
-        <p:spPr>
-          <a:xfrm>
-            <a:off x="621792" y="3877056"/>
-            <a:ext cx="512064" cy="512064"/>
-          </a:xfrm>
-          <a:prstGeom prst="ellipse">
-            <a:avLst/>
-          </a:prstGeom>
-          <a:solidFill>
-            <a:schemeClr val="accent1"/>
-          </a:solidFill>
-          <a:ln w="19050">
-            <a:solidFill>
-              <a:schemeClr val="accent1"/>
-            </a:solidFill>
-            <a:prstDash val="solid"/>
-          </a:ln>
-        </p:spPr>
+              <a:t>Грешните полета се оцветяват в червено с обяснение. Поправете и натиснете „Запиши“ отново.</a:t>
+            </a:r>
+            <a:endParaRPr lang="en-US" sz="1100" dirty="0"/>
+          </a:p>
+        </p:txBody>
       </p:sp>
       <p:pic>
         <p:nvPicPr>
-          <p:cNvPr id="20" name="Image 3" descr="preencoded.png">    </p:cNvPr>
+          <p:cNvPr id="9" name="Image 3" descr="preencoded.png">    </p:cNvPr>
           <p:cNvPicPr>
             <a:picLocks noChangeAspect="1"/>
           </p:cNvPicPr>
@@ -10028,7 +10006,7 @@
         </p:blipFill>
         <p:spPr>
           <a:xfrm>
-            <a:off x="731520" y="3986784"/>
+            <a:off x="4663440" y="4224528"/>
             <a:ext cx="292608" cy="292608"/>
           </a:xfrm>
           <a:prstGeom prst="rect">
@@ -10038,14 +10016,14 @@
       </p:pic>
       <p:sp>
         <p:nvSpPr>
-          <p:cNvPr id="21" name="Text 15"/>
+          <p:cNvPr id="10" name="Text 4"/>
           <p:cNvSpPr txBox="1"/>
           <p:nvPr/>
         </p:nvSpPr>
         <p:spPr>
           <a:xfrm>
-            <a:off x="1325880" y="3758184"/>
-            <a:ext cx="1325880" cy="749808"/>
+            <a:off x="5047488" y="4160520"/>
+            <a:ext cx="3657600" cy="457200"/>
           </a:xfrm>
           <a:prstGeom prst="rect">
             <a:avLst/>
@@ -10061,50 +10039,14 @@
               <a:buNone/>
             </a:pPr>
             <a:r>
-              <a:rPr lang="en-US" sz="1500" b="1" dirty="0">
+              <a:rPr lang="en-US" sz="1100" dirty="0">
                 <a:solidFill>
                   <a:schemeClr val="tx1"/>
                 </a:solidFill>
               </a:rPr>
-              <a:t>Контрол</a:t>
-            </a:r>
-            <a:endParaRPr lang="en-US" sz="1500" dirty="0"/>
-          </a:p>
-        </p:txBody>
-      </p:sp>
-      <p:sp>
-        <p:nvSpPr>
-          <p:cNvPr id="22" name="Text 16"/>
-          <p:cNvSpPr txBox="1"/>
-          <p:nvPr/>
-        </p:nvSpPr>
-        <p:spPr>
-          <a:xfrm>
-            <a:off x="2697480" y="3758184"/>
-            <a:ext cx="5852160" cy="749808"/>
-          </a:xfrm>
-          <a:prstGeom prst="rect">
-            <a:avLst/>
-          </a:prstGeom>
-          <a:noFill/>
-          <a:ln/>
-        </p:spPr>
-        <p:txBody>
-          <a:bodyPr wrap="square" lIns="0" tIns="0" rIns="0" bIns="0" rtlCol="0" anchor="ctr"/>
-          <a:lstStyle/>
-          <a:p>
-            <a:pPr indent="0" marL="0">
-              <a:buNone/>
-            </a:pPr>
-            <a:r>
-              <a:rPr lang="en-US" sz="1200" dirty="0">
-                <a:solidFill>
-                  <a:schemeClr val="tx1"/>
-                </a:solidFill>
-              </a:rPr>
-              <a:t>Всяко публикуване е в дневник; ръководителят получава уведомление и може да го върне с едно щракване (отметка „Върни“).</a:t>
-            </a:r>
-            <a:endParaRPr lang="en-US" sz="1200" dirty="0"/>
+              <a:t>Прегледът в APA стил е готов; GitHub се отваря в нов прозорец с готова заявка.</a:t>
+            </a:r>
+            <a:endParaRPr lang="en-US" sz="1100" dirty="0"/>
           </a:p>
         </p:txBody>
       </p:sp>
@@ -10714,7 +10656,7 @@
                   <a:schemeClr val="tx2"/>
                 </a:solidFill>
               </a:rPr>
-              <a:t>Карти, „Обобщен отчет“, цитирания</a:t>
+              <a:t>Карти, „Обобщен отчет“, цитирания, „Точки НАЦИД“</a:t>
             </a:r>
             <a:endParaRPr lang="en-US" sz="1500" dirty="0"/>
           </a:p>
@@ -11044,14 +10986,523 @@
       </p:grpSpPr>
       <p:sp>
         <p:nvSpPr>
-          <p:cNvPr id="2" name="Shape 0"/>
+          <p:cNvPr id="2" name="Text 0"/>
           <p:cNvSpPr/>
-          <p:nvPr/>
-        </p:nvSpPr>
-        <p:spPr>
-          <a:xfrm>
-            <a:off x="548640" y="1691640"/>
-            <a:ext cx="1097280" cy="1097280"/>
+          <p:nvPr>
+            <p:ph idx="100" type="title" hasCustomPrompt="1"/>
+          </p:nvPr>
+        </p:nvSpPr>
+        <p:spPr>
+          <a:xfrm>
+            <a:off x="457200" y="274320"/>
+            <a:ext cx="8229600" cy="640080"/>
+          </a:xfrm>
+          <a:prstGeom prst="rect">
+            <a:avLst/>
+          </a:prstGeom>
+          <a:noFill/>
+          <a:ln/>
+        </p:spPr>
+        <p:txBody>
+          <a:bodyPr wrap="square" lIns="0" tIns="0" rIns="0" bIns="0" rtlCol="0" anchor="ctr"/>
+          <a:lstStyle/>
+          <a:p>
+            <a:pPr algn="l" indent="0" marL="0">
+              <a:buNone/>
+            </a:pPr>
+            <a:r>
+              <a:rPr lang="en-US" sz="2600" b="1" dirty="0">
+                <a:solidFill>
+                  <a:schemeClr val="tx1"/>
+                </a:solidFill>
+              </a:rPr>
+              <a:t>В GitHub: заявка, проверка, публикуване</a:t>
+            </a:r>
+            <a:endParaRPr lang="en-US" sz="2600" dirty="0"/>
+          </a:p>
+        </p:txBody>
+      </p:sp>
+      <p:sp>
+        <p:nvSpPr>
+          <p:cNvPr id="3" name="Shape 1"/>
+          <p:cNvSpPr/>
+          <p:nvPr/>
+        </p:nvSpPr>
+        <p:spPr>
+          <a:xfrm>
+            <a:off x="457200" y="1097280"/>
+            <a:ext cx="8229600" cy="749808"/>
+          </a:xfrm>
+          <a:prstGeom prst="roundRect">
+            <a:avLst>
+              <a:gd name="adj" fmla="val 9756"/>
+            </a:avLst>
+          </a:prstGeom>
+          <a:solidFill>
+            <a:schemeClr val="bg2"/>
+          </a:solidFill>
+          <a:ln w="12700">
+            <a:solidFill>
+              <a:schemeClr val="bg2"/>
+            </a:solidFill>
+            <a:prstDash val="solid"/>
+          </a:ln>
+        </p:spPr>
+      </p:sp>
+      <p:sp>
+        <p:nvSpPr>
+          <p:cNvPr id="4" name="Shape 2"/>
+          <p:cNvSpPr/>
+          <p:nvPr/>
+        </p:nvSpPr>
+        <p:spPr>
+          <a:xfrm>
+            <a:off x="621792" y="1216152"/>
+            <a:ext cx="512064" cy="512064"/>
+          </a:xfrm>
+          <a:prstGeom prst="ellipse">
+            <a:avLst/>
+          </a:prstGeom>
+          <a:solidFill>
+            <a:schemeClr val="tx1"/>
+          </a:solidFill>
+          <a:ln w="19050">
+            <a:solidFill>
+              <a:schemeClr val="tx1"/>
+            </a:solidFill>
+            <a:prstDash val="solid"/>
+          </a:ln>
+        </p:spPr>
+      </p:sp>
+      <p:pic>
+        <p:nvPicPr>
+          <p:cNvPr id="5" name="Image 0" descr="preencoded.png">    </p:cNvPr>
+          <p:cNvPicPr>
+            <a:picLocks noChangeAspect="1"/>
+          </p:cNvPicPr>
+          <p:nvPr/>
+        </p:nvPicPr>
+        <p:blipFill>
+          <a:blip r:embed="rId1"/>
+          <a:stretch>
+            <a:fillRect/>
+          </a:stretch>
+        </p:blipFill>
+        <p:spPr>
+          <a:xfrm>
+            <a:off x="731520" y="1325880"/>
+            <a:ext cx="292608" cy="292608"/>
+          </a:xfrm>
+          <a:prstGeom prst="rect">
+            <a:avLst/>
+          </a:prstGeom>
+        </p:spPr>
+      </p:pic>
+      <p:sp>
+        <p:nvSpPr>
+          <p:cNvPr id="6" name="Text 3"/>
+          <p:cNvSpPr txBox="1"/>
+          <p:nvPr/>
+        </p:nvSpPr>
+        <p:spPr>
+          <a:xfrm>
+            <a:off x="1325880" y="1097280"/>
+            <a:ext cx="1325880" cy="749808"/>
+          </a:xfrm>
+          <a:prstGeom prst="rect">
+            <a:avLst/>
+          </a:prstGeom>
+          <a:noFill/>
+          <a:ln/>
+        </p:spPr>
+        <p:txBody>
+          <a:bodyPr wrap="square" lIns="0" tIns="0" rIns="0" bIns="0" rtlCol="0" anchor="ctr"/>
+          <a:lstStyle/>
+          <a:p>
+            <a:pPr indent="0" marL="0">
+              <a:buNone/>
+            </a:pPr>
+            <a:r>
+              <a:rPr lang="en-US" sz="1500" b="1" dirty="0">
+                <a:solidFill>
+                  <a:schemeClr val="tx1"/>
+                </a:solidFill>
+              </a:rPr>
+              <a:t>Create</a:t>
+            </a:r>
+            <a:endParaRPr lang="en-US" sz="1500" dirty="0"/>
+          </a:p>
+        </p:txBody>
+      </p:sp>
+      <p:sp>
+        <p:nvSpPr>
+          <p:cNvPr id="7" name="Text 4"/>
+          <p:cNvSpPr txBox="1"/>
+          <p:nvPr/>
+        </p:nvSpPr>
+        <p:spPr>
+          <a:xfrm>
+            <a:off x="2697480" y="1097280"/>
+            <a:ext cx="5852160" cy="749808"/>
+          </a:xfrm>
+          <a:prstGeom prst="rect">
+            <a:avLst/>
+          </a:prstGeom>
+          <a:noFill/>
+          <a:ln/>
+        </p:spPr>
+        <p:txBody>
+          <a:bodyPr wrap="square" lIns="0" tIns="0" rIns="0" bIns="0" rtlCol="0" anchor="ctr"/>
+          <a:lstStyle/>
+          <a:p>
+            <a:pPr indent="0" marL="0">
+              <a:buNone/>
+            </a:pPr>
+            <a:r>
+              <a:rPr lang="en-US" sz="1200" dirty="0">
+                <a:solidFill>
+                  <a:schemeClr val="tx1"/>
+                </a:solidFill>
+              </a:rPr>
+              <a:t>Влезте със своя акаунт и натиснете зеления бутон „Create“. Не променяйте текста на заявката.</a:t>
+            </a:r>
+            <a:endParaRPr lang="en-US" sz="1200" dirty="0"/>
+          </a:p>
+        </p:txBody>
+      </p:sp>
+      <p:sp>
+        <p:nvSpPr>
+          <p:cNvPr id="8" name="Shape 5"/>
+          <p:cNvSpPr/>
+          <p:nvPr/>
+        </p:nvSpPr>
+        <p:spPr>
+          <a:xfrm>
+            <a:off x="457200" y="1984248"/>
+            <a:ext cx="8229600" cy="749808"/>
+          </a:xfrm>
+          <a:prstGeom prst="roundRect">
+            <a:avLst>
+              <a:gd name="adj" fmla="val 9756"/>
+            </a:avLst>
+          </a:prstGeom>
+          <a:solidFill>
+            <a:schemeClr val="bg2"/>
+          </a:solidFill>
+          <a:ln w="12700">
+            <a:solidFill>
+              <a:schemeClr val="bg2"/>
+            </a:solidFill>
+            <a:prstDash val="solid"/>
+          </a:ln>
+        </p:spPr>
+      </p:sp>
+      <p:sp>
+        <p:nvSpPr>
+          <p:cNvPr id="9" name="Shape 6"/>
+          <p:cNvSpPr/>
+          <p:nvPr/>
+        </p:nvSpPr>
+        <p:spPr>
+          <a:xfrm>
+            <a:off x="621792" y="2103120"/>
+            <a:ext cx="512064" cy="512064"/>
+          </a:xfrm>
+          <a:prstGeom prst="ellipse">
+            <a:avLst/>
+          </a:prstGeom>
+          <a:solidFill>
+            <a:schemeClr val="bg1"/>
+          </a:solidFill>
+          <a:ln w="19050">
+            <a:solidFill>
+              <a:schemeClr val="accent3"/>
+            </a:solidFill>
+            <a:prstDash val="solid"/>
+          </a:ln>
+        </p:spPr>
+      </p:sp>
+      <p:pic>
+        <p:nvPicPr>
+          <p:cNvPr id="10" name="Image 1" descr="preencoded.png">    </p:cNvPr>
+          <p:cNvPicPr>
+            <a:picLocks noChangeAspect="1"/>
+          </p:cNvPicPr>
+          <p:nvPr/>
+        </p:nvPicPr>
+        <p:blipFill>
+          <a:blip r:embed="rId2"/>
+          <a:stretch>
+            <a:fillRect/>
+          </a:stretch>
+        </p:blipFill>
+        <p:spPr>
+          <a:xfrm>
+            <a:off x="731520" y="2212848"/>
+            <a:ext cx="292608" cy="292608"/>
+          </a:xfrm>
+          <a:prstGeom prst="rect">
+            <a:avLst/>
+          </a:prstGeom>
+        </p:spPr>
+      </p:pic>
+      <p:sp>
+        <p:nvSpPr>
+          <p:cNvPr id="11" name="Text 7"/>
+          <p:cNvSpPr txBox="1"/>
+          <p:nvPr/>
+        </p:nvSpPr>
+        <p:spPr>
+          <a:xfrm>
+            <a:off x="1325880" y="1984248"/>
+            <a:ext cx="1325880" cy="749808"/>
+          </a:xfrm>
+          <a:prstGeom prst="rect">
+            <a:avLst/>
+          </a:prstGeom>
+          <a:noFill/>
+          <a:ln/>
+        </p:spPr>
+        <p:txBody>
+          <a:bodyPr wrap="square" lIns="0" tIns="0" rIns="0" bIns="0" rtlCol="0" anchor="ctr"/>
+          <a:lstStyle/>
+          <a:p>
+            <a:pPr indent="0" marL="0">
+              <a:buNone/>
+            </a:pPr>
+            <a:r>
+              <a:rPr lang="en-US" sz="1500" b="1" dirty="0">
+                <a:solidFill>
+                  <a:schemeClr val="tx1"/>
+                </a:solidFill>
+              </a:rPr>
+              <a:t>Приета</a:t>
+            </a:r>
+            <a:endParaRPr lang="en-US" sz="1500" dirty="0"/>
+          </a:p>
+        </p:txBody>
+      </p:sp>
+      <p:sp>
+        <p:nvSpPr>
+          <p:cNvPr id="12" name="Text 8"/>
+          <p:cNvSpPr txBox="1"/>
+          <p:nvPr/>
+        </p:nvSpPr>
+        <p:spPr>
+          <a:xfrm>
+            <a:off x="2697480" y="1984248"/>
+            <a:ext cx="5852160" cy="749808"/>
+          </a:xfrm>
+          <a:prstGeom prst="rect">
+            <a:avLst/>
+          </a:prstGeom>
+          <a:noFill/>
+          <a:ln/>
+        </p:spPr>
+        <p:txBody>
+          <a:bodyPr wrap="square" lIns="0" tIns="0" rIns="0" bIns="0" rtlCol="0" anchor="ctr"/>
+          <a:lstStyle/>
+          <a:p>
+            <a:pPr indent="0" marL="0">
+              <a:buNone/>
+            </a:pPr>
+            <a:r>
+              <a:rPr lang="en-US" sz="1200" dirty="0">
+                <a:solidFill>
+                  <a:schemeClr val="tx1"/>
+                </a:solidFill>
+              </a:rPr>
+              <a:t>DOI, ISSN или ISBN е намерен в регистрите (doi.org, Crossref, НАЦИД НРС, ISSN Portal, Open Library) — публикацията излиза на сайта сама.</a:t>
+            </a:r>
+            <a:endParaRPr lang="en-US" sz="1200" dirty="0"/>
+          </a:p>
+        </p:txBody>
+      </p:sp>
+      <p:sp>
+        <p:nvSpPr>
+          <p:cNvPr id="13" name="Shape 9"/>
+          <p:cNvSpPr/>
+          <p:nvPr/>
+        </p:nvSpPr>
+        <p:spPr>
+          <a:xfrm>
+            <a:off x="457200" y="2871216"/>
+            <a:ext cx="8229600" cy="749808"/>
+          </a:xfrm>
+          <a:prstGeom prst="roundRect">
+            <a:avLst>
+              <a:gd name="adj" fmla="val 9756"/>
+            </a:avLst>
+          </a:prstGeom>
+          <a:solidFill>
+            <a:schemeClr val="bg2"/>
+          </a:solidFill>
+          <a:ln w="12700">
+            <a:solidFill>
+              <a:schemeClr val="bg2"/>
+            </a:solidFill>
+            <a:prstDash val="solid"/>
+          </a:ln>
+        </p:spPr>
+      </p:sp>
+      <p:sp>
+        <p:nvSpPr>
+          <p:cNvPr id="14" name="Shape 10"/>
+          <p:cNvSpPr/>
+          <p:nvPr/>
+        </p:nvSpPr>
+        <p:spPr>
+          <a:xfrm>
+            <a:off x="621792" y="2990088"/>
+            <a:ext cx="512064" cy="512064"/>
+          </a:xfrm>
+          <a:prstGeom prst="ellipse">
+            <a:avLst/>
+          </a:prstGeom>
+          <a:solidFill>
+            <a:schemeClr val="bg1"/>
+          </a:solidFill>
+          <a:ln w="19050">
+            <a:solidFill>
+              <a:schemeClr val="accent4"/>
+            </a:solidFill>
+            <a:prstDash val="solid"/>
+          </a:ln>
+        </p:spPr>
+      </p:sp>
+      <p:pic>
+        <p:nvPicPr>
+          <p:cNvPr id="15" name="Image 2" descr="preencoded.png">    </p:cNvPr>
+          <p:cNvPicPr>
+            <a:picLocks noChangeAspect="1"/>
+          </p:cNvPicPr>
+          <p:nvPr/>
+        </p:nvPicPr>
+        <p:blipFill>
+          <a:blip r:embed="rId3"/>
+          <a:stretch>
+            <a:fillRect/>
+          </a:stretch>
+        </p:blipFill>
+        <p:spPr>
+          <a:xfrm>
+            <a:off x="731520" y="3099816"/>
+            <a:ext cx="292608" cy="292608"/>
+          </a:xfrm>
+          <a:prstGeom prst="rect">
+            <a:avLst/>
+          </a:prstGeom>
+        </p:spPr>
+      </p:pic>
+      <p:sp>
+        <p:nvSpPr>
+          <p:cNvPr id="16" name="Text 11"/>
+          <p:cNvSpPr txBox="1"/>
+          <p:nvPr/>
+        </p:nvSpPr>
+        <p:spPr>
+          <a:xfrm>
+            <a:off x="1325880" y="2871216"/>
+            <a:ext cx="1325880" cy="749808"/>
+          </a:xfrm>
+          <a:prstGeom prst="rect">
+            <a:avLst/>
+          </a:prstGeom>
+          <a:noFill/>
+          <a:ln/>
+        </p:spPr>
+        <p:txBody>
+          <a:bodyPr wrap="square" lIns="0" tIns="0" rIns="0" bIns="0" rtlCol="0" anchor="ctr"/>
+          <a:lstStyle/>
+          <a:p>
+            <a:pPr indent="0" marL="0">
+              <a:buNone/>
+            </a:pPr>
+            <a:r>
+              <a:rPr lang="en-US" sz="1500" b="1" dirty="0">
+                <a:solidFill>
+                  <a:schemeClr val="tx1"/>
+                </a:solidFill>
+              </a:rPr>
+              <a:t>Грешка</a:t>
+            </a:r>
+            <a:endParaRPr lang="en-US" sz="1500" dirty="0"/>
+          </a:p>
+        </p:txBody>
+      </p:sp>
+      <p:sp>
+        <p:nvSpPr>
+          <p:cNvPr id="17" name="Text 12"/>
+          <p:cNvSpPr txBox="1"/>
+          <p:nvPr/>
+        </p:nvSpPr>
+        <p:spPr>
+          <a:xfrm>
+            <a:off x="2697480" y="2871216"/>
+            <a:ext cx="5852160" cy="749808"/>
+          </a:xfrm>
+          <a:prstGeom prst="rect">
+            <a:avLst/>
+          </a:prstGeom>
+          <a:noFill/>
+          <a:ln/>
+        </p:spPr>
+        <p:txBody>
+          <a:bodyPr wrap="square" lIns="0" tIns="0" rIns="0" bIns="0" rtlCol="0" anchor="ctr"/>
+          <a:lstStyle/>
+          <a:p>
+            <a:pPr indent="0" marL="0">
+              <a:buNone/>
+            </a:pPr>
+            <a:r>
+              <a:rPr lang="en-US" sz="1200" dirty="0">
+                <a:solidFill>
+                  <a:schemeClr val="tx1"/>
+                </a:solidFill>
+              </a:rPr>
+              <a:t>Грешка или номер, който не е в регистрите — списък и връзка „Поправете във формата“ (данните са попълнени). Поправете и „Запиши“ отново.</a:t>
+            </a:r>
+            <a:endParaRPr lang="en-US" sz="1200" dirty="0"/>
+          </a:p>
+        </p:txBody>
+      </p:sp>
+      <p:sp>
+        <p:nvSpPr>
+          <p:cNvPr id="18" name="Shape 13"/>
+          <p:cNvSpPr/>
+          <p:nvPr/>
+        </p:nvSpPr>
+        <p:spPr>
+          <a:xfrm>
+            <a:off x="457200" y="3758184"/>
+            <a:ext cx="8229600" cy="749808"/>
+          </a:xfrm>
+          <a:prstGeom prst="roundRect">
+            <a:avLst>
+              <a:gd name="adj" fmla="val 9756"/>
+            </a:avLst>
+          </a:prstGeom>
+          <a:solidFill>
+            <a:schemeClr val="bg2"/>
+          </a:solidFill>
+          <a:ln w="12700">
+            <a:solidFill>
+              <a:schemeClr val="bg2"/>
+            </a:solidFill>
+            <a:prstDash val="solid"/>
+          </a:ln>
+        </p:spPr>
+      </p:sp>
+      <p:sp>
+        <p:nvSpPr>
+          <p:cNvPr id="19" name="Shape 14"/>
+          <p:cNvSpPr/>
+          <p:nvPr/>
+        </p:nvSpPr>
+        <p:spPr>
+          <a:xfrm>
+            <a:off x="621792" y="3877056"/>
+            <a:ext cx="512064" cy="512064"/>
           </a:xfrm>
           <a:prstGeom prst="ellipse">
             <a:avLst/>
@@ -11059,7 +11510,7 @@
           <a:solidFill>
             <a:schemeClr val="accent1"/>
           </a:solidFill>
-          <a:ln w="12700">
+          <a:ln w="19050">
             <a:solidFill>
               <a:schemeClr val="accent1"/>
             </a:solidFill>
@@ -11067,16 +11518,40 @@
           </a:ln>
         </p:spPr>
       </p:sp>
-      <p:sp>
-        <p:nvSpPr>
-          <p:cNvPr id="3" name="Text 1"/>
+      <p:pic>
+        <p:nvPicPr>
+          <p:cNvPr id="20" name="Image 3" descr="preencoded.png">    </p:cNvPr>
+          <p:cNvPicPr>
+            <a:picLocks noChangeAspect="1"/>
+          </p:cNvPicPr>
+          <p:nvPr/>
+        </p:nvPicPr>
+        <p:blipFill>
+          <a:blip r:embed="rId4"/>
+          <a:stretch>
+            <a:fillRect/>
+          </a:stretch>
+        </p:blipFill>
+        <p:spPr>
+          <a:xfrm>
+            <a:off x="731520" y="3986784"/>
+            <a:ext cx="292608" cy="292608"/>
+          </a:xfrm>
+          <a:prstGeom prst="rect">
+            <a:avLst/>
+          </a:prstGeom>
+        </p:spPr>
+      </p:pic>
+      <p:sp>
+        <p:nvSpPr>
+          <p:cNvPr id="21" name="Text 15"/>
           <p:cNvSpPr txBox="1"/>
           <p:nvPr/>
         </p:nvSpPr>
         <p:spPr>
           <a:xfrm>
-            <a:off x="548640" y="1691640"/>
-            <a:ext cx="1097280" cy="1097280"/>
+            <a:off x="1325880" y="3758184"/>
+            <a:ext cx="1325880" cy="749808"/>
           </a:xfrm>
           <a:prstGeom prst="rect">
             <a:avLst/>
@@ -11088,36 +11563,31 @@
           <a:bodyPr wrap="square" lIns="0" tIns="0" rIns="0" bIns="0" rtlCol="0" anchor="ctr"/>
           <a:lstStyle/>
           <a:p>
-            <a:pPr algn="ctr" indent="0" marL="0">
-              <a:buNone/>
-            </a:pPr>
-            <a:r>
-              <a:rPr lang="en-US" sz="4000" b="1" dirty="0">
-                <a:solidFill>
-                  <a:schemeClr val="bg1"/>
-                </a:solidFill>
-                <a:latin typeface="Cambria" pitchFamily="34" charset="0"/>
-                <a:ea typeface="Cambria" pitchFamily="34" charset="-122"/>
-                <a:cs typeface="Cambria" pitchFamily="34" charset="-120"/>
-              </a:rPr>
-              <a:t>6</a:t>
-            </a:r>
-            <a:endParaRPr lang="en-US" sz="4000" dirty="0"/>
-          </a:p>
-        </p:txBody>
-      </p:sp>
-      <p:sp>
-        <p:nvSpPr>
-          <p:cNvPr id="4" name="Text 0"/>
-          <p:cNvSpPr/>
-          <p:nvPr>
-            <p:ph idx="100" type="title" hasCustomPrompt="1"/>
-          </p:nvPr>
-        </p:nvSpPr>
-        <p:spPr>
-          <a:xfrm>
-            <a:off x="2011680" y="1737360"/>
-            <a:ext cx="6583680" cy="914400"/>
+            <a:pPr indent="0" marL="0">
+              <a:buNone/>
+            </a:pPr>
+            <a:r>
+              <a:rPr lang="en-US" sz="1500" b="1" dirty="0">
+                <a:solidFill>
+                  <a:schemeClr val="tx1"/>
+                </a:solidFill>
+              </a:rPr>
+              <a:t>Контрол</a:t>
+            </a:r>
+            <a:endParaRPr lang="en-US" sz="1500" dirty="0"/>
+          </a:p>
+        </p:txBody>
+      </p:sp>
+      <p:sp>
+        <p:nvSpPr>
+          <p:cNvPr id="22" name="Text 16"/>
+          <p:cNvSpPr txBox="1"/>
+          <p:nvPr/>
+        </p:nvSpPr>
+        <p:spPr>
+          <a:xfrm>
+            <a:off x="2697480" y="3758184"/>
+            <a:ext cx="5852160" cy="749808"/>
           </a:xfrm>
           <a:prstGeom prst="rect">
             <a:avLst/>
@@ -11129,56 +11599,63 @@
           <a:bodyPr wrap="square" lIns="0" tIns="0" rIns="0" bIns="0" rtlCol="0" anchor="ctr"/>
           <a:lstStyle/>
           <a:p>
-            <a:pPr algn="l" indent="0" marL="0">
-              <a:buNone/>
-            </a:pPr>
-            <a:r>
-              <a:rPr lang="en-US" sz="3400" b="1" dirty="0">
-                <a:solidFill>
-                  <a:schemeClr val="bg1"/>
-                </a:solidFill>
-              </a:rPr>
-              <a:t>Обновяване на сайта</a:t>
-            </a:r>
-            <a:endParaRPr lang="en-US" sz="3400" dirty="0"/>
-          </a:p>
-        </p:txBody>
-      </p:sp>
-      <p:sp>
-        <p:nvSpPr>
-          <p:cNvPr id="5" name="Text 0"/>
-          <p:cNvSpPr/>
+            <a:pPr indent="0" marL="0">
+              <a:buNone/>
+            </a:pPr>
+            <a:r>
+              <a:rPr lang="en-US" sz="1200" dirty="0">
+                <a:solidFill>
+                  <a:schemeClr val="tx1"/>
+                </a:solidFill>
+              </a:rPr>
+              <a:t>Всяко публикуване е в дневник; при успех няма писмо — резултатът е в текста на заявката. Ръководителят може да го върне с една отметка „Върни“.</a:t>
+            </a:r>
+            <a:endParaRPr lang="en-US" sz="1200" dirty="0"/>
+          </a:p>
+        </p:txBody>
+      </p:sp>
+      <p:sp>
+        <p:nvSpPr>
+          <p:cNvPr id="25" name="Slide Number Placeholder 0"/>
+          <p:cNvSpPr>
+            <a:spLocks noGrp="1"/>
+          </p:cNvSpPr>
           <p:nvPr>
-            <p:ph idx="101" type="body" hasCustomPrompt="1"/>
+            <p:ph type="sldNum" sz="quarter" idx="4294967295"/>
           </p:nvPr>
         </p:nvSpPr>
         <p:spPr>
           <a:xfrm>
-            <a:off x="2011680" y="2697480"/>
-            <a:ext cx="6583680" cy="822960"/>
-          </a:xfrm>
-          <a:prstGeom prst="rect">
-            <a:avLst/>
-          </a:prstGeom>
-          <a:noFill/>
-          <a:ln/>
-        </p:spPr>
-        <p:txBody>
-          <a:bodyPr wrap="square" lIns="0" tIns="0" rIns="0" bIns="0" rtlCol="0" anchor="t"/>
-          <a:lstStyle/>
-          <a:p>
-            <a:pPr algn="l" indent="0" marL="0">
-              <a:buNone/>
-            </a:pPr>
-            <a:r>
-              <a:rPr lang="en-US" sz="1500" dirty="0">
+            <a:off x="8229600" y="4800600"/>
+            <a:ext cx="457200" cy="228600"/>
+          </a:xfrm>
+          <a:prstGeom prst="rect">
+            <a:avLst/>
+          </a:prstGeom>
+          <a:extLst>
+            <a:ext uri="{C572A759-6A51-4108-AA02-DFA0A04FC94B}">
+              <ma14:wrappingTextBoxFlag xmlns:ma14="http://schemas.microsoft.com/office/mac/drawingml/2011/main" val="0"/>
+            </a:ext>
+          </a:extLst>
+        </p:spPr>
+        <p:txBody>
+          <a:bodyPr/>
+          <a:lstStyle>
+            <a:lvl1pPr>
+              <a:defRPr sz="900">
                 <a:solidFill>
                   <a:schemeClr val="accent6"/>
                 </a:solidFill>
-              </a:rPr>
-              <a:t>Merge в main = сайтът се обновява сам за около минута</a:t>
-            </a:r>
-            <a:endParaRPr lang="en-US" sz="1500" dirty="0"/>
+              </a:defRPr>
+            </a:lvl1pPr>
+          </a:lstStyle>
+          <a:p>
+            <a:pPr algn="r"/>
+            <a:fld id="{F7021451-1387-4CA6-816F-3879F97B5CBC}" type="slidenum">
+              <a:rPr b="0" lang="en-US"/>
+              <a:t>20</a:t>
+            </a:fld>
+            <a:endParaRPr lang="en-US"/>
           </a:p>
         </p:txBody>
       </p:sp>
@@ -11209,7 +11686,71 @@
       </p:grpSpPr>
       <p:sp>
         <p:nvSpPr>
-          <p:cNvPr id="2" name="Text 0"/>
+          <p:cNvPr id="2" name="Shape 0"/>
+          <p:cNvSpPr/>
+          <p:nvPr/>
+        </p:nvSpPr>
+        <p:spPr>
+          <a:xfrm>
+            <a:off x="548640" y="1691640"/>
+            <a:ext cx="1097280" cy="1097280"/>
+          </a:xfrm>
+          <a:prstGeom prst="ellipse">
+            <a:avLst/>
+          </a:prstGeom>
+          <a:solidFill>
+            <a:schemeClr val="accent1"/>
+          </a:solidFill>
+          <a:ln w="12700">
+            <a:solidFill>
+              <a:schemeClr val="accent1"/>
+            </a:solidFill>
+            <a:prstDash val="solid"/>
+          </a:ln>
+        </p:spPr>
+      </p:sp>
+      <p:sp>
+        <p:nvSpPr>
+          <p:cNvPr id="3" name="Text 1"/>
+          <p:cNvSpPr txBox="1"/>
+          <p:nvPr/>
+        </p:nvSpPr>
+        <p:spPr>
+          <a:xfrm>
+            <a:off x="548640" y="1691640"/>
+            <a:ext cx="1097280" cy="1097280"/>
+          </a:xfrm>
+          <a:prstGeom prst="rect">
+            <a:avLst/>
+          </a:prstGeom>
+          <a:noFill/>
+          <a:ln/>
+        </p:spPr>
+        <p:txBody>
+          <a:bodyPr wrap="square" lIns="0" tIns="0" rIns="0" bIns="0" rtlCol="0" anchor="ctr"/>
+          <a:lstStyle/>
+          <a:p>
+            <a:pPr algn="ctr" indent="0" marL="0">
+              <a:buNone/>
+            </a:pPr>
+            <a:r>
+              <a:rPr lang="en-US" sz="4000" b="1" dirty="0">
+                <a:solidFill>
+                  <a:schemeClr val="bg1"/>
+                </a:solidFill>
+                <a:latin typeface="Cambria" pitchFamily="34" charset="0"/>
+                <a:ea typeface="Cambria" pitchFamily="34" charset="-122"/>
+                <a:cs typeface="Cambria" pitchFamily="34" charset="-120"/>
+              </a:rPr>
+              <a:t>6</a:t>
+            </a:r>
+            <a:endParaRPr lang="en-US" sz="4000" dirty="0"/>
+          </a:p>
+        </p:txBody>
+      </p:sp>
+      <p:sp>
+        <p:nvSpPr>
+          <p:cNvPr id="4" name="Text 0"/>
           <p:cNvSpPr/>
           <p:nvPr>
             <p:ph idx="100" type="title" hasCustomPrompt="1"/>
@@ -11217,8 +11758,8 @@
         </p:nvSpPr>
         <p:spPr>
           <a:xfrm>
-            <a:off x="457200" y="274320"/>
-            <a:ext cx="8229600" cy="640080"/>
+            <a:off x="2011680" y="1737360"/>
+            <a:ext cx="6583680" cy="914400"/>
           </a:xfrm>
           <a:prstGeom prst="rect">
             <a:avLst/>
@@ -11234,75 +11775,29 @@
               <a:buNone/>
             </a:pPr>
             <a:r>
-              <a:rPr lang="en-US" sz="2600" b="1" dirty="0">
-                <a:solidFill>
-                  <a:schemeClr val="tx1"/>
-                </a:solidFill>
-              </a:rPr>
-              <a:t>Как и кога се обновява сайтът</a:t>
-            </a:r>
-            <a:endParaRPr lang="en-US" sz="2600" dirty="0"/>
-          </a:p>
-        </p:txBody>
-      </p:sp>
-      <p:sp>
-        <p:nvSpPr>
-          <p:cNvPr id="3" name="Shape 1"/>
+              <a:rPr lang="en-US" sz="3400" b="1" dirty="0">
+                <a:solidFill>
+                  <a:schemeClr val="bg1"/>
+                </a:solidFill>
+              </a:rPr>
+              <a:t>Обновяване на сайта</a:t>
+            </a:r>
+            <a:endParaRPr lang="en-US" sz="3400" dirty="0"/>
+          </a:p>
+        </p:txBody>
+      </p:sp>
+      <p:sp>
+        <p:nvSpPr>
+          <p:cNvPr id="5" name="Text 0"/>
           <p:cNvSpPr/>
-          <p:nvPr/>
-        </p:nvSpPr>
-        <p:spPr>
-          <a:xfrm>
-            <a:off x="1097280" y="1783080"/>
-            <a:ext cx="6949440" cy="0"/>
-          </a:xfrm>
-          <a:prstGeom prst="line">
-            <a:avLst/>
-          </a:prstGeom>
-          <a:noFill/>
-          <a:ln w="25400">
-            <a:solidFill>
-              <a:schemeClr val="accent6"/>
-            </a:solidFill>
-            <a:prstDash val="solid"/>
-          </a:ln>
-        </p:spPr>
-      </p:sp>
-      <p:sp>
-        <p:nvSpPr>
-          <p:cNvPr id="4" name="Shape 2"/>
-          <p:cNvSpPr/>
-          <p:nvPr/>
-        </p:nvSpPr>
-        <p:spPr>
-          <a:xfrm>
-            <a:off x="914400" y="1463040"/>
-            <a:ext cx="640080" cy="640080"/>
-          </a:xfrm>
-          <a:prstGeom prst="ellipse">
-            <a:avLst/>
-          </a:prstGeom>
-          <a:solidFill>
-            <a:schemeClr val="accent1"/>
-          </a:solidFill>
-          <a:ln w="38100">
-            <a:solidFill>
-              <a:schemeClr val="bg1"/>
-            </a:solidFill>
-            <a:prstDash val="solid"/>
-          </a:ln>
-        </p:spPr>
-      </p:sp>
-      <p:sp>
-        <p:nvSpPr>
-          <p:cNvPr id="5" name="Text 3"/>
-          <p:cNvSpPr txBox="1"/>
-          <p:nvPr/>
-        </p:nvSpPr>
-        <p:spPr>
-          <a:xfrm>
-            <a:off x="914400" y="1463040"/>
-            <a:ext cx="640080" cy="640080"/>
+          <p:nvPr>
+            <p:ph idx="101" type="body" hasCustomPrompt="1"/>
+          </p:nvPr>
+        </p:nvSpPr>
+        <p:spPr>
+          <a:xfrm>
+            <a:off x="2011680" y="2697480"/>
+            <a:ext cx="6583680" cy="822960"/>
           </a:xfrm>
           <a:prstGeom prst="rect">
             <a:avLst/>
@@ -11311,650 +11806,21 @@
           <a:ln/>
         </p:spPr>
         <p:txBody>
-          <a:bodyPr wrap="square" lIns="0" tIns="0" rIns="0" bIns="0" rtlCol="0" anchor="ctr"/>
-          <a:lstStyle/>
-          <a:p>
-            <a:pPr algn="ctr" indent="0" marL="0">
-              <a:buNone/>
-            </a:pPr>
-            <a:r>
-              <a:rPr lang="en-US" sz="1800" b="1" dirty="0">
-                <a:solidFill>
-                  <a:schemeClr val="bg1"/>
-                </a:solidFill>
-              </a:rPr>
-              <a:t>1</a:t>
-            </a:r>
-            <a:endParaRPr lang="en-US" sz="1800" dirty="0"/>
-          </a:p>
-        </p:txBody>
-      </p:sp>
-      <p:sp>
-        <p:nvSpPr>
-          <p:cNvPr id="6" name="Text 4"/>
-          <p:cNvSpPr txBox="1"/>
-          <p:nvPr/>
-        </p:nvSpPr>
-        <p:spPr>
-          <a:xfrm>
-            <a:off x="365760" y="2240280"/>
-            <a:ext cx="1737360" cy="365760"/>
-          </a:xfrm>
-          <a:prstGeom prst="rect">
-            <a:avLst/>
-          </a:prstGeom>
-          <a:noFill/>
-          <a:ln/>
-        </p:spPr>
-        <p:txBody>
-          <a:bodyPr wrap="square" lIns="0" tIns="0" rIns="0" bIns="0" rtlCol="0" anchor="ctr"/>
-          <a:lstStyle/>
-          <a:p>
-            <a:pPr algn="ctr" indent="0" marL="0">
-              <a:buNone/>
-            </a:pPr>
-            <a:r>
-              <a:rPr lang="en-US" sz="1500" b="1" dirty="0">
-                <a:solidFill>
-                  <a:schemeClr val="tx1"/>
-                </a:solidFill>
-              </a:rPr>
-              <a:t>Merge</a:t>
+          <a:bodyPr wrap="square" lIns="0" tIns="0" rIns="0" bIns="0" rtlCol="0" anchor="t"/>
+          <a:lstStyle/>
+          <a:p>
+            <a:pPr algn="l" indent="0" marL="0">
+              <a:buNone/>
+            </a:pPr>
+            <a:r>
+              <a:rPr lang="en-US" sz="1500" dirty="0">
+                <a:solidFill>
+                  <a:schemeClr val="accent6"/>
+                </a:solidFill>
+              </a:rPr>
+              <a:t>Merge в main = сайтът се обновява сам за около минута</a:t>
             </a:r>
             <a:endParaRPr lang="en-US" sz="1500" dirty="0"/>
-          </a:p>
-        </p:txBody>
-      </p:sp>
-      <p:sp>
-        <p:nvSpPr>
-          <p:cNvPr id="7" name="Text 5"/>
-          <p:cNvSpPr txBox="1"/>
-          <p:nvPr/>
-        </p:nvSpPr>
-        <p:spPr>
-          <a:xfrm>
-            <a:off x="365760" y="2606040"/>
-            <a:ext cx="1737360" cy="548640"/>
-          </a:xfrm>
-          <a:prstGeom prst="rect">
-            <a:avLst/>
-          </a:prstGeom>
-          <a:noFill/>
-          <a:ln/>
-        </p:spPr>
-        <p:txBody>
-          <a:bodyPr wrap="square" lIns="0" tIns="0" rIns="0" bIns="0" rtlCol="0" anchor="t"/>
-          <a:lstStyle/>
-          <a:p>
-            <a:pPr algn="ctr" indent="0" marL="0">
-              <a:buNone/>
-            </a:pPr>
-            <a:r>
-              <a:rPr lang="en-US" sz="1100" dirty="0">
-                <a:solidFill>
-                  <a:schemeClr val="tx2"/>
-                </a:solidFill>
-              </a:rPr>
-              <a:t>ръководителят одобрява Pull Request-а</a:t>
-            </a:r>
-            <a:endParaRPr lang="en-US" sz="1100" dirty="0"/>
-          </a:p>
-        </p:txBody>
-      </p:sp>
-      <p:sp>
-        <p:nvSpPr>
-          <p:cNvPr id="8" name="Shape 6"/>
-          <p:cNvSpPr/>
-          <p:nvPr/>
-        </p:nvSpPr>
-        <p:spPr>
-          <a:xfrm>
-            <a:off x="3227832" y="1463040"/>
-            <a:ext cx="640080" cy="640080"/>
-          </a:xfrm>
-          <a:prstGeom prst="ellipse">
-            <a:avLst/>
-          </a:prstGeom>
-          <a:solidFill>
-            <a:schemeClr val="accent1"/>
-          </a:solidFill>
-          <a:ln w="38100">
-            <a:solidFill>
-              <a:schemeClr val="bg1"/>
-            </a:solidFill>
-            <a:prstDash val="solid"/>
-          </a:ln>
-        </p:spPr>
-      </p:sp>
-      <p:sp>
-        <p:nvSpPr>
-          <p:cNvPr id="9" name="Text 7"/>
-          <p:cNvSpPr txBox="1"/>
-          <p:nvPr/>
-        </p:nvSpPr>
-        <p:spPr>
-          <a:xfrm>
-            <a:off x="3227832" y="1463040"/>
-            <a:ext cx="640080" cy="640080"/>
-          </a:xfrm>
-          <a:prstGeom prst="rect">
-            <a:avLst/>
-          </a:prstGeom>
-          <a:noFill/>
-          <a:ln/>
-        </p:spPr>
-        <p:txBody>
-          <a:bodyPr wrap="square" lIns="0" tIns="0" rIns="0" bIns="0" rtlCol="0" anchor="ctr"/>
-          <a:lstStyle/>
-          <a:p>
-            <a:pPr algn="ctr" indent="0" marL="0">
-              <a:buNone/>
-            </a:pPr>
-            <a:r>
-              <a:rPr lang="en-US" sz="1800" b="1" dirty="0">
-                <a:solidFill>
-                  <a:schemeClr val="bg1"/>
-                </a:solidFill>
-              </a:rPr>
-              <a:t>2</a:t>
-            </a:r>
-            <a:endParaRPr lang="en-US" sz="1800" dirty="0"/>
-          </a:p>
-        </p:txBody>
-      </p:sp>
-      <p:sp>
-        <p:nvSpPr>
-          <p:cNvPr id="10" name="Text 8"/>
-          <p:cNvSpPr txBox="1"/>
-          <p:nvPr/>
-        </p:nvSpPr>
-        <p:spPr>
-          <a:xfrm>
-            <a:off x="2679192" y="2240280"/>
-            <a:ext cx="1737360" cy="365760"/>
-          </a:xfrm>
-          <a:prstGeom prst="rect">
-            <a:avLst/>
-          </a:prstGeom>
-          <a:noFill/>
-          <a:ln/>
-        </p:spPr>
-        <p:txBody>
-          <a:bodyPr wrap="square" lIns="0" tIns="0" rIns="0" bIns="0" rtlCol="0" anchor="ctr"/>
-          <a:lstStyle/>
-          <a:p>
-            <a:pPr algn="ctr" indent="0" marL="0">
-              <a:buNone/>
-            </a:pPr>
-            <a:r>
-              <a:rPr lang="en-US" sz="1500" b="1" dirty="0">
-                <a:solidFill>
-                  <a:schemeClr val="tx1"/>
-                </a:solidFill>
-              </a:rPr>
-              <a:t>Build</a:t>
-            </a:r>
-            <a:endParaRPr lang="en-US" sz="1500" dirty="0"/>
-          </a:p>
-        </p:txBody>
-      </p:sp>
-      <p:sp>
-        <p:nvSpPr>
-          <p:cNvPr id="11" name="Text 9"/>
-          <p:cNvSpPr txBox="1"/>
-          <p:nvPr/>
-        </p:nvSpPr>
-        <p:spPr>
-          <a:xfrm>
-            <a:off x="2679192" y="2606040"/>
-            <a:ext cx="1737360" cy="548640"/>
-          </a:xfrm>
-          <a:prstGeom prst="rect">
-            <a:avLst/>
-          </a:prstGeom>
-          <a:noFill/>
-          <a:ln/>
-        </p:spPr>
-        <p:txBody>
-          <a:bodyPr wrap="square" lIns="0" tIns="0" rIns="0" bIns="0" rtlCol="0" anchor="t"/>
-          <a:lstStyle/>
-          <a:p>
-            <a:pPr algn="ctr" indent="0" marL="0">
-              <a:buNone/>
-            </a:pPr>
-            <a:r>
-              <a:rPr lang="en-US" sz="1100" dirty="0">
-                <a:solidFill>
-                  <a:schemeClr val="tx2"/>
-                </a:solidFill>
-              </a:rPr>
-              <a:t>GitHub изгражда сайта (≈ 30 s)</a:t>
-            </a:r>
-            <a:endParaRPr lang="en-US" sz="1100" dirty="0"/>
-          </a:p>
-        </p:txBody>
-      </p:sp>
-      <p:sp>
-        <p:nvSpPr>
-          <p:cNvPr id="12" name="Shape 10"/>
-          <p:cNvSpPr/>
-          <p:nvPr/>
-        </p:nvSpPr>
-        <p:spPr>
-          <a:xfrm>
-            <a:off x="5541264" y="1463040"/>
-            <a:ext cx="640080" cy="640080"/>
-          </a:xfrm>
-          <a:prstGeom prst="ellipse">
-            <a:avLst/>
-          </a:prstGeom>
-          <a:solidFill>
-            <a:schemeClr val="accent1"/>
-          </a:solidFill>
-          <a:ln w="38100">
-            <a:solidFill>
-              <a:schemeClr val="bg1"/>
-            </a:solidFill>
-            <a:prstDash val="solid"/>
-          </a:ln>
-        </p:spPr>
-      </p:sp>
-      <p:sp>
-        <p:nvSpPr>
-          <p:cNvPr id="13" name="Text 11"/>
-          <p:cNvSpPr txBox="1"/>
-          <p:nvPr/>
-        </p:nvSpPr>
-        <p:spPr>
-          <a:xfrm>
-            <a:off x="5541264" y="1463040"/>
-            <a:ext cx="640080" cy="640080"/>
-          </a:xfrm>
-          <a:prstGeom prst="rect">
-            <a:avLst/>
-          </a:prstGeom>
-          <a:noFill/>
-          <a:ln/>
-        </p:spPr>
-        <p:txBody>
-          <a:bodyPr wrap="square" lIns="0" tIns="0" rIns="0" bIns="0" rtlCol="0" anchor="ctr"/>
-          <a:lstStyle/>
-          <a:p>
-            <a:pPr algn="ctr" indent="0" marL="0">
-              <a:buNone/>
-            </a:pPr>
-            <a:r>
-              <a:rPr lang="en-US" sz="1800" b="1" dirty="0">
-                <a:solidFill>
-                  <a:schemeClr val="bg1"/>
-                </a:solidFill>
-              </a:rPr>
-              <a:t>3</a:t>
-            </a:r>
-            <a:endParaRPr lang="en-US" sz="1800" dirty="0"/>
-          </a:p>
-        </p:txBody>
-      </p:sp>
-      <p:sp>
-        <p:nvSpPr>
-          <p:cNvPr id="14" name="Text 12"/>
-          <p:cNvSpPr txBox="1"/>
-          <p:nvPr/>
-        </p:nvSpPr>
-        <p:spPr>
-          <a:xfrm>
-            <a:off x="4992624" y="2240280"/>
-            <a:ext cx="1737360" cy="365760"/>
-          </a:xfrm>
-          <a:prstGeom prst="rect">
-            <a:avLst/>
-          </a:prstGeom>
-          <a:noFill/>
-          <a:ln/>
-        </p:spPr>
-        <p:txBody>
-          <a:bodyPr wrap="square" lIns="0" tIns="0" rIns="0" bIns="0" rtlCol="0" anchor="ctr"/>
-          <a:lstStyle/>
-          <a:p>
-            <a:pPr algn="ctr" indent="0" marL="0">
-              <a:buNone/>
-            </a:pPr>
-            <a:r>
-              <a:rPr lang="en-US" sz="1500" b="1" dirty="0">
-                <a:solidFill>
-                  <a:schemeClr val="tx1"/>
-                </a:solidFill>
-              </a:rPr>
-              <a:t>Deploy</a:t>
-            </a:r>
-            <a:endParaRPr lang="en-US" sz="1500" dirty="0"/>
-          </a:p>
-        </p:txBody>
-      </p:sp>
-      <p:sp>
-        <p:nvSpPr>
-          <p:cNvPr id="15" name="Text 13"/>
-          <p:cNvSpPr txBox="1"/>
-          <p:nvPr/>
-        </p:nvSpPr>
-        <p:spPr>
-          <a:xfrm>
-            <a:off x="4992624" y="2606040"/>
-            <a:ext cx="1737360" cy="548640"/>
-          </a:xfrm>
-          <a:prstGeom prst="rect">
-            <a:avLst/>
-          </a:prstGeom>
-          <a:noFill/>
-          <a:ln/>
-        </p:spPr>
-        <p:txBody>
-          <a:bodyPr wrap="square" lIns="0" tIns="0" rIns="0" bIns="0" rtlCol="0" anchor="t"/>
-          <a:lstStyle/>
-          <a:p>
-            <a:pPr algn="ctr" indent="0" marL="0">
-              <a:buNone/>
-            </a:pPr>
-            <a:r>
-              <a:rPr lang="en-US" sz="1100" dirty="0">
-                <a:solidFill>
-                  <a:schemeClr val="tx2"/>
-                </a:solidFill>
-              </a:rPr>
-              <a:t>качване на urs.ir.bas.bg (≈ 30 s)</a:t>
-            </a:r>
-            <a:endParaRPr lang="en-US" sz="1100" dirty="0"/>
-          </a:p>
-        </p:txBody>
-      </p:sp>
-      <p:sp>
-        <p:nvSpPr>
-          <p:cNvPr id="16" name="Shape 14"/>
-          <p:cNvSpPr/>
-          <p:nvPr/>
-        </p:nvSpPr>
-        <p:spPr>
-          <a:xfrm>
-            <a:off x="7854696" y="1463040"/>
-            <a:ext cx="640080" cy="640080"/>
-          </a:xfrm>
-          <a:prstGeom prst="ellipse">
-            <a:avLst/>
-          </a:prstGeom>
-          <a:solidFill>
-            <a:schemeClr val="accent3"/>
-          </a:solidFill>
-          <a:ln w="38100">
-            <a:solidFill>
-              <a:schemeClr val="bg1"/>
-            </a:solidFill>
-            <a:prstDash val="solid"/>
-          </a:ln>
-        </p:spPr>
-      </p:sp>
-      <p:sp>
-        <p:nvSpPr>
-          <p:cNvPr id="17" name="Text 15"/>
-          <p:cNvSpPr txBox="1"/>
-          <p:nvPr/>
-        </p:nvSpPr>
-        <p:spPr>
-          <a:xfrm>
-            <a:off x="7854696" y="1463040"/>
-            <a:ext cx="640080" cy="640080"/>
-          </a:xfrm>
-          <a:prstGeom prst="rect">
-            <a:avLst/>
-          </a:prstGeom>
-          <a:noFill/>
-          <a:ln/>
-        </p:spPr>
-        <p:txBody>
-          <a:bodyPr wrap="square" lIns="0" tIns="0" rIns="0" bIns="0" rtlCol="0" anchor="ctr"/>
-          <a:lstStyle/>
-          <a:p>
-            <a:pPr algn="ctr" indent="0" marL="0">
-              <a:buNone/>
-            </a:pPr>
-            <a:r>
-              <a:rPr lang="en-US" sz="1800" b="1" dirty="0">
-                <a:solidFill>
-                  <a:schemeClr val="bg1"/>
-                </a:solidFill>
-              </a:rPr>
-              <a:t>4</a:t>
-            </a:r>
-            <a:endParaRPr lang="en-US" sz="1800" dirty="0"/>
-          </a:p>
-        </p:txBody>
-      </p:sp>
-      <p:sp>
-        <p:nvSpPr>
-          <p:cNvPr id="18" name="Text 16"/>
-          <p:cNvSpPr txBox="1"/>
-          <p:nvPr/>
-        </p:nvSpPr>
-        <p:spPr>
-          <a:xfrm>
-            <a:off x="7306056" y="2240280"/>
-            <a:ext cx="1737360" cy="365760"/>
-          </a:xfrm>
-          <a:prstGeom prst="rect">
-            <a:avLst/>
-          </a:prstGeom>
-          <a:noFill/>
-          <a:ln/>
-        </p:spPr>
-        <p:txBody>
-          <a:bodyPr wrap="square" lIns="0" tIns="0" rIns="0" bIns="0" rtlCol="0" anchor="ctr"/>
-          <a:lstStyle/>
-          <a:p>
-            <a:pPr algn="ctr" indent="0" marL="0">
-              <a:buNone/>
-            </a:pPr>
-            <a:r>
-              <a:rPr lang="en-US" sz="1500" b="1" dirty="0">
-                <a:solidFill>
-                  <a:schemeClr val="tx1"/>
-                </a:solidFill>
-              </a:rPr>
-              <a:t>Готово</a:t>
-            </a:r>
-            <a:endParaRPr lang="en-US" sz="1500" dirty="0"/>
-          </a:p>
-        </p:txBody>
-      </p:sp>
-      <p:sp>
-        <p:nvSpPr>
-          <p:cNvPr id="19" name="Text 17"/>
-          <p:cNvSpPr txBox="1"/>
-          <p:nvPr/>
-        </p:nvSpPr>
-        <p:spPr>
-          <a:xfrm>
-            <a:off x="7306056" y="2606040"/>
-            <a:ext cx="1737360" cy="548640"/>
-          </a:xfrm>
-          <a:prstGeom prst="rect">
-            <a:avLst/>
-          </a:prstGeom>
-          <a:noFill/>
-          <a:ln/>
-        </p:spPr>
-        <p:txBody>
-          <a:bodyPr wrap="square" lIns="0" tIns="0" rIns="0" bIns="0" rtlCol="0" anchor="t"/>
-          <a:lstStyle/>
-          <a:p>
-            <a:pPr algn="ctr" indent="0" marL="0">
-              <a:buNone/>
-            </a:pPr>
-            <a:r>
-              <a:rPr lang="en-US" sz="1100" dirty="0">
-                <a:solidFill>
-                  <a:schemeClr val="tx2"/>
-                </a:solidFill>
-              </a:rPr>
-              <a:t>Ctrl+F5 в браузъра</a:t>
-            </a:r>
-            <a:endParaRPr lang="en-US" sz="1100" dirty="0"/>
-          </a:p>
-        </p:txBody>
-      </p:sp>
-      <p:sp>
-        <p:nvSpPr>
-          <p:cNvPr id="20" name="Shape 18"/>
-          <p:cNvSpPr/>
-          <p:nvPr/>
-        </p:nvSpPr>
-        <p:spPr>
-          <a:xfrm>
-            <a:off x="457200" y="3429000"/>
-            <a:ext cx="8229600" cy="1143000"/>
-          </a:xfrm>
-          <a:prstGeom prst="roundRect">
-            <a:avLst>
-              <a:gd name="adj" fmla="val 6400"/>
-            </a:avLst>
-          </a:prstGeom>
-          <a:solidFill>
-            <a:schemeClr val="bg2"/>
-          </a:solidFill>
-          <a:ln w="12700">
-            <a:solidFill>
-              <a:schemeClr val="bg2"/>
-            </a:solidFill>
-            <a:prstDash val="solid"/>
-          </a:ln>
-        </p:spPr>
-      </p:sp>
-      <p:sp>
-        <p:nvSpPr>
-          <p:cNvPr id="21" name="Text 19"/>
-          <p:cNvSpPr txBox="1"/>
-          <p:nvPr/>
-        </p:nvSpPr>
-        <p:spPr>
-          <a:xfrm>
-            <a:off x="685800" y="3547872"/>
-            <a:ext cx="7863840" cy="960120"/>
-          </a:xfrm>
-          <a:prstGeom prst="rect">
-            <a:avLst/>
-          </a:prstGeom>
-          <a:noFill/>
-          <a:ln/>
-        </p:spPr>
-        <p:txBody>
-          <a:bodyPr wrap="square" lIns="0" tIns="0" rIns="0" bIns="0" rtlCol="0" anchor="t"/>
-          <a:lstStyle/>
-          <a:p>
-            <a:pPr marL="177800" indent="-177800">
-              <a:spcAft>
-                <a:spcPts val="500"/>
-              </a:spcAft>
-              <a:buSzPct val="100000"/>
-              <a:buChar char="•"/>
-            </a:pPr>
-            <a:r>
-              <a:rPr lang="en-US" sz="1200" b="1" dirty="0">
-                <a:solidFill>
-                  <a:schemeClr val="tx1"/>
-                </a:solidFill>
-              </a:rPr>
-              <a:t>Къде се появява новата публикация: </a:t>
-            </a:r>
-            <a:pPr indent="0" marL="0">
-              <a:spcAft>
-                <a:spcPts val="500"/>
-              </a:spcAft>
-              <a:buNone/>
-            </a:pPr>
-            <a:r>
-              <a:rPr lang="en-US" sz="1200" dirty="0">
-                <a:solidFill>
-                  <a:schemeClr val="tx1"/>
-                </a:solidFill>
-              </a:rPr>
-              <a:t>на годишната страница (Публикации → Архив), в „Обобщен отчет“ на всеки съавтор и в броя на научните направления.</a:t>
-            </a:r>
-            <a:endParaRPr lang="en-US" sz="1200" dirty="0"/>
-          </a:p>
-          <a:p>
-            <a:pPr marL="177800" indent="-177800">
-              <a:spcAft>
-                <a:spcPts val="500"/>
-              </a:spcAft>
-              <a:buSzPct val="100000"/>
-              <a:buChar char="•"/>
-            </a:pPr>
-            <a:r>
-              <a:rPr lang="en-US" sz="1200" b="1" dirty="0">
-                <a:solidFill>
-                  <a:schemeClr val="tx1"/>
-                </a:solidFill>
-              </a:rPr>
-              <a:t>Не виждате промяната? </a:t>
-            </a:r>
-            <a:pPr indent="0" marL="0">
-              <a:spcAft>
-                <a:spcPts val="500"/>
-              </a:spcAft>
-              <a:buNone/>
-            </a:pPr>
-            <a:r>
-              <a:rPr lang="en-US" sz="1200" dirty="0">
-                <a:solidFill>
-                  <a:schemeClr val="tx1"/>
-                </a:solidFill>
-              </a:rPr>
-              <a:t>Натиснете Ctrl+F5 или отворете страницата в прозорец „инкогнито“.</a:t>
-            </a:r>
-            <a:endParaRPr lang="en-US" sz="1200" dirty="0"/>
-          </a:p>
-        </p:txBody>
-      </p:sp>
-      <p:sp>
-        <p:nvSpPr>
-          <p:cNvPr id="25" name="Slide Number Placeholder 0"/>
-          <p:cNvSpPr>
-            <a:spLocks noGrp="1"/>
-          </p:cNvSpPr>
-          <p:nvPr>
-            <p:ph type="sldNum" sz="quarter" idx="4294967295"/>
-          </p:nvPr>
-        </p:nvSpPr>
-        <p:spPr>
-          <a:xfrm>
-            <a:off x="8229600" y="4800600"/>
-            <a:ext cx="457200" cy="228600"/>
-          </a:xfrm>
-          <a:prstGeom prst="rect">
-            <a:avLst/>
-          </a:prstGeom>
-          <a:extLst>
-            <a:ext uri="{C572A759-6A51-4108-AA02-DFA0A04FC94B}">
-              <ma14:wrappingTextBoxFlag xmlns:ma14="http://schemas.microsoft.com/office/mac/drawingml/2011/main" val="0"/>
-            </a:ext>
-          </a:extLst>
-        </p:spPr>
-        <p:txBody>
-          <a:bodyPr/>
-          <a:lstStyle>
-            <a:lvl1pPr>
-              <a:defRPr sz="900">
-                <a:solidFill>
-                  <a:schemeClr val="accent6"/>
-                </a:solidFill>
-              </a:defRPr>
-            </a:lvl1pPr>
-          </a:lstStyle>
-          <a:p>
-            <a:pPr algn="r"/>
-            <a:fld id="{F7021451-1387-4CA6-816F-3879F97B5CBC}" type="slidenum">
-              <a:rPr b="0" lang="en-US"/>
-              <a:t>21</a:t>
-            </a:fld>
-            <a:endParaRPr lang="en-US"/>
           </a:p>
         </p:txBody>
       </p:sp>
@@ -12015,6 +11881,782 @@
                   <a:schemeClr val="tx1"/>
                 </a:solidFill>
               </a:rPr>
+              <a:t>Как и кога се обновява сайтът</a:t>
+            </a:r>
+            <a:endParaRPr lang="en-US" sz="2600" dirty="0"/>
+          </a:p>
+        </p:txBody>
+      </p:sp>
+      <p:sp>
+        <p:nvSpPr>
+          <p:cNvPr id="3" name="Shape 1"/>
+          <p:cNvSpPr/>
+          <p:nvPr/>
+        </p:nvSpPr>
+        <p:spPr>
+          <a:xfrm>
+            <a:off x="1097280" y="1783080"/>
+            <a:ext cx="6949440" cy="0"/>
+          </a:xfrm>
+          <a:prstGeom prst="line">
+            <a:avLst/>
+          </a:prstGeom>
+          <a:noFill/>
+          <a:ln w="25400">
+            <a:solidFill>
+              <a:schemeClr val="accent6"/>
+            </a:solidFill>
+            <a:prstDash val="solid"/>
+          </a:ln>
+        </p:spPr>
+      </p:sp>
+      <p:sp>
+        <p:nvSpPr>
+          <p:cNvPr id="4" name="Shape 2"/>
+          <p:cNvSpPr/>
+          <p:nvPr/>
+        </p:nvSpPr>
+        <p:spPr>
+          <a:xfrm>
+            <a:off x="914400" y="1463040"/>
+            <a:ext cx="640080" cy="640080"/>
+          </a:xfrm>
+          <a:prstGeom prst="ellipse">
+            <a:avLst/>
+          </a:prstGeom>
+          <a:solidFill>
+            <a:schemeClr val="accent1"/>
+          </a:solidFill>
+          <a:ln w="38100">
+            <a:solidFill>
+              <a:schemeClr val="bg1"/>
+            </a:solidFill>
+            <a:prstDash val="solid"/>
+          </a:ln>
+        </p:spPr>
+      </p:sp>
+      <p:sp>
+        <p:nvSpPr>
+          <p:cNvPr id="5" name="Text 3"/>
+          <p:cNvSpPr txBox="1"/>
+          <p:nvPr/>
+        </p:nvSpPr>
+        <p:spPr>
+          <a:xfrm>
+            <a:off x="914400" y="1463040"/>
+            <a:ext cx="640080" cy="640080"/>
+          </a:xfrm>
+          <a:prstGeom prst="rect">
+            <a:avLst/>
+          </a:prstGeom>
+          <a:noFill/>
+          <a:ln/>
+        </p:spPr>
+        <p:txBody>
+          <a:bodyPr wrap="square" lIns="0" tIns="0" rIns="0" bIns="0" rtlCol="0" anchor="ctr"/>
+          <a:lstStyle/>
+          <a:p>
+            <a:pPr algn="ctr" indent="0" marL="0">
+              <a:buNone/>
+            </a:pPr>
+            <a:r>
+              <a:rPr lang="en-US" sz="1800" b="1" dirty="0">
+                <a:solidFill>
+                  <a:schemeClr val="bg1"/>
+                </a:solidFill>
+              </a:rPr>
+              <a:t>1</a:t>
+            </a:r>
+            <a:endParaRPr lang="en-US" sz="1800" dirty="0"/>
+          </a:p>
+        </p:txBody>
+      </p:sp>
+      <p:sp>
+        <p:nvSpPr>
+          <p:cNvPr id="6" name="Text 4"/>
+          <p:cNvSpPr txBox="1"/>
+          <p:nvPr/>
+        </p:nvSpPr>
+        <p:spPr>
+          <a:xfrm>
+            <a:off x="365760" y="2240280"/>
+            <a:ext cx="1737360" cy="365760"/>
+          </a:xfrm>
+          <a:prstGeom prst="rect">
+            <a:avLst/>
+          </a:prstGeom>
+          <a:noFill/>
+          <a:ln/>
+        </p:spPr>
+        <p:txBody>
+          <a:bodyPr wrap="square" lIns="0" tIns="0" rIns="0" bIns="0" rtlCol="0" anchor="ctr"/>
+          <a:lstStyle/>
+          <a:p>
+            <a:pPr algn="ctr" indent="0" marL="0">
+              <a:buNone/>
+            </a:pPr>
+            <a:r>
+              <a:rPr lang="en-US" sz="1500" b="1" dirty="0">
+                <a:solidFill>
+                  <a:schemeClr val="tx1"/>
+                </a:solidFill>
+              </a:rPr>
+              <a:t>Merge</a:t>
+            </a:r>
+            <a:endParaRPr lang="en-US" sz="1500" dirty="0"/>
+          </a:p>
+        </p:txBody>
+      </p:sp>
+      <p:sp>
+        <p:nvSpPr>
+          <p:cNvPr id="7" name="Text 5"/>
+          <p:cNvSpPr txBox="1"/>
+          <p:nvPr/>
+        </p:nvSpPr>
+        <p:spPr>
+          <a:xfrm>
+            <a:off x="365760" y="2606040"/>
+            <a:ext cx="1737360" cy="548640"/>
+          </a:xfrm>
+          <a:prstGeom prst="rect">
+            <a:avLst/>
+          </a:prstGeom>
+          <a:noFill/>
+          <a:ln/>
+        </p:spPr>
+        <p:txBody>
+          <a:bodyPr wrap="square" lIns="0" tIns="0" rIns="0" bIns="0" rtlCol="0" anchor="t"/>
+          <a:lstStyle/>
+          <a:p>
+            <a:pPr algn="ctr" indent="0" marL="0">
+              <a:buNone/>
+            </a:pPr>
+            <a:r>
+              <a:rPr lang="en-US" sz="1100" dirty="0">
+                <a:solidFill>
+                  <a:schemeClr val="tx2"/>
+                </a:solidFill>
+              </a:rPr>
+              <a:t>ръководителят одобрява Pull Request-а</a:t>
+            </a:r>
+            <a:endParaRPr lang="en-US" sz="1100" dirty="0"/>
+          </a:p>
+        </p:txBody>
+      </p:sp>
+      <p:sp>
+        <p:nvSpPr>
+          <p:cNvPr id="8" name="Shape 6"/>
+          <p:cNvSpPr/>
+          <p:nvPr/>
+        </p:nvSpPr>
+        <p:spPr>
+          <a:xfrm>
+            <a:off x="3227832" y="1463040"/>
+            <a:ext cx="640080" cy="640080"/>
+          </a:xfrm>
+          <a:prstGeom prst="ellipse">
+            <a:avLst/>
+          </a:prstGeom>
+          <a:solidFill>
+            <a:schemeClr val="accent1"/>
+          </a:solidFill>
+          <a:ln w="38100">
+            <a:solidFill>
+              <a:schemeClr val="bg1"/>
+            </a:solidFill>
+            <a:prstDash val="solid"/>
+          </a:ln>
+        </p:spPr>
+      </p:sp>
+      <p:sp>
+        <p:nvSpPr>
+          <p:cNvPr id="9" name="Text 7"/>
+          <p:cNvSpPr txBox="1"/>
+          <p:nvPr/>
+        </p:nvSpPr>
+        <p:spPr>
+          <a:xfrm>
+            <a:off x="3227832" y="1463040"/>
+            <a:ext cx="640080" cy="640080"/>
+          </a:xfrm>
+          <a:prstGeom prst="rect">
+            <a:avLst/>
+          </a:prstGeom>
+          <a:noFill/>
+          <a:ln/>
+        </p:spPr>
+        <p:txBody>
+          <a:bodyPr wrap="square" lIns="0" tIns="0" rIns="0" bIns="0" rtlCol="0" anchor="ctr"/>
+          <a:lstStyle/>
+          <a:p>
+            <a:pPr algn="ctr" indent="0" marL="0">
+              <a:buNone/>
+            </a:pPr>
+            <a:r>
+              <a:rPr lang="en-US" sz="1800" b="1" dirty="0">
+                <a:solidFill>
+                  <a:schemeClr val="bg1"/>
+                </a:solidFill>
+              </a:rPr>
+              <a:t>2</a:t>
+            </a:r>
+            <a:endParaRPr lang="en-US" sz="1800" dirty="0"/>
+          </a:p>
+        </p:txBody>
+      </p:sp>
+      <p:sp>
+        <p:nvSpPr>
+          <p:cNvPr id="10" name="Text 8"/>
+          <p:cNvSpPr txBox="1"/>
+          <p:nvPr/>
+        </p:nvSpPr>
+        <p:spPr>
+          <a:xfrm>
+            <a:off x="2679192" y="2240280"/>
+            <a:ext cx="1737360" cy="365760"/>
+          </a:xfrm>
+          <a:prstGeom prst="rect">
+            <a:avLst/>
+          </a:prstGeom>
+          <a:noFill/>
+          <a:ln/>
+        </p:spPr>
+        <p:txBody>
+          <a:bodyPr wrap="square" lIns="0" tIns="0" rIns="0" bIns="0" rtlCol="0" anchor="ctr"/>
+          <a:lstStyle/>
+          <a:p>
+            <a:pPr algn="ctr" indent="0" marL="0">
+              <a:buNone/>
+            </a:pPr>
+            <a:r>
+              <a:rPr lang="en-US" sz="1500" b="1" dirty="0">
+                <a:solidFill>
+                  <a:schemeClr val="tx1"/>
+                </a:solidFill>
+              </a:rPr>
+              <a:t>Build</a:t>
+            </a:r>
+            <a:endParaRPr lang="en-US" sz="1500" dirty="0"/>
+          </a:p>
+        </p:txBody>
+      </p:sp>
+      <p:sp>
+        <p:nvSpPr>
+          <p:cNvPr id="11" name="Text 9"/>
+          <p:cNvSpPr txBox="1"/>
+          <p:nvPr/>
+        </p:nvSpPr>
+        <p:spPr>
+          <a:xfrm>
+            <a:off x="2679192" y="2606040"/>
+            <a:ext cx="1737360" cy="548640"/>
+          </a:xfrm>
+          <a:prstGeom prst="rect">
+            <a:avLst/>
+          </a:prstGeom>
+          <a:noFill/>
+          <a:ln/>
+        </p:spPr>
+        <p:txBody>
+          <a:bodyPr wrap="square" lIns="0" tIns="0" rIns="0" bIns="0" rtlCol="0" anchor="t"/>
+          <a:lstStyle/>
+          <a:p>
+            <a:pPr algn="ctr" indent="0" marL="0">
+              <a:buNone/>
+            </a:pPr>
+            <a:r>
+              <a:rPr lang="en-US" sz="1100" dirty="0">
+                <a:solidFill>
+                  <a:schemeClr val="tx2"/>
+                </a:solidFill>
+              </a:rPr>
+              <a:t>GitHub изгражда сайта (≈ 30 s)</a:t>
+            </a:r>
+            <a:endParaRPr lang="en-US" sz="1100" dirty="0"/>
+          </a:p>
+        </p:txBody>
+      </p:sp>
+      <p:sp>
+        <p:nvSpPr>
+          <p:cNvPr id="12" name="Shape 10"/>
+          <p:cNvSpPr/>
+          <p:nvPr/>
+        </p:nvSpPr>
+        <p:spPr>
+          <a:xfrm>
+            <a:off x="5541264" y="1463040"/>
+            <a:ext cx="640080" cy="640080"/>
+          </a:xfrm>
+          <a:prstGeom prst="ellipse">
+            <a:avLst/>
+          </a:prstGeom>
+          <a:solidFill>
+            <a:schemeClr val="accent1"/>
+          </a:solidFill>
+          <a:ln w="38100">
+            <a:solidFill>
+              <a:schemeClr val="bg1"/>
+            </a:solidFill>
+            <a:prstDash val="solid"/>
+          </a:ln>
+        </p:spPr>
+      </p:sp>
+      <p:sp>
+        <p:nvSpPr>
+          <p:cNvPr id="13" name="Text 11"/>
+          <p:cNvSpPr txBox="1"/>
+          <p:nvPr/>
+        </p:nvSpPr>
+        <p:spPr>
+          <a:xfrm>
+            <a:off x="5541264" y="1463040"/>
+            <a:ext cx="640080" cy="640080"/>
+          </a:xfrm>
+          <a:prstGeom prst="rect">
+            <a:avLst/>
+          </a:prstGeom>
+          <a:noFill/>
+          <a:ln/>
+        </p:spPr>
+        <p:txBody>
+          <a:bodyPr wrap="square" lIns="0" tIns="0" rIns="0" bIns="0" rtlCol="0" anchor="ctr"/>
+          <a:lstStyle/>
+          <a:p>
+            <a:pPr algn="ctr" indent="0" marL="0">
+              <a:buNone/>
+            </a:pPr>
+            <a:r>
+              <a:rPr lang="en-US" sz="1800" b="1" dirty="0">
+                <a:solidFill>
+                  <a:schemeClr val="bg1"/>
+                </a:solidFill>
+              </a:rPr>
+              <a:t>3</a:t>
+            </a:r>
+            <a:endParaRPr lang="en-US" sz="1800" dirty="0"/>
+          </a:p>
+        </p:txBody>
+      </p:sp>
+      <p:sp>
+        <p:nvSpPr>
+          <p:cNvPr id="14" name="Text 12"/>
+          <p:cNvSpPr txBox="1"/>
+          <p:nvPr/>
+        </p:nvSpPr>
+        <p:spPr>
+          <a:xfrm>
+            <a:off x="4992624" y="2240280"/>
+            <a:ext cx="1737360" cy="365760"/>
+          </a:xfrm>
+          <a:prstGeom prst="rect">
+            <a:avLst/>
+          </a:prstGeom>
+          <a:noFill/>
+          <a:ln/>
+        </p:spPr>
+        <p:txBody>
+          <a:bodyPr wrap="square" lIns="0" tIns="0" rIns="0" bIns="0" rtlCol="0" anchor="ctr"/>
+          <a:lstStyle/>
+          <a:p>
+            <a:pPr algn="ctr" indent="0" marL="0">
+              <a:buNone/>
+            </a:pPr>
+            <a:r>
+              <a:rPr lang="en-US" sz="1500" b="1" dirty="0">
+                <a:solidFill>
+                  <a:schemeClr val="tx1"/>
+                </a:solidFill>
+              </a:rPr>
+              <a:t>Deploy</a:t>
+            </a:r>
+            <a:endParaRPr lang="en-US" sz="1500" dirty="0"/>
+          </a:p>
+        </p:txBody>
+      </p:sp>
+      <p:sp>
+        <p:nvSpPr>
+          <p:cNvPr id="15" name="Text 13"/>
+          <p:cNvSpPr txBox="1"/>
+          <p:nvPr/>
+        </p:nvSpPr>
+        <p:spPr>
+          <a:xfrm>
+            <a:off x="4992624" y="2606040"/>
+            <a:ext cx="1737360" cy="548640"/>
+          </a:xfrm>
+          <a:prstGeom prst="rect">
+            <a:avLst/>
+          </a:prstGeom>
+          <a:noFill/>
+          <a:ln/>
+        </p:spPr>
+        <p:txBody>
+          <a:bodyPr wrap="square" lIns="0" tIns="0" rIns="0" bIns="0" rtlCol="0" anchor="t"/>
+          <a:lstStyle/>
+          <a:p>
+            <a:pPr algn="ctr" indent="0" marL="0">
+              <a:buNone/>
+            </a:pPr>
+            <a:r>
+              <a:rPr lang="en-US" sz="1100" dirty="0">
+                <a:solidFill>
+                  <a:schemeClr val="tx2"/>
+                </a:solidFill>
+              </a:rPr>
+              <a:t>качване на urs.ir.bas.bg (≈ 30 s)</a:t>
+            </a:r>
+            <a:endParaRPr lang="en-US" sz="1100" dirty="0"/>
+          </a:p>
+        </p:txBody>
+      </p:sp>
+      <p:sp>
+        <p:nvSpPr>
+          <p:cNvPr id="16" name="Shape 14"/>
+          <p:cNvSpPr/>
+          <p:nvPr/>
+        </p:nvSpPr>
+        <p:spPr>
+          <a:xfrm>
+            <a:off x="7854696" y="1463040"/>
+            <a:ext cx="640080" cy="640080"/>
+          </a:xfrm>
+          <a:prstGeom prst="ellipse">
+            <a:avLst/>
+          </a:prstGeom>
+          <a:solidFill>
+            <a:schemeClr val="accent3"/>
+          </a:solidFill>
+          <a:ln w="38100">
+            <a:solidFill>
+              <a:schemeClr val="bg1"/>
+            </a:solidFill>
+            <a:prstDash val="solid"/>
+          </a:ln>
+        </p:spPr>
+      </p:sp>
+      <p:sp>
+        <p:nvSpPr>
+          <p:cNvPr id="17" name="Text 15"/>
+          <p:cNvSpPr txBox="1"/>
+          <p:nvPr/>
+        </p:nvSpPr>
+        <p:spPr>
+          <a:xfrm>
+            <a:off x="7854696" y="1463040"/>
+            <a:ext cx="640080" cy="640080"/>
+          </a:xfrm>
+          <a:prstGeom prst="rect">
+            <a:avLst/>
+          </a:prstGeom>
+          <a:noFill/>
+          <a:ln/>
+        </p:spPr>
+        <p:txBody>
+          <a:bodyPr wrap="square" lIns="0" tIns="0" rIns="0" bIns="0" rtlCol="0" anchor="ctr"/>
+          <a:lstStyle/>
+          <a:p>
+            <a:pPr algn="ctr" indent="0" marL="0">
+              <a:buNone/>
+            </a:pPr>
+            <a:r>
+              <a:rPr lang="en-US" sz="1800" b="1" dirty="0">
+                <a:solidFill>
+                  <a:schemeClr val="bg1"/>
+                </a:solidFill>
+              </a:rPr>
+              <a:t>4</a:t>
+            </a:r>
+            <a:endParaRPr lang="en-US" sz="1800" dirty="0"/>
+          </a:p>
+        </p:txBody>
+      </p:sp>
+      <p:sp>
+        <p:nvSpPr>
+          <p:cNvPr id="18" name="Text 16"/>
+          <p:cNvSpPr txBox="1"/>
+          <p:nvPr/>
+        </p:nvSpPr>
+        <p:spPr>
+          <a:xfrm>
+            <a:off x="7306056" y="2240280"/>
+            <a:ext cx="1737360" cy="365760"/>
+          </a:xfrm>
+          <a:prstGeom prst="rect">
+            <a:avLst/>
+          </a:prstGeom>
+          <a:noFill/>
+          <a:ln/>
+        </p:spPr>
+        <p:txBody>
+          <a:bodyPr wrap="square" lIns="0" tIns="0" rIns="0" bIns="0" rtlCol="0" anchor="ctr"/>
+          <a:lstStyle/>
+          <a:p>
+            <a:pPr algn="ctr" indent="0" marL="0">
+              <a:buNone/>
+            </a:pPr>
+            <a:r>
+              <a:rPr lang="en-US" sz="1500" b="1" dirty="0">
+                <a:solidFill>
+                  <a:schemeClr val="tx1"/>
+                </a:solidFill>
+              </a:rPr>
+              <a:t>Готово</a:t>
+            </a:r>
+            <a:endParaRPr lang="en-US" sz="1500" dirty="0"/>
+          </a:p>
+        </p:txBody>
+      </p:sp>
+      <p:sp>
+        <p:nvSpPr>
+          <p:cNvPr id="19" name="Text 17"/>
+          <p:cNvSpPr txBox="1"/>
+          <p:nvPr/>
+        </p:nvSpPr>
+        <p:spPr>
+          <a:xfrm>
+            <a:off x="7306056" y="2606040"/>
+            <a:ext cx="1737360" cy="548640"/>
+          </a:xfrm>
+          <a:prstGeom prst="rect">
+            <a:avLst/>
+          </a:prstGeom>
+          <a:noFill/>
+          <a:ln/>
+        </p:spPr>
+        <p:txBody>
+          <a:bodyPr wrap="square" lIns="0" tIns="0" rIns="0" bIns="0" rtlCol="0" anchor="t"/>
+          <a:lstStyle/>
+          <a:p>
+            <a:pPr algn="ctr" indent="0" marL="0">
+              <a:buNone/>
+            </a:pPr>
+            <a:r>
+              <a:rPr lang="en-US" sz="1100" dirty="0">
+                <a:solidFill>
+                  <a:schemeClr val="tx2"/>
+                </a:solidFill>
+              </a:rPr>
+              <a:t>Ctrl+F5 в браузъра</a:t>
+            </a:r>
+            <a:endParaRPr lang="en-US" sz="1100" dirty="0"/>
+          </a:p>
+        </p:txBody>
+      </p:sp>
+      <p:sp>
+        <p:nvSpPr>
+          <p:cNvPr id="20" name="Shape 18"/>
+          <p:cNvSpPr/>
+          <p:nvPr/>
+        </p:nvSpPr>
+        <p:spPr>
+          <a:xfrm>
+            <a:off x="457200" y="3429000"/>
+            <a:ext cx="8229600" cy="1143000"/>
+          </a:xfrm>
+          <a:prstGeom prst="roundRect">
+            <a:avLst>
+              <a:gd name="adj" fmla="val 6400"/>
+            </a:avLst>
+          </a:prstGeom>
+          <a:solidFill>
+            <a:schemeClr val="bg2"/>
+          </a:solidFill>
+          <a:ln w="12700">
+            <a:solidFill>
+              <a:schemeClr val="bg2"/>
+            </a:solidFill>
+            <a:prstDash val="solid"/>
+          </a:ln>
+        </p:spPr>
+      </p:sp>
+      <p:sp>
+        <p:nvSpPr>
+          <p:cNvPr id="21" name="Text 19"/>
+          <p:cNvSpPr txBox="1"/>
+          <p:nvPr/>
+        </p:nvSpPr>
+        <p:spPr>
+          <a:xfrm>
+            <a:off x="685800" y="3547872"/>
+            <a:ext cx="7863840" cy="960120"/>
+          </a:xfrm>
+          <a:prstGeom prst="rect">
+            <a:avLst/>
+          </a:prstGeom>
+          <a:noFill/>
+          <a:ln/>
+        </p:spPr>
+        <p:txBody>
+          <a:bodyPr wrap="square" lIns="0" tIns="0" rIns="0" bIns="0" rtlCol="0" anchor="t"/>
+          <a:lstStyle/>
+          <a:p>
+            <a:pPr marL="177800" indent="-177800">
+              <a:spcAft>
+                <a:spcPts val="500"/>
+              </a:spcAft>
+              <a:buSzPct val="100000"/>
+              <a:buChar char="•"/>
+            </a:pPr>
+            <a:r>
+              <a:rPr lang="en-US" sz="1200" b="1" dirty="0">
+                <a:solidFill>
+                  <a:schemeClr val="tx1"/>
+                </a:solidFill>
+              </a:rPr>
+              <a:t>Къде се появява новата публикация: </a:t>
+            </a:r>
+            <a:pPr indent="0" marL="0">
+              <a:spcAft>
+                <a:spcPts val="500"/>
+              </a:spcAft>
+              <a:buNone/>
+            </a:pPr>
+            <a:r>
+              <a:rPr lang="en-US" sz="1200" dirty="0">
+                <a:solidFill>
+                  <a:schemeClr val="tx1"/>
+                </a:solidFill>
+              </a:rPr>
+              <a:t>на годишната страница (Публикации → Архив), в „Обобщен отчет“ на всеки съавтор и в броя на научните направления.</a:t>
+            </a:r>
+            <a:endParaRPr lang="en-US" sz="1200" dirty="0"/>
+          </a:p>
+          <a:p>
+            <a:pPr marL="177800" indent="-177800">
+              <a:spcAft>
+                <a:spcPts val="500"/>
+              </a:spcAft>
+              <a:buSzPct val="100000"/>
+              <a:buChar char="•"/>
+            </a:pPr>
+            <a:r>
+              <a:rPr lang="en-US" sz="1200" b="1" dirty="0">
+                <a:solidFill>
+                  <a:schemeClr val="tx1"/>
+                </a:solidFill>
+              </a:rPr>
+              <a:t>Не виждате промяната? </a:t>
+            </a:r>
+            <a:pPr indent="0" marL="0">
+              <a:spcAft>
+                <a:spcPts val="500"/>
+              </a:spcAft>
+              <a:buNone/>
+            </a:pPr>
+            <a:r>
+              <a:rPr lang="en-US" sz="1200" dirty="0">
+                <a:solidFill>
+                  <a:schemeClr val="tx1"/>
+                </a:solidFill>
+              </a:rPr>
+              <a:t>Натиснете Ctrl+F5 или отворете страницата в прозорец „инкогнито“.</a:t>
+            </a:r>
+            <a:endParaRPr lang="en-US" sz="1200" dirty="0"/>
+          </a:p>
+        </p:txBody>
+      </p:sp>
+      <p:sp>
+        <p:nvSpPr>
+          <p:cNvPr id="25" name="Slide Number Placeholder 0"/>
+          <p:cNvSpPr>
+            <a:spLocks noGrp="1"/>
+          </p:cNvSpPr>
+          <p:nvPr>
+            <p:ph type="sldNum" sz="quarter" idx="4294967295"/>
+          </p:nvPr>
+        </p:nvSpPr>
+        <p:spPr>
+          <a:xfrm>
+            <a:off x="8229600" y="4800600"/>
+            <a:ext cx="457200" cy="228600"/>
+          </a:xfrm>
+          <a:prstGeom prst="rect">
+            <a:avLst/>
+          </a:prstGeom>
+          <a:extLst>
+            <a:ext uri="{C572A759-6A51-4108-AA02-DFA0A04FC94B}">
+              <ma14:wrappingTextBoxFlag xmlns:ma14="http://schemas.microsoft.com/office/mac/drawingml/2011/main" val="0"/>
+            </a:ext>
+          </a:extLst>
+        </p:spPr>
+        <p:txBody>
+          <a:bodyPr/>
+          <a:lstStyle>
+            <a:lvl1pPr>
+              <a:defRPr sz="900">
+                <a:solidFill>
+                  <a:schemeClr val="accent6"/>
+                </a:solidFill>
+              </a:defRPr>
+            </a:lvl1pPr>
+          </a:lstStyle>
+          <a:p>
+            <a:pPr algn="r"/>
+            <a:fld id="{F7021451-1387-4CA6-816F-3879F97B5CBC}" type="slidenum">
+              <a:rPr b="0" lang="en-US"/>
+              <a:t>22</a:t>
+            </a:fld>
+            <a:endParaRPr lang="en-US"/>
+          </a:p>
+        </p:txBody>
+      </p:sp>
+    </p:spTree>
+  </p:cSld>
+  <p:clrMapOvr>
+    <a:masterClrMapping/>
+  </p:clrMapOvr>
+</p:sld>
+</file>
+
+<file path=ppt/slides/slide23.xml><?xml version="1.0" encoding="utf-8"?>
+<p:sld xmlns:a="http://schemas.openxmlformats.org/drawingml/2006/main" xmlns:r="http://schemas.openxmlformats.org/officeDocument/2006/relationships" xmlns:p="http://schemas.openxmlformats.org/presentationml/2006/main">
+  <p:cSld name="Slide 23">
+    <p:spTree>
+      <p:nvGrpSpPr>
+        <p:cNvPr id="1" name=""/>
+        <p:cNvGrpSpPr/>
+        <p:nvPr/>
+      </p:nvGrpSpPr>
+      <p:grpSpPr>
+        <a:xfrm>
+          <a:off x="0" y="0"/>
+          <a:ext cx="0" cy="0"/>
+          <a:chOff x="0" y="0"/>
+          <a:chExt cx="0" cy="0"/>
+        </a:xfrm>
+      </p:grpSpPr>
+      <p:sp>
+        <p:nvSpPr>
+          <p:cNvPr id="2" name="Text 0"/>
+          <p:cNvSpPr/>
+          <p:nvPr>
+            <p:ph idx="100" type="title" hasCustomPrompt="1"/>
+          </p:nvPr>
+        </p:nvSpPr>
+        <p:spPr>
+          <a:xfrm>
+            <a:off x="457200" y="274320"/>
+            <a:ext cx="8229600" cy="640080"/>
+          </a:xfrm>
+          <a:prstGeom prst="rect">
+            <a:avLst/>
+          </a:prstGeom>
+          <a:noFill/>
+          <a:ln/>
+        </p:spPr>
+        <p:txBody>
+          <a:bodyPr wrap="square" lIns="0" tIns="0" rIns="0" bIns="0" rtlCol="0" anchor="ctr"/>
+          <a:lstStyle/>
+          <a:p>
+            <a:pPr algn="l" indent="0" marL="0">
+              <a:buNone/>
+            </a:pPr>
+            <a:r>
+              <a:rPr lang="en-US" sz="2600" b="1" dirty="0">
+                <a:solidFill>
+                  <a:schemeClr val="tx1"/>
+                </a:solidFill>
+              </a:rPr>
               <a:t>Помощ и полезни връзки</a:t>
             </a:r>
             <a:endParaRPr lang="en-US" sz="2600" dirty="0"/>
@@ -12125,7 +12767,7 @@
                   <a:schemeClr val="tx1"/>
                 </a:solidFill>
               </a:rPr>
-              <a:t>бутон „Помощ“ — APA, проверки, обновяване. Цитирания: „Помощ: цитирания“ в „Обобщен отчет“ (членовете с акаунт).</a:t>
+              <a:t>бутон „Помощ“ — APA, проверки, обновяване. Цитирания: „Помощ: цитирания“ в „Обобщен отчет“ (потребителите с акаунт).</a:t>
             </a:r>
             <a:endParaRPr lang="en-US" sz="1250" dirty="0"/>
           </a:p>
@@ -12298,7 +12940,7 @@
             <a:pPr algn="r"/>
             <a:fld id="{F7021451-1387-4CA6-816F-3879F97B5CBC}" type="slidenum">
               <a:rPr b="0" lang="en-US"/>
-              <a:t>22</a:t>
+              <a:t>23</a:t>
             </a:fld>
             <a:endParaRPr lang="en-US"/>
           </a:p>
@@ -12312,9 +12954,9 @@
 </p:sld>
 </file>
 
-<file path=ppt/slides/slide23.xml><?xml version="1.0" encoding="utf-8"?>
+<file path=ppt/slides/slide24.xml><?xml version="1.0" encoding="utf-8"?>
 <p:sld xmlns:a="http://schemas.openxmlformats.org/drawingml/2006/main" xmlns:r="http://schemas.openxmlformats.org/officeDocument/2006/relationships" xmlns:p="http://schemas.openxmlformats.org/presentationml/2006/main">
-  <p:cSld name="Slide 23">
+  <p:cSld name="Slide 24">
     <p:spTree>
       <p:nvGrpSpPr>
         <p:cNvPr id="1" name=""/>

--- a/public/docs/URSlab-rakovodstvo.pptx
+++ b/public/docs/URSlab-rakovodstvo.pptx
@@ -130,33 +130,33 @@
   <p:extLst>
     <p:ext uri="{521415D9-36F7-43E2-AB2F-B90AF26B5E84}">
       <p14:sectionLst xmlns:p14="http://schemas.microsoft.com/office/powerpoint/2010/main">
-        <p14:section name="Въведение" id="{4373e0c6-10e1-6d94-3821-3c204ebd2b7a}">
+        <p14:section name="Въведение" id="{8100474c-4782-c65a-562d-38513c919ebd}">
           <p14:sldIdLst>
             <p14:sldId id="256"/>
             <p14:sldId id="257"/>
           </p14:sldIdLst>
         </p14:section>
-        <p14:section name="Сайтът" id="{cf22c482-c23e-ee5a-04ee-2d172100de70}">
+        <p14:section name="Сайтът" id="{c689567c-8e20-fb92-bea9-2b982434c6d8}">
           <p14:sldIdLst>
             <p14:sldId id="258"/>
             <p14:sldId id="259"/>
           </p14:sldIdLst>
         </p14:section>
-        <p14:section name="Изследвания" id="{4cdc7932-b209-7cb4-d1d0-ac32e79265ac}">
+        <p14:section name="Изследвания" id="{a1d40387-ac95-21c4-702c-3173033658b5}">
           <p14:sldIdLst>
             <p14:sldId id="260"/>
             <p14:sldId id="261"/>
             <p14:sldId id="262"/>
           </p14:sldIdLst>
         </p14:section>
-        <p14:section name="Публикации" id="{56f72cb4-10f3-6548-03a0-bff30ec0390a}">
+        <p14:section name="Публикации" id="{6b918491-3179-8e71-aa86-f50def9e527c}">
           <p14:sldIdLst>
             <p14:sldId id="263"/>
             <p14:sldId id="264"/>
             <p14:sldId id="265"/>
           </p14:sldIdLst>
         </p14:section>
-        <p14:section name="Състав" id="{335c528e-71e7-30e6-b0c5-9bc4dab6d8a0}">
+        <p14:section name="Състав" id="{d1787245-1fd0-db2b-f44c-a2bca37530f0}">
           <p14:sldIdLst>
             <p14:sldId id="266"/>
             <p14:sldId id="267"/>
@@ -164,7 +164,7 @@
             <p14:sldId id="269"/>
           </p14:sldIdLst>
         </p14:section>
-        <p14:section name="Нова публикация" id="{37eca337-3d7c-754d-e9c8-f6e414d7ee46}">
+        <p14:section name="Нова публикация" id="{d3d90aa8-ca0b-3fd3-76b5-83a7ae8e2d6a}">
           <p14:sldIdLst>
             <p14:sldId id="270"/>
             <p14:sldId id="271"/>
@@ -174,7 +174,7 @@
             <p14:sldId id="275"/>
           </p14:sldIdLst>
         </p14:section>
-        <p14:section name="Обновяване" id="{5cf2ae7a-1cd1-c783-ca04-7baa5861cbeb}">
+        <p14:section name="Обновяване" id="{a9068507-997d-f72e-fbc0-39e62458a772}">
           <p14:sldIdLst>
             <p14:sldId id="276"/>
             <p14:sldId id="277"/>
@@ -5420,7 +5420,7 @@
                   <a:schemeClr val="tx1"/>
                 </a:solidFill>
               </a:rPr>
-              <a:t>Веднъж месечно и с бутона „Търси нови цитирания“. Всяко намерено цитиране е проверено; Системата сверява изданието със списъците на Scopus и WoS и предлага показател („← предложено“). Потвърждавате с една отметка.</a:t>
+              <a:t>Веднъж месечно и с бутона „Търси нови цитирания“ (около 20–25 мин.), вкл. списанията на БАН. Всяко цитиране е проверено; показателят се предлага по списъците на Scopus и WoS. Потвърждавате с една отметка.</a:t>
             </a:r>
             <a:endParaRPr lang="en-US" sz="1200" dirty="0"/>
           </a:p>
@@ -5568,7 +5568,7 @@
                   <a:schemeClr val="tx1"/>
                 </a:solidFill>
               </a:rPr>
-              <a:t>Точките по Минималните национални изисквания, стратегия за следващата длъжност и справка от регистъра на НАЦИД — като PDF само до вас и ръководителя. На сайта няма числа.</a:t>
+              <a:t>Точките по Минималните национални изисквания, стратегия за следващата длъжност и справка от регистъра на НАЦИД — PDF само до вас и ръководителя, до 2–3 минути. На сайта няма числа.</a:t>
             </a:r>
             <a:endParaRPr lang="en-US" sz="1200" dirty="0"/>
           </a:p>

--- a/public/docs/URSlab-rakovodstvo.pptx
+++ b/public/docs/URSlab-rakovodstvo.pptx
@@ -130,33 +130,33 @@
   <p:extLst>
     <p:ext uri="{521415D9-36F7-43E2-AB2F-B90AF26B5E84}">
       <p14:sectionLst xmlns:p14="http://schemas.microsoft.com/office/powerpoint/2010/main">
-        <p14:section name="Въведение" id="{8100474c-4782-c65a-562d-38513c919ebd}">
+        <p14:section name="Въведение" id="{510414cb-8040-b101-aee1-015dacf0eb7a}">
           <p14:sldIdLst>
             <p14:sldId id="256"/>
             <p14:sldId id="257"/>
           </p14:sldIdLst>
         </p14:section>
-        <p14:section name="Сайтът" id="{c689567c-8e20-fb92-bea9-2b982434c6d8}">
+        <p14:section name="Сайтът" id="{11723c35-021e-52e5-225f-36a70355a2d3}">
           <p14:sldIdLst>
             <p14:sldId id="258"/>
             <p14:sldId id="259"/>
           </p14:sldIdLst>
         </p14:section>
-        <p14:section name="Изследвания" id="{a1d40387-ac95-21c4-702c-3173033658b5}">
+        <p14:section name="Изследвания" id="{7c58c11d-9dcd-460c-71cf-10b60774e17d}">
           <p14:sldIdLst>
             <p14:sldId id="260"/>
             <p14:sldId id="261"/>
             <p14:sldId id="262"/>
           </p14:sldIdLst>
         </p14:section>
-        <p14:section name="Публикации" id="{6b918491-3179-8e71-aa86-f50def9e527c}">
+        <p14:section name="Публикации" id="{e8e06740-9cb1-8559-3b4e-1d0f5cf57c68}">
           <p14:sldIdLst>
             <p14:sldId id="263"/>
             <p14:sldId id="264"/>
             <p14:sldId id="265"/>
           </p14:sldIdLst>
         </p14:section>
-        <p14:section name="Състав" id="{d1787245-1fd0-db2b-f44c-a2bca37530f0}">
+        <p14:section name="Състав" id="{a9e871a0-5564-eee1-baf9-51b901465e7b}">
           <p14:sldIdLst>
             <p14:sldId id="266"/>
             <p14:sldId id="267"/>
@@ -164,7 +164,7 @@
             <p14:sldId id="269"/>
           </p14:sldIdLst>
         </p14:section>
-        <p14:section name="Нова публикация" id="{d3d90aa8-ca0b-3fd3-76b5-83a7ae8e2d6a}">
+        <p14:section name="Нова публикация" id="{6eaada22-a173-cbad-6d81-68890da6ae72}">
           <p14:sldIdLst>
             <p14:sldId id="270"/>
             <p14:sldId id="271"/>
@@ -174,7 +174,7 @@
             <p14:sldId id="275"/>
           </p14:sldIdLst>
         </p14:section>
-        <p14:section name="Обновяване" id="{a9068507-997d-f72e-fbc0-39e62458a772}">
+        <p14:section name="Обновяване" id="{326a9e8a-abe5-a96a-0ac2-3ed8927c333c}">
           <p14:sldIdLst>
             <p14:sldId id="276"/>
             <p14:sldId id="277"/>
@@ -5420,7 +5420,7 @@
                   <a:schemeClr val="tx1"/>
                 </a:solidFill>
               </a:rPr>
-              <a:t>Веднъж месечно и с бутона „Търси нови цитирания“ (около 20–25 мин.), вкл. списанията на БАН. Всяко цитиране е проверено; показателят се предлага по списъците на Scopus и WoS. Потвърждавате с една отметка.</a:t>
+              <a:t>Веднъж месечно и с бутона „Търси нови цитирания“ (около 20–25 мин.), вкл. списанията на БАН. Като „Таблица по имейл“: от вашия отчет, писмо до вас и ръководителя. Потвърждавате с една отметка.</a:t>
             </a:r>
             <a:endParaRPr lang="en-US" sz="1200" dirty="0"/>
           </a:p>

--- a/public/docs/URSlab-rakovodstvo.pptx
+++ b/public/docs/URSlab-rakovodstvo.pptx
@@ -130,33 +130,33 @@
   <p:extLst>
     <p:ext uri="{521415D9-36F7-43E2-AB2F-B90AF26B5E84}">
       <p14:sectionLst xmlns:p14="http://schemas.microsoft.com/office/powerpoint/2010/main">
-        <p14:section name="Въведение" id="{510414cb-8040-b101-aee1-015dacf0eb7a}">
+        <p14:section name="Въведение" id="{1d62dfc8-76d4-b015-e959-712415374ea7}">
           <p14:sldIdLst>
             <p14:sldId id="256"/>
             <p14:sldId id="257"/>
           </p14:sldIdLst>
         </p14:section>
-        <p14:section name="Сайтът" id="{11723c35-021e-52e5-225f-36a70355a2d3}">
+        <p14:section name="Сайтът" id="{fafef35e-0fe7-72ec-3f1c-1336b22b778b}">
           <p14:sldIdLst>
             <p14:sldId id="258"/>
             <p14:sldId id="259"/>
           </p14:sldIdLst>
         </p14:section>
-        <p14:section name="Изследвания" id="{7c58c11d-9dcd-460c-71cf-10b60774e17d}">
+        <p14:section name="Изследвания" id="{75719129-78b1-e9b4-5cb0-587ddb9ec246}">
           <p14:sldIdLst>
             <p14:sldId id="260"/>
             <p14:sldId id="261"/>
             <p14:sldId id="262"/>
           </p14:sldIdLst>
         </p14:section>
-        <p14:section name="Публикации" id="{e8e06740-9cb1-8559-3b4e-1d0f5cf57c68}">
+        <p14:section name="Публикации" id="{da46bdb1-5cd6-99a2-04f9-a0ae65131a1d}">
           <p14:sldIdLst>
             <p14:sldId id="263"/>
             <p14:sldId id="264"/>
             <p14:sldId id="265"/>
           </p14:sldIdLst>
         </p14:section>
-        <p14:section name="Състав" id="{a9e871a0-5564-eee1-baf9-51b901465e7b}">
+        <p14:section name="Състав" id="{add2267a-0e5c-1210-b168-c08d750189c9}">
           <p14:sldIdLst>
             <p14:sldId id="266"/>
             <p14:sldId id="267"/>
@@ -164,7 +164,7 @@
             <p14:sldId id="269"/>
           </p14:sldIdLst>
         </p14:section>
-        <p14:section name="Нова публикация" id="{6eaada22-a173-cbad-6d81-68890da6ae72}">
+        <p14:section name="Нова публикация" id="{051f2b0d-c3ff-bb2d-f410-11137cfa5e89}">
           <p14:sldIdLst>
             <p14:sldId id="270"/>
             <p14:sldId id="271"/>
@@ -174,7 +174,7 @@
             <p14:sldId id="275"/>
           </p14:sldIdLst>
         </p14:section>
-        <p14:section name="Обновяване" id="{326a9e8a-abe5-a96a-0ac2-3ed8927c333c}">
+        <p14:section name="Обновяване" id="{ff90217b-d48d-a064-d6cb-293c8c462709}">
           <p14:sldIdLst>
             <p14:sldId id="276"/>
             <p14:sldId id="277"/>
@@ -5420,7 +5420,7 @@
                   <a:schemeClr val="tx1"/>
                 </a:solidFill>
               </a:rPr>
-              <a:t>Веднъж месечно и с бутона „Търси нови цитирания“ (около 20–25 мин.), вкл. списанията на БАН. Като „Таблица по имейл“: от вашия отчет, писмо до вас и ръководителя. Потвърждавате с една отметка.</a:t>
+              <a:t>Веднъж месечно и с бутона „Търси нови цитирания“ (около 20–25 мин.), вкл. списанията на БАН. По имейл получавате само своята част. Потвърждавате с една отметка.</a:t>
             </a:r>
             <a:endParaRPr lang="en-US" sz="1200" dirty="0"/>
           </a:p>
